--- a/Week_3/Workshop/Workshop_2.pptx
+++ b/Week_3/Workshop/Workshop_2.pptx
@@ -5,11 +5,22 @@
     <p:sldMasterId id="2147483648" r:id="rId1"/>
   </p:sldMasterIdLst>
   <p:notesMasterIdLst>
-    <p:notesMasterId r:id="rId4"/>
+    <p:notesMasterId r:id="rId15"/>
   </p:notesMasterIdLst>
   <p:sldIdLst>
     <p:sldId id="256" r:id="rId2"/>
-    <p:sldId id="257" r:id="rId3"/>
+    <p:sldId id="258" r:id="rId3"/>
+    <p:sldId id="265" r:id="rId4"/>
+    <p:sldId id="266" r:id="rId5"/>
+    <p:sldId id="257" r:id="rId6"/>
+    <p:sldId id="267" r:id="rId7"/>
+    <p:sldId id="259" r:id="rId8"/>
+    <p:sldId id="260" r:id="rId9"/>
+    <p:sldId id="261" r:id="rId10"/>
+    <p:sldId id="262" r:id="rId11"/>
+    <p:sldId id="263" r:id="rId12"/>
+    <p:sldId id="264" r:id="rId13"/>
+    <p:sldId id="268" r:id="rId14"/>
   </p:sldIdLst>
   <p:sldSz cx="12192000" cy="6858000"/>
   <p:notesSz cx="6858000" cy="9144000"/>
@@ -209,7 +220,7 @@
           <a:p>
             <a:fld id="{3F60DEE0-ACC4-494E-B2AA-0D98D5A4A875}" type="datetimeFigureOut">
               <a:rPr lang="en-AU" smtClean="0"/>
-              <a:t>5/8/2025</a:t>
+              <a:t>12/8/2025</a:t>
             </a:fld>
             <a:endParaRPr lang="en-AU"/>
           </a:p>
@@ -477,6 +488,289 @@
 </p:notesMaster>
 </file>
 
+<file path=ppt/notesSlides/notesSlide1.xml><?xml version="1.0" encoding="utf-8"?>
+<p:notes xmlns:a="http://schemas.openxmlformats.org/drawingml/2006/main" xmlns:r="http://schemas.openxmlformats.org/officeDocument/2006/relationships" xmlns:p="http://schemas.openxmlformats.org/presentationml/2006/main">
+  <p:cSld>
+    <p:spTree>
+      <p:nvGrpSpPr>
+        <p:cNvPr id="1" name=""/>
+        <p:cNvGrpSpPr/>
+        <p:nvPr/>
+      </p:nvGrpSpPr>
+      <p:grpSpPr>
+        <a:xfrm>
+          <a:off x="0" y="0"/>
+          <a:ext cx="0" cy="0"/>
+          <a:chOff x="0" y="0"/>
+          <a:chExt cx="0" cy="0"/>
+        </a:xfrm>
+      </p:grpSpPr>
+      <p:sp>
+        <p:nvSpPr>
+          <p:cNvPr id="2" name="Slide Image Placeholder 1"/>
+          <p:cNvSpPr>
+            <a:spLocks noGrp="1" noRot="1" noChangeAspect="1"/>
+          </p:cNvSpPr>
+          <p:nvPr>
+            <p:ph type="sldImg"/>
+          </p:nvPr>
+        </p:nvSpPr>
+        <p:spPr/>
+      </p:sp>
+      <p:sp>
+        <p:nvSpPr>
+          <p:cNvPr id="3" name="Notes Placeholder 2"/>
+          <p:cNvSpPr>
+            <a:spLocks noGrp="1"/>
+          </p:cNvSpPr>
+          <p:nvPr>
+            <p:ph type="body" idx="1"/>
+          </p:nvPr>
+        </p:nvSpPr>
+        <p:spPr/>
+        <p:txBody>
+          <a:bodyPr/>
+          <a:lstStyle/>
+          <a:p>
+            <a:pPr>
+              <a:buFont typeface="Arial" panose="020B0604020202020204" pitchFamily="34" charset="0"/>
+              <a:buChar char="•"/>
+            </a:pPr>
+            <a:r>
+              <a:rPr lang="en-AU" b="0" dirty="0"/>
+              <a:t>This dataset has three rows and five columns</a:t>
+            </a:r>
+          </a:p>
+          <a:p>
+            <a:pPr>
+              <a:buFont typeface="Arial" panose="020B0604020202020204" pitchFamily="34" charset="0"/>
+              <a:buChar char="•"/>
+            </a:pPr>
+            <a:r>
+              <a:rPr lang="en-AU" b="0" dirty="0"/>
+              <a:t>This is a data frame created by multiple lists</a:t>
+            </a:r>
+          </a:p>
+        </p:txBody>
+      </p:sp>
+      <p:sp>
+        <p:nvSpPr>
+          <p:cNvPr id="4" name="Slide Number Placeholder 3"/>
+          <p:cNvSpPr>
+            <a:spLocks noGrp="1"/>
+          </p:cNvSpPr>
+          <p:nvPr>
+            <p:ph type="sldNum" sz="quarter" idx="5"/>
+          </p:nvPr>
+        </p:nvSpPr>
+        <p:spPr/>
+        <p:txBody>
+          <a:bodyPr/>
+          <a:lstStyle/>
+          <a:p>
+            <a:fld id="{8227185B-724B-4A4D-9332-480F4441395B}" type="slidenum">
+              <a:rPr lang="en-AU" smtClean="0"/>
+              <a:t>2</a:t>
+            </a:fld>
+            <a:endParaRPr lang="en-AU"/>
+          </a:p>
+        </p:txBody>
+      </p:sp>
+    </p:spTree>
+    <p:extLst>
+      <p:ext uri="{BB962C8B-B14F-4D97-AF65-F5344CB8AC3E}">
+        <p14:creationId xmlns:p14="http://schemas.microsoft.com/office/powerpoint/2010/main" val="4049859637"/>
+      </p:ext>
+    </p:extLst>
+  </p:cSld>
+  <p:clrMapOvr>
+    <a:masterClrMapping/>
+  </p:clrMapOvr>
+</p:notes>
+</file>
+
+<file path=ppt/notesSlides/notesSlide2.xml><?xml version="1.0" encoding="utf-8"?>
+<p:notes xmlns:a="http://schemas.openxmlformats.org/drawingml/2006/main" xmlns:r="http://schemas.openxmlformats.org/officeDocument/2006/relationships" xmlns:p="http://schemas.openxmlformats.org/presentationml/2006/main">
+  <p:cSld>
+    <p:spTree>
+      <p:nvGrpSpPr>
+        <p:cNvPr id="1" name=""/>
+        <p:cNvGrpSpPr/>
+        <p:nvPr/>
+      </p:nvGrpSpPr>
+      <p:grpSpPr>
+        <a:xfrm>
+          <a:off x="0" y="0"/>
+          <a:ext cx="0" cy="0"/>
+          <a:chOff x="0" y="0"/>
+          <a:chExt cx="0" cy="0"/>
+        </a:xfrm>
+      </p:grpSpPr>
+      <p:sp>
+        <p:nvSpPr>
+          <p:cNvPr id="2" name="Slide Image Placeholder 1"/>
+          <p:cNvSpPr>
+            <a:spLocks noGrp="1" noRot="1" noChangeAspect="1"/>
+          </p:cNvSpPr>
+          <p:nvPr>
+            <p:ph type="sldImg"/>
+          </p:nvPr>
+        </p:nvSpPr>
+        <p:spPr/>
+      </p:sp>
+      <p:sp>
+        <p:nvSpPr>
+          <p:cNvPr id="3" name="Notes Placeholder 2"/>
+          <p:cNvSpPr>
+            <a:spLocks noGrp="1"/>
+          </p:cNvSpPr>
+          <p:nvPr>
+            <p:ph type="body" idx="1"/>
+          </p:nvPr>
+        </p:nvSpPr>
+        <p:spPr/>
+        <p:txBody>
+          <a:bodyPr/>
+          <a:lstStyle/>
+          <a:p>
+            <a:r>
+              <a:rPr lang="en-AU" dirty="0"/>
+              <a:t>Filters rows where the region is either East or West ‘ indicated by | ‘ </a:t>
+            </a:r>
+          </a:p>
+        </p:txBody>
+      </p:sp>
+      <p:sp>
+        <p:nvSpPr>
+          <p:cNvPr id="4" name="Slide Number Placeholder 3"/>
+          <p:cNvSpPr>
+            <a:spLocks noGrp="1"/>
+          </p:cNvSpPr>
+          <p:nvPr>
+            <p:ph type="sldNum" sz="quarter" idx="5"/>
+          </p:nvPr>
+        </p:nvSpPr>
+        <p:spPr/>
+        <p:txBody>
+          <a:bodyPr/>
+          <a:lstStyle/>
+          <a:p>
+            <a:fld id="{8227185B-724B-4A4D-9332-480F4441395B}" type="slidenum">
+              <a:rPr lang="en-AU" smtClean="0"/>
+              <a:t>3</a:t>
+            </a:fld>
+            <a:endParaRPr lang="en-AU"/>
+          </a:p>
+        </p:txBody>
+      </p:sp>
+    </p:spTree>
+    <p:extLst>
+      <p:ext uri="{BB962C8B-B14F-4D97-AF65-F5344CB8AC3E}">
+        <p14:creationId xmlns:p14="http://schemas.microsoft.com/office/powerpoint/2010/main" val="2331522970"/>
+      </p:ext>
+    </p:extLst>
+  </p:cSld>
+  <p:clrMapOvr>
+    <a:masterClrMapping/>
+  </p:clrMapOvr>
+</p:notes>
+</file>
+
+<file path=ppt/notesSlides/notesSlide3.xml><?xml version="1.0" encoding="utf-8"?>
+<p:notes xmlns:a="http://schemas.openxmlformats.org/drawingml/2006/main" xmlns:r="http://schemas.openxmlformats.org/officeDocument/2006/relationships" xmlns:p="http://schemas.openxmlformats.org/presentationml/2006/main">
+  <p:cSld>
+    <p:spTree>
+      <p:nvGrpSpPr>
+        <p:cNvPr id="1" name=""/>
+        <p:cNvGrpSpPr/>
+        <p:nvPr/>
+      </p:nvGrpSpPr>
+      <p:grpSpPr>
+        <a:xfrm>
+          <a:off x="0" y="0"/>
+          <a:ext cx="0" cy="0"/>
+          <a:chOff x="0" y="0"/>
+          <a:chExt cx="0" cy="0"/>
+        </a:xfrm>
+      </p:grpSpPr>
+      <p:sp>
+        <p:nvSpPr>
+          <p:cNvPr id="2" name="Slide Image Placeholder 1"/>
+          <p:cNvSpPr>
+            <a:spLocks noGrp="1" noRot="1" noChangeAspect="1"/>
+          </p:cNvSpPr>
+          <p:nvPr>
+            <p:ph type="sldImg"/>
+          </p:nvPr>
+        </p:nvSpPr>
+        <p:spPr/>
+      </p:sp>
+      <p:sp>
+        <p:nvSpPr>
+          <p:cNvPr id="3" name="Notes Placeholder 2"/>
+          <p:cNvSpPr>
+            <a:spLocks noGrp="1"/>
+          </p:cNvSpPr>
+          <p:nvPr>
+            <p:ph type="body" idx="1"/>
+          </p:nvPr>
+        </p:nvSpPr>
+        <p:spPr/>
+        <p:txBody>
+          <a:bodyPr/>
+          <a:lstStyle/>
+          <a:p>
+            <a:r>
+              <a:rPr lang="en-AU" dirty="0"/>
+              <a:t>It sequentially passes the grades </a:t>
+            </a:r>
+            <a:r>
+              <a:rPr lang="en-AU" dirty="0" err="1"/>
+              <a:t>dataframe</a:t>
+            </a:r>
+            <a:r>
+              <a:rPr lang="en-AU" dirty="0"/>
+              <a:t> through each function, eliminating the need for nested function calls</a:t>
+            </a:r>
+          </a:p>
+        </p:txBody>
+      </p:sp>
+      <p:sp>
+        <p:nvSpPr>
+          <p:cNvPr id="4" name="Slide Number Placeholder 3"/>
+          <p:cNvSpPr>
+            <a:spLocks noGrp="1"/>
+          </p:cNvSpPr>
+          <p:nvPr>
+            <p:ph type="sldNum" sz="quarter" idx="5"/>
+          </p:nvPr>
+        </p:nvSpPr>
+        <p:spPr/>
+        <p:txBody>
+          <a:bodyPr/>
+          <a:lstStyle/>
+          <a:p>
+            <a:fld id="{8227185B-724B-4A4D-9332-480F4441395B}" type="slidenum">
+              <a:rPr lang="en-AU" smtClean="0"/>
+              <a:t>4</a:t>
+            </a:fld>
+            <a:endParaRPr lang="en-AU"/>
+          </a:p>
+        </p:txBody>
+      </p:sp>
+    </p:spTree>
+    <p:extLst>
+      <p:ext uri="{BB962C8B-B14F-4D97-AF65-F5344CB8AC3E}">
+        <p14:creationId xmlns:p14="http://schemas.microsoft.com/office/powerpoint/2010/main" val="1171695761"/>
+      </p:ext>
+    </p:extLst>
+  </p:cSld>
+  <p:clrMapOvr>
+    <a:masterClrMapping/>
+  </p:clrMapOvr>
+</p:notes>
+</file>
+
 <file path=ppt/slideLayouts/slideLayout1.xml><?xml version="1.0" encoding="utf-8"?>
 <p:sldLayout xmlns:a="http://schemas.openxmlformats.org/drawingml/2006/main" xmlns:r="http://schemas.openxmlformats.org/officeDocument/2006/relationships" xmlns:p="http://schemas.openxmlformats.org/presentationml/2006/main" type="title" preserve="1">
   <p:cSld name="Title Slide">
@@ -626,7 +920,7 @@
           <a:p>
             <a:fld id="{AFB82B32-26EB-9840-B5EC-F8C086CC962D}" type="datetimeFigureOut">
               <a:rPr lang="en-AU" smtClean="0"/>
-              <a:t>5/8/2025</a:t>
+              <a:t>12/8/2025</a:t>
             </a:fld>
             <a:endParaRPr lang="en-AU"/>
           </a:p>
@@ -826,7 +1120,7 @@
           <a:p>
             <a:fld id="{AFB82B32-26EB-9840-B5EC-F8C086CC962D}" type="datetimeFigureOut">
               <a:rPr lang="en-AU" smtClean="0"/>
-              <a:t>5/8/2025</a:t>
+              <a:t>12/8/2025</a:t>
             </a:fld>
             <a:endParaRPr lang="en-AU"/>
           </a:p>
@@ -1036,7 +1330,7 @@
           <a:p>
             <a:fld id="{AFB82B32-26EB-9840-B5EC-F8C086CC962D}" type="datetimeFigureOut">
               <a:rPr lang="en-AU" smtClean="0"/>
-              <a:t>5/8/2025</a:t>
+              <a:t>12/8/2025</a:t>
             </a:fld>
             <a:endParaRPr lang="en-AU"/>
           </a:p>
@@ -1236,7 +1530,7 @@
           <a:p>
             <a:fld id="{AFB82B32-26EB-9840-B5EC-F8C086CC962D}" type="datetimeFigureOut">
               <a:rPr lang="en-AU" smtClean="0"/>
-              <a:t>5/8/2025</a:t>
+              <a:t>12/8/2025</a:t>
             </a:fld>
             <a:endParaRPr lang="en-AU"/>
           </a:p>
@@ -1512,7 +1806,7 @@
           <a:p>
             <a:fld id="{AFB82B32-26EB-9840-B5EC-F8C086CC962D}" type="datetimeFigureOut">
               <a:rPr lang="en-AU" smtClean="0"/>
-              <a:t>5/8/2025</a:t>
+              <a:t>12/8/2025</a:t>
             </a:fld>
             <a:endParaRPr lang="en-AU"/>
           </a:p>
@@ -1780,7 +2074,7 @@
           <a:p>
             <a:fld id="{AFB82B32-26EB-9840-B5EC-F8C086CC962D}" type="datetimeFigureOut">
               <a:rPr lang="en-AU" smtClean="0"/>
-              <a:t>5/8/2025</a:t>
+              <a:t>12/8/2025</a:t>
             </a:fld>
             <a:endParaRPr lang="en-AU"/>
           </a:p>
@@ -2195,7 +2489,7 @@
           <a:p>
             <a:fld id="{AFB82B32-26EB-9840-B5EC-F8C086CC962D}" type="datetimeFigureOut">
               <a:rPr lang="en-AU" smtClean="0"/>
-              <a:t>5/8/2025</a:t>
+              <a:t>12/8/2025</a:t>
             </a:fld>
             <a:endParaRPr lang="en-AU"/>
           </a:p>
@@ -2337,7 +2631,7 @@
           <a:p>
             <a:fld id="{AFB82B32-26EB-9840-B5EC-F8C086CC962D}" type="datetimeFigureOut">
               <a:rPr lang="en-AU" smtClean="0"/>
-              <a:t>5/8/2025</a:t>
+              <a:t>12/8/2025</a:t>
             </a:fld>
             <a:endParaRPr lang="en-AU"/>
           </a:p>
@@ -2450,7 +2744,7 @@
           <a:p>
             <a:fld id="{AFB82B32-26EB-9840-B5EC-F8C086CC962D}" type="datetimeFigureOut">
               <a:rPr lang="en-AU" smtClean="0"/>
-              <a:t>5/8/2025</a:t>
+              <a:t>12/8/2025</a:t>
             </a:fld>
             <a:endParaRPr lang="en-AU"/>
           </a:p>
@@ -2763,7 +3057,7 @@
           <a:p>
             <a:fld id="{AFB82B32-26EB-9840-B5EC-F8C086CC962D}" type="datetimeFigureOut">
               <a:rPr lang="en-AU" smtClean="0"/>
-              <a:t>5/8/2025</a:t>
+              <a:t>12/8/2025</a:t>
             </a:fld>
             <a:endParaRPr lang="en-AU"/>
           </a:p>
@@ -3052,7 +3346,7 @@
           <a:p>
             <a:fld id="{AFB82B32-26EB-9840-B5EC-F8C086CC962D}" type="datetimeFigureOut">
               <a:rPr lang="en-AU" smtClean="0"/>
-              <a:t>5/8/2025</a:t>
+              <a:t>12/8/2025</a:t>
             </a:fld>
             <a:endParaRPr lang="en-AU"/>
           </a:p>
@@ -3295,7 +3589,7 @@
           <a:p>
             <a:fld id="{AFB82B32-26EB-9840-B5EC-F8C086CC962D}" type="datetimeFigureOut">
               <a:rPr lang="en-AU" smtClean="0"/>
-              <a:t>5/8/2025</a:t>
+              <a:t>12/8/2025</a:t>
             </a:fld>
             <a:endParaRPr lang="en-AU"/>
           </a:p>
@@ -3789,6 +4083,859 @@
 </p:sld>
 </file>
 
+<file path=ppt/slides/slide10.xml><?xml version="1.0" encoding="utf-8"?>
+<p:sld xmlns:a="http://schemas.openxmlformats.org/drawingml/2006/main" xmlns:r="http://schemas.openxmlformats.org/officeDocument/2006/relationships" xmlns:p="http://schemas.openxmlformats.org/presentationml/2006/main">
+  <p:cSld>
+    <p:spTree>
+      <p:nvGrpSpPr>
+        <p:cNvPr id="1" name="">
+          <a:extLst>
+            <a:ext uri="{FF2B5EF4-FFF2-40B4-BE49-F238E27FC236}">
+              <a16:creationId xmlns:a16="http://schemas.microsoft.com/office/drawing/2014/main" id="{DF265FCE-B486-764E-9DE0-36F3CBE6C67B}"/>
+            </a:ext>
+          </a:extLst>
+        </p:cNvPr>
+        <p:cNvGrpSpPr/>
+        <p:nvPr/>
+      </p:nvGrpSpPr>
+      <p:grpSpPr>
+        <a:xfrm>
+          <a:off x="0" y="0"/>
+          <a:ext cx="0" cy="0"/>
+          <a:chOff x="0" y="0"/>
+          <a:chExt cx="0" cy="0"/>
+        </a:xfrm>
+      </p:grpSpPr>
+      <p:sp>
+        <p:nvSpPr>
+          <p:cNvPr id="2" name="Title 1">
+            <a:extLst>
+              <a:ext uri="{FF2B5EF4-FFF2-40B4-BE49-F238E27FC236}">
+                <a16:creationId xmlns:a16="http://schemas.microsoft.com/office/drawing/2014/main" id="{6E3F5BE2-3428-E9C5-C02A-8AC89C056CA0}"/>
+              </a:ext>
+            </a:extLst>
+          </p:cNvPr>
+          <p:cNvSpPr>
+            <a:spLocks noGrp="1"/>
+          </p:cNvSpPr>
+          <p:nvPr>
+            <p:ph type="title"/>
+          </p:nvPr>
+        </p:nvSpPr>
+        <p:spPr/>
+        <p:txBody>
+          <a:bodyPr/>
+          <a:lstStyle/>
+          <a:p>
+            <a:r>
+              <a:rPr lang="en-AU" b="1" dirty="0"/>
+              <a:t>Project Protocol (10%)</a:t>
+            </a:r>
+          </a:p>
+        </p:txBody>
+      </p:sp>
+      <p:sp>
+        <p:nvSpPr>
+          <p:cNvPr id="3" name="Content Placeholder 2">
+            <a:extLst>
+              <a:ext uri="{FF2B5EF4-FFF2-40B4-BE49-F238E27FC236}">
+                <a16:creationId xmlns:a16="http://schemas.microsoft.com/office/drawing/2014/main" id="{A3BFE6F9-11EF-A108-7F36-AB07327F9EF1}"/>
+              </a:ext>
+            </a:extLst>
+          </p:cNvPr>
+          <p:cNvSpPr>
+            <a:spLocks noGrp="1"/>
+          </p:cNvSpPr>
+          <p:nvPr>
+            <p:ph idx="1"/>
+          </p:nvPr>
+        </p:nvSpPr>
+        <p:spPr>
+          <a:xfrm>
+            <a:off x="490654" y="1402080"/>
+            <a:ext cx="10863146" cy="5455920"/>
+          </a:xfrm>
+        </p:spPr>
+        <p:txBody>
+          <a:bodyPr>
+            <a:normAutofit fontScale="92500" lnSpcReduction="20000"/>
+          </a:bodyPr>
+          <a:lstStyle/>
+          <a:p>
+            <a:r>
+              <a:rPr lang="en-AU" dirty="0"/>
+              <a:t>Provide </a:t>
+            </a:r>
+            <a:r>
+              <a:rPr lang="en-AU" b="1" dirty="0"/>
+              <a:t>5+ steps</a:t>
+            </a:r>
+            <a:r>
+              <a:rPr lang="en-AU" dirty="0"/>
+              <a:t> of cleaning, exploring, transforming project data</a:t>
+            </a:r>
+          </a:p>
+          <a:p>
+            <a:endParaRPr lang="en-AU" dirty="0"/>
+          </a:p>
+          <a:p>
+            <a:r>
+              <a:rPr lang="en-AU" dirty="0"/>
+              <a:t>At least </a:t>
+            </a:r>
+            <a:r>
+              <a:rPr lang="en-AU" b="1" dirty="0"/>
+              <a:t>2 steps</a:t>
+            </a:r>
+            <a:r>
+              <a:rPr lang="en-AU" dirty="0"/>
+              <a:t> use pipes (%&gt;%)</a:t>
+            </a:r>
+          </a:p>
+          <a:p>
+            <a:endParaRPr lang="en-AU" dirty="0"/>
+          </a:p>
+          <a:p>
+            <a:r>
+              <a:rPr lang="en-AU" b="1" dirty="0"/>
+              <a:t>3+ steps</a:t>
+            </a:r>
+            <a:r>
+              <a:rPr lang="en-AU" dirty="0"/>
+              <a:t> must address </a:t>
+            </a:r>
+            <a:r>
+              <a:rPr lang="en-AU" dirty="0" err="1"/>
+              <a:t>Zuur</a:t>
+            </a:r>
+            <a:r>
+              <a:rPr lang="en-AU" dirty="0"/>
+              <a:t> et al. (2010) checks:</a:t>
+            </a:r>
+          </a:p>
+          <a:p>
+            <a:pPr lvl="1"/>
+            <a:r>
+              <a:rPr lang="en-AU" dirty="0"/>
+              <a:t>Outliers / NA detection</a:t>
+            </a:r>
+          </a:p>
+          <a:p>
+            <a:pPr lvl="1"/>
+            <a:r>
+              <a:rPr lang="en-AU" dirty="0"/>
+              <a:t>Homogeneity of variance</a:t>
+            </a:r>
+          </a:p>
+          <a:p>
+            <a:pPr lvl="1"/>
+            <a:r>
+              <a:rPr lang="en-AU" dirty="0"/>
+              <a:t>Normality</a:t>
+            </a:r>
+          </a:p>
+          <a:p>
+            <a:pPr lvl="1"/>
+            <a:r>
+              <a:rPr lang="en-AU" dirty="0"/>
+              <a:t>Zero inflation</a:t>
+            </a:r>
+          </a:p>
+          <a:p>
+            <a:pPr lvl="1"/>
+            <a:r>
+              <a:rPr lang="en-AU" dirty="0"/>
+              <a:t>Y–X relationships</a:t>
+            </a:r>
+          </a:p>
+          <a:p>
+            <a:pPr marL="457200" lvl="1" indent="0">
+              <a:buNone/>
+            </a:pPr>
+            <a:endParaRPr lang="en-AU" dirty="0"/>
+          </a:p>
+          <a:p>
+            <a:r>
+              <a:rPr lang="en-AU" dirty="0"/>
+              <a:t>For each step, explain:</a:t>
+            </a:r>
+          </a:p>
+          <a:p>
+            <a:pPr lvl="1">
+              <a:buFont typeface="+mj-lt"/>
+              <a:buAutoNum type="arabicPeriod"/>
+            </a:pPr>
+            <a:r>
+              <a:rPr lang="en-AU" dirty="0"/>
+              <a:t>Initial data issue/check &amp; related </a:t>
+            </a:r>
+            <a:r>
+              <a:rPr lang="en-AU" dirty="0" err="1"/>
+              <a:t>Zuur</a:t>
+            </a:r>
+            <a:r>
+              <a:rPr lang="en-AU" dirty="0"/>
+              <a:t> step</a:t>
+            </a:r>
+          </a:p>
+          <a:p>
+            <a:pPr lvl="1">
+              <a:buFont typeface="+mj-lt"/>
+              <a:buAutoNum type="arabicPeriod"/>
+            </a:pPr>
+            <a:r>
+              <a:rPr lang="en-AU" dirty="0"/>
+              <a:t>What the code achieves</a:t>
+            </a:r>
+          </a:p>
+          <a:p>
+            <a:pPr lvl="1">
+              <a:buFont typeface="+mj-lt"/>
+              <a:buAutoNum type="arabicPeriod"/>
+            </a:pPr>
+            <a:r>
+              <a:rPr lang="en-AU" dirty="0"/>
+              <a:t>Show evidence the data is cleaner (e.g., plots, tables)</a:t>
+            </a:r>
+          </a:p>
+          <a:p>
+            <a:endParaRPr lang="en-AU" dirty="0"/>
+          </a:p>
+        </p:txBody>
+      </p:sp>
+    </p:spTree>
+    <p:extLst>
+      <p:ext uri="{BB962C8B-B14F-4D97-AF65-F5344CB8AC3E}">
+        <p14:creationId xmlns:p14="http://schemas.microsoft.com/office/powerpoint/2010/main" val="2771430931"/>
+      </p:ext>
+    </p:extLst>
+  </p:cSld>
+  <p:clrMapOvr>
+    <a:masterClrMapping/>
+  </p:clrMapOvr>
+</p:sld>
+</file>
+
+<file path=ppt/slides/slide11.xml><?xml version="1.0" encoding="utf-8"?>
+<p:sld xmlns:a="http://schemas.openxmlformats.org/drawingml/2006/main" xmlns:r="http://schemas.openxmlformats.org/officeDocument/2006/relationships" xmlns:p="http://schemas.openxmlformats.org/presentationml/2006/main">
+  <p:cSld>
+    <p:spTree>
+      <p:nvGrpSpPr>
+        <p:cNvPr id="1" name=""/>
+        <p:cNvGrpSpPr/>
+        <p:nvPr/>
+      </p:nvGrpSpPr>
+      <p:grpSpPr>
+        <a:xfrm>
+          <a:off x="0" y="0"/>
+          <a:ext cx="0" cy="0"/>
+          <a:chOff x="0" y="0"/>
+          <a:chExt cx="0" cy="0"/>
+        </a:xfrm>
+      </p:grpSpPr>
+      <p:pic>
+        <p:nvPicPr>
+          <p:cNvPr id="4" name="Picture 3">
+            <a:extLst>
+              <a:ext uri="{FF2B5EF4-FFF2-40B4-BE49-F238E27FC236}">
+                <a16:creationId xmlns:a16="http://schemas.microsoft.com/office/drawing/2014/main" id="{40CC8D01-038B-1780-523D-B2E5A33F6784}"/>
+              </a:ext>
+            </a:extLst>
+          </p:cNvPr>
+          <p:cNvPicPr>
+            <a:picLocks noChangeAspect="1"/>
+          </p:cNvPicPr>
+          <p:nvPr/>
+        </p:nvPicPr>
+        <p:blipFill>
+          <a:blip r:embed="rId2"/>
+          <a:stretch>
+            <a:fillRect/>
+          </a:stretch>
+        </p:blipFill>
+        <p:spPr>
+          <a:xfrm>
+            <a:off x="1556004" y="107767"/>
+            <a:ext cx="6771132" cy="6750233"/>
+          </a:xfrm>
+          <a:prstGeom prst="rect">
+            <a:avLst/>
+          </a:prstGeom>
+        </p:spPr>
+      </p:pic>
+      <p:sp>
+        <p:nvSpPr>
+          <p:cNvPr id="5" name="TextBox 4">
+            <a:extLst>
+              <a:ext uri="{FF2B5EF4-FFF2-40B4-BE49-F238E27FC236}">
+                <a16:creationId xmlns:a16="http://schemas.microsoft.com/office/drawing/2014/main" id="{F82A955B-396B-0CD4-C310-4BC82C9040E5}"/>
+              </a:ext>
+            </a:extLst>
+          </p:cNvPr>
+          <p:cNvSpPr txBox="1"/>
+          <p:nvPr/>
+        </p:nvSpPr>
+        <p:spPr>
+          <a:xfrm>
+            <a:off x="8327136" y="2816352"/>
+            <a:ext cx="3330976" cy="677108"/>
+          </a:xfrm>
+          <a:prstGeom prst="rect">
+            <a:avLst/>
+          </a:prstGeom>
+          <a:noFill/>
+        </p:spPr>
+        <p:txBody>
+          <a:bodyPr wrap="none" rtlCol="0">
+            <a:spAutoFit/>
+          </a:bodyPr>
+          <a:lstStyle/>
+          <a:p>
+            <a:r>
+              <a:rPr lang="en-AU" sz="3800" b="1" dirty="0"/>
+              <a:t>100-120 words</a:t>
+            </a:r>
+          </a:p>
+        </p:txBody>
+      </p:sp>
+    </p:spTree>
+    <p:extLst>
+      <p:ext uri="{BB962C8B-B14F-4D97-AF65-F5344CB8AC3E}">
+        <p14:creationId xmlns:p14="http://schemas.microsoft.com/office/powerpoint/2010/main" val="792850858"/>
+      </p:ext>
+    </p:extLst>
+  </p:cSld>
+  <p:clrMapOvr>
+    <a:masterClrMapping/>
+  </p:clrMapOvr>
+</p:sld>
+</file>
+
+<file path=ppt/slides/slide12.xml><?xml version="1.0" encoding="utf-8"?>
+<p:sld xmlns:a="http://schemas.openxmlformats.org/drawingml/2006/main" xmlns:r="http://schemas.openxmlformats.org/officeDocument/2006/relationships" xmlns:p="http://schemas.openxmlformats.org/presentationml/2006/main">
+  <p:cSld>
+    <p:spTree>
+      <p:nvGrpSpPr>
+        <p:cNvPr id="1" name=""/>
+        <p:cNvGrpSpPr/>
+        <p:nvPr/>
+      </p:nvGrpSpPr>
+      <p:grpSpPr>
+        <a:xfrm>
+          <a:off x="0" y="0"/>
+          <a:ext cx="0" cy="0"/>
+          <a:chOff x="0" y="0"/>
+          <a:chExt cx="0" cy="0"/>
+        </a:xfrm>
+      </p:grpSpPr>
+      <p:sp>
+        <p:nvSpPr>
+          <p:cNvPr id="2" name="Title 1">
+            <a:extLst>
+              <a:ext uri="{FF2B5EF4-FFF2-40B4-BE49-F238E27FC236}">
+                <a16:creationId xmlns:a16="http://schemas.microsoft.com/office/drawing/2014/main" id="{861FDDA8-EE11-679B-37CF-4084ABC805BD}"/>
+              </a:ext>
+            </a:extLst>
+          </p:cNvPr>
+          <p:cNvSpPr>
+            <a:spLocks noGrp="1"/>
+          </p:cNvSpPr>
+          <p:nvPr>
+            <p:ph type="title"/>
+          </p:nvPr>
+        </p:nvSpPr>
+        <p:spPr/>
+        <p:txBody>
+          <a:bodyPr/>
+          <a:lstStyle/>
+          <a:p>
+            <a:r>
+              <a:rPr lang="en-AU" b="1" dirty="0"/>
+              <a:t>Look at the rubric on LMS</a:t>
+            </a:r>
+          </a:p>
+        </p:txBody>
+      </p:sp>
+      <p:sp>
+        <p:nvSpPr>
+          <p:cNvPr id="3" name="Content Placeholder 2">
+            <a:extLst>
+              <a:ext uri="{FF2B5EF4-FFF2-40B4-BE49-F238E27FC236}">
+                <a16:creationId xmlns:a16="http://schemas.microsoft.com/office/drawing/2014/main" id="{ECB978D5-34EE-7C2C-EE34-F722C8E021FD}"/>
+              </a:ext>
+            </a:extLst>
+          </p:cNvPr>
+          <p:cNvSpPr>
+            <a:spLocks noGrp="1"/>
+          </p:cNvSpPr>
+          <p:nvPr>
+            <p:ph idx="1"/>
+          </p:nvPr>
+        </p:nvSpPr>
+        <p:spPr>
+          <a:xfrm>
+            <a:off x="207264" y="1313561"/>
+            <a:ext cx="12082272" cy="6623431"/>
+          </a:xfrm>
+        </p:spPr>
+        <p:txBody>
+          <a:bodyPr>
+            <a:normAutofit/>
+          </a:bodyPr>
+          <a:lstStyle/>
+          <a:p>
+            <a:r>
+              <a:rPr lang="en-AU" dirty="0">
+                <a:effectLst/>
+                <a:latin typeface="Aptos" panose="020B0004020202020204" pitchFamily="34" charset="0"/>
+                <a:ea typeface="Aptos" panose="020B0004020202020204" pitchFamily="34" charset="0"/>
+                <a:cs typeface="Times New Roman" panose="02020603050405020304" pitchFamily="18" charset="0"/>
+              </a:rPr>
+              <a:t>Libraries (1%)</a:t>
+            </a:r>
+            <a:r>
+              <a:rPr lang="en-AU" dirty="0">
+                <a:effectLst/>
+              </a:rPr>
+              <a:t> </a:t>
+            </a:r>
+          </a:p>
+          <a:p>
+            <a:endParaRPr lang="en-AU" dirty="0">
+              <a:effectLst/>
+            </a:endParaRPr>
+          </a:p>
+          <a:p>
+            <a:r>
+              <a:rPr lang="en-AU" dirty="0">
+                <a:effectLst/>
+                <a:latin typeface="Aptos" panose="020B0004020202020204" pitchFamily="34" charset="0"/>
+                <a:ea typeface="Aptos" panose="020B0004020202020204" pitchFamily="34" charset="0"/>
+                <a:cs typeface="Times New Roman" panose="02020603050405020304" pitchFamily="18" charset="0"/>
+              </a:rPr>
+              <a:t>Lecture notes (5%)</a:t>
+            </a:r>
+          </a:p>
+          <a:p>
+            <a:endParaRPr lang="en-AU" dirty="0">
+              <a:latin typeface="Aptos" panose="020B0004020202020204" pitchFamily="34" charset="0"/>
+              <a:ea typeface="Aptos" panose="020B0004020202020204" pitchFamily="34" charset="0"/>
+              <a:cs typeface="Times New Roman" panose="02020603050405020304" pitchFamily="18" charset="0"/>
+            </a:endParaRPr>
+          </a:p>
+          <a:p>
+            <a:r>
+              <a:rPr lang="en-AU" dirty="0">
+                <a:effectLst/>
+                <a:latin typeface="Aptos" panose="020B0004020202020204" pitchFamily="34" charset="0"/>
+                <a:ea typeface="Aptos" panose="020B0004020202020204" pitchFamily="34" charset="0"/>
+                <a:cs typeface="Times New Roman" panose="02020603050405020304" pitchFamily="18" charset="0"/>
+              </a:rPr>
+              <a:t>Project protocol (10%)</a:t>
+            </a:r>
+          </a:p>
+          <a:p>
+            <a:endParaRPr lang="en-AU" dirty="0">
+              <a:effectLst/>
+              <a:latin typeface="Aptos" panose="020B0004020202020204" pitchFamily="34" charset="0"/>
+              <a:ea typeface="Aptos" panose="020B0004020202020204" pitchFamily="34" charset="0"/>
+              <a:cs typeface="Times New Roman" panose="02020603050405020304" pitchFamily="18" charset="0"/>
+            </a:endParaRPr>
+          </a:p>
+          <a:p>
+            <a:r>
+              <a:rPr lang="en-AU" dirty="0">
+                <a:effectLst/>
+                <a:latin typeface="Aptos" panose="020B0004020202020204" pitchFamily="34" charset="0"/>
+                <a:ea typeface="Aptos" panose="020B0004020202020204" pitchFamily="34" charset="0"/>
+                <a:cs typeface="Times New Roman" panose="02020603050405020304" pitchFamily="18" charset="0"/>
+              </a:rPr>
+              <a:t>File formatting and how it is saved (3</a:t>
+            </a:r>
+            <a:r>
+              <a:rPr lang="en-AU" dirty="0">
+                <a:latin typeface="Aptos" panose="020B0004020202020204" pitchFamily="34" charset="0"/>
+                <a:ea typeface="Aptos" panose="020B0004020202020204" pitchFamily="34" charset="0"/>
+                <a:cs typeface="Times New Roman" panose="02020603050405020304" pitchFamily="18" charset="0"/>
+              </a:rPr>
+              <a:t>%)</a:t>
+            </a:r>
+          </a:p>
+          <a:p>
+            <a:endParaRPr lang="en-AU" dirty="0">
+              <a:latin typeface="Aptos" panose="020B0004020202020204" pitchFamily="34" charset="0"/>
+              <a:ea typeface="Aptos" panose="020B0004020202020204" pitchFamily="34" charset="0"/>
+              <a:cs typeface="Times New Roman" panose="02020603050405020304" pitchFamily="18" charset="0"/>
+            </a:endParaRPr>
+          </a:p>
+          <a:p>
+            <a:r>
+              <a:rPr lang="en-AU" dirty="0">
+                <a:effectLst/>
+                <a:latin typeface="Aptos" panose="020B0004020202020204" pitchFamily="34" charset="0"/>
+                <a:ea typeface="Aptos" panose="020B0004020202020204" pitchFamily="34" charset="0"/>
+                <a:cs typeface="Times New Roman" panose="02020603050405020304" pitchFamily="18" charset="0"/>
+              </a:rPr>
+              <a:t>Spelling, grammar, and English expression are being used correctly (1%)  </a:t>
+            </a:r>
+          </a:p>
+          <a:p>
+            <a:pPr marL="0" indent="0">
+              <a:buNone/>
+            </a:pPr>
+            <a:endParaRPr lang="en-AU" sz="2200" b="1" dirty="0">
+              <a:latin typeface="Aptos" panose="020B0004020202020204" pitchFamily="34" charset="0"/>
+              <a:ea typeface="Aptos" panose="020B0004020202020204" pitchFamily="34" charset="0"/>
+              <a:cs typeface="Times New Roman" panose="02020603050405020304" pitchFamily="18" charset="0"/>
+            </a:endParaRPr>
+          </a:p>
+          <a:p>
+            <a:pPr marL="0" indent="0">
+              <a:buNone/>
+            </a:pPr>
+            <a:r>
+              <a:rPr lang="en-AU" b="1" dirty="0">
+                <a:effectLst/>
+                <a:latin typeface="Aptos" panose="020B0004020202020204" pitchFamily="34" charset="0"/>
+                <a:ea typeface="Aptos" panose="020B0004020202020204" pitchFamily="34" charset="0"/>
+                <a:cs typeface="Times New Roman" panose="02020603050405020304" pitchFamily="18" charset="0"/>
+              </a:rPr>
+              <a:t>… If you </a:t>
+            </a:r>
+            <a:r>
+              <a:rPr lang="en-AU" b="1" dirty="0">
+                <a:latin typeface="Aptos" panose="020B0004020202020204" pitchFamily="34" charset="0"/>
+                <a:ea typeface="Aptos" panose="020B0004020202020204" pitchFamily="34" charset="0"/>
+                <a:cs typeface="Times New Roman" panose="02020603050405020304" pitchFamily="18" charset="0"/>
+              </a:rPr>
+              <a:t>can’t find your answer there ask at the workshop or email me!</a:t>
+            </a:r>
+            <a:endParaRPr lang="en-AU" dirty="0">
+              <a:effectLst/>
+              <a:latin typeface="Aptos" panose="020B0004020202020204" pitchFamily="34" charset="0"/>
+              <a:ea typeface="Aptos" panose="020B0004020202020204" pitchFamily="34" charset="0"/>
+              <a:cs typeface="Times New Roman" panose="02020603050405020304" pitchFamily="18" charset="0"/>
+            </a:endParaRPr>
+          </a:p>
+          <a:p>
+            <a:pPr marL="0" indent="0">
+              <a:buNone/>
+            </a:pPr>
+            <a:r>
+              <a:rPr lang="en-AU" dirty="0">
+                <a:effectLst/>
+              </a:rPr>
+              <a:t> </a:t>
+            </a:r>
+            <a:endParaRPr lang="en-AU" dirty="0"/>
+          </a:p>
+        </p:txBody>
+      </p:sp>
+    </p:spTree>
+    <p:extLst>
+      <p:ext uri="{BB962C8B-B14F-4D97-AF65-F5344CB8AC3E}">
+        <p14:creationId xmlns:p14="http://schemas.microsoft.com/office/powerpoint/2010/main" val="401586564"/>
+      </p:ext>
+    </p:extLst>
+  </p:cSld>
+  <p:clrMapOvr>
+    <a:masterClrMapping/>
+  </p:clrMapOvr>
+  <p:timing>
+    <p:tnLst>
+      <p:par>
+        <p:cTn id="1" dur="indefinite" restart="never" nodeType="tmRoot">
+          <p:childTnLst>
+            <p:seq concurrent="1" nextAc="seek">
+              <p:cTn id="2" dur="indefinite" nodeType="mainSeq">
+                <p:childTnLst>
+                  <p:par>
+                    <p:cTn id="3" fill="hold">
+                      <p:stCondLst>
+                        <p:cond delay="indefinite"/>
+                      </p:stCondLst>
+                      <p:childTnLst>
+                        <p:par>
+                          <p:cTn id="4" fill="hold">
+                            <p:stCondLst>
+                              <p:cond delay="0"/>
+                            </p:stCondLst>
+                            <p:childTnLst>
+                              <p:par>
+                                <p:cTn id="5" presetID="1" presetClass="entr" presetSubtype="0" fill="hold" nodeType="clickEffect">
+                                  <p:stCondLst>
+                                    <p:cond delay="0"/>
+                                  </p:stCondLst>
+                                  <p:childTnLst>
+                                    <p:set>
+                                      <p:cBhvr>
+                                        <p:cTn id="6" dur="1" fill="hold">
+                                          <p:stCondLst>
+                                            <p:cond delay="0"/>
+                                          </p:stCondLst>
+                                        </p:cTn>
+                                        <p:tgtEl>
+                                          <p:spTgt spid="3">
+                                            <p:txEl>
+                                              <p:pRg st="10" end="10"/>
+                                            </p:txEl>
+                                          </p:spTgt>
+                                        </p:tgtEl>
+                                        <p:attrNameLst>
+                                          <p:attrName>style.visibility</p:attrName>
+                                        </p:attrNameLst>
+                                      </p:cBhvr>
+                                      <p:to>
+                                        <p:strVal val="visible"/>
+                                      </p:to>
+                                    </p:set>
+                                  </p:childTnLst>
+                                </p:cTn>
+                              </p:par>
+                            </p:childTnLst>
+                          </p:cTn>
+                        </p:par>
+                      </p:childTnLst>
+                    </p:cTn>
+                  </p:par>
+                </p:childTnLst>
+              </p:cTn>
+              <p:prevCondLst>
+                <p:cond evt="onPrev" delay="0">
+                  <p:tgtEl>
+                    <p:sldTgt/>
+                  </p:tgtEl>
+                </p:cond>
+              </p:prevCondLst>
+              <p:nextCondLst>
+                <p:cond evt="onNext" delay="0">
+                  <p:tgtEl>
+                    <p:sldTgt/>
+                  </p:tgtEl>
+                </p:cond>
+              </p:nextCondLst>
+            </p:seq>
+          </p:childTnLst>
+        </p:cTn>
+      </p:par>
+    </p:tnLst>
+  </p:timing>
+</p:sld>
+</file>
+
+<file path=ppt/slides/slide13.xml><?xml version="1.0" encoding="utf-8"?>
+<p:sld xmlns:a="http://schemas.openxmlformats.org/drawingml/2006/main" xmlns:r="http://schemas.openxmlformats.org/officeDocument/2006/relationships" xmlns:p="http://schemas.openxmlformats.org/presentationml/2006/main">
+  <p:cSld>
+    <p:bg>
+      <p:bgPr>
+        <a:solidFill>
+          <a:schemeClr val="bg1"/>
+        </a:solidFill>
+        <a:effectLst/>
+      </p:bgPr>
+    </p:bg>
+    <p:spTree>
+      <p:nvGrpSpPr>
+        <p:cNvPr id="1" name=""/>
+        <p:cNvGrpSpPr/>
+        <p:nvPr/>
+      </p:nvGrpSpPr>
+      <p:grpSpPr>
+        <a:xfrm>
+          <a:off x="0" y="0"/>
+          <a:ext cx="0" cy="0"/>
+          <a:chOff x="0" y="0"/>
+          <a:chExt cx="0" cy="0"/>
+        </a:xfrm>
+      </p:grpSpPr>
+      <p:sp>
+        <p:nvSpPr>
+          <p:cNvPr id="2" name="Title 1">
+            <a:extLst>
+              <a:ext uri="{FF2B5EF4-FFF2-40B4-BE49-F238E27FC236}">
+                <a16:creationId xmlns:a16="http://schemas.microsoft.com/office/drawing/2014/main" id="{299E57D0-55DF-10BC-0E04-EF684584DC69}"/>
+              </a:ext>
+            </a:extLst>
+          </p:cNvPr>
+          <p:cNvSpPr>
+            <a:spLocks noGrp="1"/>
+          </p:cNvSpPr>
+          <p:nvPr>
+            <p:ph type="title"/>
+          </p:nvPr>
+        </p:nvSpPr>
+        <p:spPr>
+          <a:xfrm>
+            <a:off x="640080" y="5576887"/>
+            <a:ext cx="10911840" cy="640081"/>
+          </a:xfrm>
+        </p:spPr>
+        <p:txBody>
+          <a:bodyPr vert="horz" lIns="91440" tIns="45720" rIns="91440" bIns="45720" rtlCol="0" anchor="ctr">
+            <a:noAutofit/>
+          </a:bodyPr>
+          <a:lstStyle/>
+          <a:p>
+            <a:pPr algn="ctr"/>
+            <a:r>
+              <a:rPr lang="en-US" sz="4800" dirty="0"/>
+              <a:t>OPEN QUARTO!</a:t>
+            </a:r>
+          </a:p>
+        </p:txBody>
+      </p:sp>
+      <p:pic>
+        <p:nvPicPr>
+          <p:cNvPr id="1030" name="Picture 6" descr="Startbutton Stickers - Find &amp; Share on GIPHY">
+            <a:extLst>
+              <a:ext uri="{FF2B5EF4-FFF2-40B4-BE49-F238E27FC236}">
+                <a16:creationId xmlns:a16="http://schemas.microsoft.com/office/drawing/2014/main" id="{3630ACEC-2589-5F4D-B0E3-066A1CC1E0B4}"/>
+              </a:ext>
+            </a:extLst>
+          </p:cNvPr>
+          <p:cNvPicPr>
+            <a:picLocks noChangeAspect="1" noChangeArrowheads="1"/>
+          </p:cNvPicPr>
+          <p:nvPr/>
+        </p:nvPicPr>
+        <p:blipFill>
+          <a:blip r:embed="rId2">
+            <a:extLst>
+              <a:ext uri="{28A0092B-C50C-407E-A947-70E740481C1C}">
+                <a14:useLocalDpi xmlns:a14="http://schemas.microsoft.com/office/drawing/2010/main" val="0"/>
+              </a:ext>
+            </a:extLst>
+          </a:blip>
+          <a:srcRect/>
+          <a:stretch>
+            <a:fillRect/>
+          </a:stretch>
+        </p:blipFill>
+        <p:spPr bwMode="auto">
+          <a:xfrm>
+            <a:off x="2847848" y="-818896"/>
+            <a:ext cx="6350000" cy="6350000"/>
+          </a:xfrm>
+          <a:prstGeom prst="rect">
+            <a:avLst/>
+          </a:prstGeom>
+          <a:noFill/>
+          <a:extLst>
+            <a:ext uri="{909E8E84-426E-40DD-AFC4-6F175D3DCCD1}">
+              <a14:hiddenFill xmlns:a14="http://schemas.microsoft.com/office/drawing/2010/main">
+                <a:solidFill>
+                  <a:srgbClr val="FFFFFF"/>
+                </a:solidFill>
+              </a14:hiddenFill>
+            </a:ext>
+          </a:extLst>
+        </p:spPr>
+      </p:pic>
+    </p:spTree>
+    <p:extLst>
+      <p:ext uri="{BB962C8B-B14F-4D97-AF65-F5344CB8AC3E}">
+        <p14:creationId xmlns:p14="http://schemas.microsoft.com/office/powerpoint/2010/main" val="2285232843"/>
+      </p:ext>
+    </p:extLst>
+  </p:cSld>
+  <p:clrMapOvr>
+    <a:overrideClrMapping bg1="dk1" tx1="lt1" bg2="dk2" tx2="lt2" accent1="accent1" accent2="accent2" accent3="accent3" accent4="accent4" accent5="accent5" accent6="accent6" hlink="hlink" folHlink="folHlink"/>
+  </p:clrMapOvr>
+  <p:timing>
+    <p:tnLst>
+      <p:par>
+        <p:cTn id="1" dur="indefinite" restart="never" nodeType="tmRoot">
+          <p:childTnLst>
+            <p:seq concurrent="1" nextAc="seek">
+              <p:cTn id="2" dur="indefinite" nodeType="mainSeq">
+                <p:childTnLst>
+                  <p:par>
+                    <p:cTn id="3" fill="hold">
+                      <p:stCondLst>
+                        <p:cond delay="indefinite"/>
+                        <p:cond evt="onBegin" delay="0">
+                          <p:tn val="2"/>
+                        </p:cond>
+                      </p:stCondLst>
+                      <p:childTnLst>
+                        <p:par>
+                          <p:cTn id="4" fill="hold">
+                            <p:stCondLst>
+                              <p:cond delay="0"/>
+                            </p:stCondLst>
+                            <p:childTnLst>
+                              <p:par>
+                                <p:cTn id="5" presetID="10" presetClass="entr" presetSubtype="0" fill="hold" grpId="0" nodeType="withEffect">
+                                  <p:stCondLst>
+                                    <p:cond delay="1000"/>
+                                  </p:stCondLst>
+                                  <p:iterate>
+                                    <p:tmPct val="10000"/>
+                                  </p:iterate>
+                                  <p:childTnLst>
+                                    <p:set>
+                                      <p:cBhvr>
+                                        <p:cTn id="6" dur="1" fill="hold">
+                                          <p:stCondLst>
+                                            <p:cond delay="0"/>
+                                          </p:stCondLst>
+                                        </p:cTn>
+                                        <p:tgtEl>
+                                          <p:spTgt spid="2"/>
+                                        </p:tgtEl>
+                                        <p:attrNameLst>
+                                          <p:attrName>style.visibility</p:attrName>
+                                        </p:attrNameLst>
+                                      </p:cBhvr>
+                                      <p:to>
+                                        <p:strVal val="visible"/>
+                                      </p:to>
+                                    </p:set>
+                                    <p:animEffect transition="in" filter="fade">
+                                      <p:cBhvr>
+                                        <p:cTn id="7" dur="700"/>
+                                        <p:tgtEl>
+                                          <p:spTgt spid="2"/>
+                                        </p:tgtEl>
+                                      </p:cBhvr>
+                                    </p:animEffect>
+                                  </p:childTnLst>
+                                </p:cTn>
+                              </p:par>
+                            </p:childTnLst>
+                          </p:cTn>
+                        </p:par>
+                      </p:childTnLst>
+                    </p:cTn>
+                  </p:par>
+                </p:childTnLst>
+              </p:cTn>
+              <p:prevCondLst>
+                <p:cond evt="onPrev" delay="0">
+                  <p:tgtEl>
+                    <p:sldTgt/>
+                  </p:tgtEl>
+                </p:cond>
+              </p:prevCondLst>
+              <p:nextCondLst>
+                <p:cond evt="onNext" delay="0">
+                  <p:tgtEl>
+                    <p:sldTgt/>
+                  </p:tgtEl>
+                </p:cond>
+              </p:nextCondLst>
+            </p:seq>
+          </p:childTnLst>
+        </p:cTn>
+      </p:par>
+    </p:tnLst>
+    <p:bldLst>
+      <p:bldP spid="2" grpId="0"/>
+    </p:bldLst>
+  </p:timing>
+</p:sld>
+</file>
+
 <file path=ppt/slides/slide2.xml><?xml version="1.0" encoding="utf-8"?>
 <p:sld xmlns:a="http://schemas.openxmlformats.org/drawingml/2006/main" xmlns:r="http://schemas.openxmlformats.org/officeDocument/2006/relationships" xmlns:p="http://schemas.openxmlformats.org/presentationml/2006/main">
   <p:cSld>
@@ -3811,6 +4958,282 @@
           <p:cNvPr id="2" name="Title 1">
             <a:extLst>
               <a:ext uri="{FF2B5EF4-FFF2-40B4-BE49-F238E27FC236}">
+                <a16:creationId xmlns:a16="http://schemas.microsoft.com/office/drawing/2014/main" id="{034B267B-6178-0125-C7EB-FFF4EB7C405C}"/>
+              </a:ext>
+            </a:extLst>
+          </p:cNvPr>
+          <p:cNvSpPr>
+            <a:spLocks noGrp="1"/>
+          </p:cNvSpPr>
+          <p:nvPr>
+            <p:ph type="title"/>
+          </p:nvPr>
+        </p:nvSpPr>
+        <p:spPr/>
+        <p:txBody>
+          <a:bodyPr/>
+          <a:lstStyle/>
+          <a:p>
+            <a:r>
+              <a:rPr lang="en-AU" dirty="0"/>
+              <a:t>QUIZ</a:t>
+            </a:r>
+          </a:p>
+        </p:txBody>
+      </p:sp>
+      <p:pic>
+        <p:nvPicPr>
+          <p:cNvPr id="5" name="Picture 4" descr="A screenshot of a computer&#10;&#10;Description automatically generated">
+            <a:extLst>
+              <a:ext uri="{FF2B5EF4-FFF2-40B4-BE49-F238E27FC236}">
+                <a16:creationId xmlns:a16="http://schemas.microsoft.com/office/drawing/2014/main" id="{673CF688-AAAF-78BE-D0B8-E62310AED0B7}"/>
+              </a:ext>
+            </a:extLst>
+          </p:cNvPr>
+          <p:cNvPicPr>
+            <a:picLocks noChangeAspect="1"/>
+          </p:cNvPicPr>
+          <p:nvPr/>
+        </p:nvPicPr>
+        <p:blipFill>
+          <a:blip r:embed="rId3"/>
+          <a:stretch>
+            <a:fillRect/>
+          </a:stretch>
+        </p:blipFill>
+        <p:spPr>
+          <a:xfrm>
+            <a:off x="3102142" y="841248"/>
+            <a:ext cx="7772400" cy="5899158"/>
+          </a:xfrm>
+          <a:prstGeom prst="rect">
+            <a:avLst/>
+          </a:prstGeom>
+        </p:spPr>
+      </p:pic>
+    </p:spTree>
+    <p:extLst>
+      <p:ext uri="{BB962C8B-B14F-4D97-AF65-F5344CB8AC3E}">
+        <p14:creationId xmlns:p14="http://schemas.microsoft.com/office/powerpoint/2010/main" val="2066061685"/>
+      </p:ext>
+    </p:extLst>
+  </p:cSld>
+  <p:clrMapOvr>
+    <a:masterClrMapping/>
+  </p:clrMapOvr>
+</p:sld>
+</file>
+
+<file path=ppt/slides/slide3.xml><?xml version="1.0" encoding="utf-8"?>
+<p:sld xmlns:a="http://schemas.openxmlformats.org/drawingml/2006/main" xmlns:r="http://schemas.openxmlformats.org/officeDocument/2006/relationships" xmlns:p="http://schemas.openxmlformats.org/presentationml/2006/main">
+  <p:cSld>
+    <p:spTree>
+      <p:nvGrpSpPr>
+        <p:cNvPr id="1" name="">
+          <a:extLst>
+            <a:ext uri="{FF2B5EF4-FFF2-40B4-BE49-F238E27FC236}">
+              <a16:creationId xmlns:a16="http://schemas.microsoft.com/office/drawing/2014/main" id="{35D25057-7210-111C-4603-7756E1350105}"/>
+            </a:ext>
+          </a:extLst>
+        </p:cNvPr>
+        <p:cNvGrpSpPr/>
+        <p:nvPr/>
+      </p:nvGrpSpPr>
+      <p:grpSpPr>
+        <a:xfrm>
+          <a:off x="0" y="0"/>
+          <a:ext cx="0" cy="0"/>
+          <a:chOff x="0" y="0"/>
+          <a:chExt cx="0" cy="0"/>
+        </a:xfrm>
+      </p:grpSpPr>
+      <p:sp>
+        <p:nvSpPr>
+          <p:cNvPr id="2" name="Title 1">
+            <a:extLst>
+              <a:ext uri="{FF2B5EF4-FFF2-40B4-BE49-F238E27FC236}">
+                <a16:creationId xmlns:a16="http://schemas.microsoft.com/office/drawing/2014/main" id="{E101DFF5-0770-E8C6-8BC8-DE3190345998}"/>
+              </a:ext>
+            </a:extLst>
+          </p:cNvPr>
+          <p:cNvSpPr>
+            <a:spLocks noGrp="1"/>
+          </p:cNvSpPr>
+          <p:nvPr>
+            <p:ph type="title"/>
+          </p:nvPr>
+        </p:nvSpPr>
+        <p:spPr/>
+        <p:txBody>
+          <a:bodyPr/>
+          <a:lstStyle/>
+          <a:p>
+            <a:r>
+              <a:rPr lang="en-AU" dirty="0"/>
+              <a:t>QUIZ</a:t>
+            </a:r>
+          </a:p>
+        </p:txBody>
+      </p:sp>
+      <p:pic>
+        <p:nvPicPr>
+          <p:cNvPr id="7" name="Picture 6" descr="A screenshot of a computer&#10;&#10;Description automatically generated">
+            <a:extLst>
+              <a:ext uri="{FF2B5EF4-FFF2-40B4-BE49-F238E27FC236}">
+                <a16:creationId xmlns:a16="http://schemas.microsoft.com/office/drawing/2014/main" id="{E3BDB49B-6E77-3F97-6992-918EC064CCD2}"/>
+              </a:ext>
+            </a:extLst>
+          </p:cNvPr>
+          <p:cNvPicPr>
+            <a:picLocks noChangeAspect="1"/>
+          </p:cNvPicPr>
+          <p:nvPr/>
+        </p:nvPicPr>
+        <p:blipFill>
+          <a:blip r:embed="rId3"/>
+          <a:stretch>
+            <a:fillRect/>
+          </a:stretch>
+        </p:blipFill>
+        <p:spPr>
+          <a:xfrm>
+            <a:off x="3123692" y="885444"/>
+            <a:ext cx="7772400" cy="3260716"/>
+          </a:xfrm>
+          <a:prstGeom prst="rect">
+            <a:avLst/>
+          </a:prstGeom>
+        </p:spPr>
+      </p:pic>
+    </p:spTree>
+    <p:extLst>
+      <p:ext uri="{BB962C8B-B14F-4D97-AF65-F5344CB8AC3E}">
+        <p14:creationId xmlns:p14="http://schemas.microsoft.com/office/powerpoint/2010/main" val="1982983874"/>
+      </p:ext>
+    </p:extLst>
+  </p:cSld>
+  <p:clrMapOvr>
+    <a:masterClrMapping/>
+  </p:clrMapOvr>
+</p:sld>
+</file>
+
+<file path=ppt/slides/slide4.xml><?xml version="1.0" encoding="utf-8"?>
+<p:sld xmlns:a="http://schemas.openxmlformats.org/drawingml/2006/main" xmlns:r="http://schemas.openxmlformats.org/officeDocument/2006/relationships" xmlns:p="http://schemas.openxmlformats.org/presentationml/2006/main">
+  <p:cSld>
+    <p:spTree>
+      <p:nvGrpSpPr>
+        <p:cNvPr id="1" name="">
+          <a:extLst>
+            <a:ext uri="{FF2B5EF4-FFF2-40B4-BE49-F238E27FC236}">
+              <a16:creationId xmlns:a16="http://schemas.microsoft.com/office/drawing/2014/main" id="{0E123687-A5B7-A56D-889C-EF0EF1658344}"/>
+            </a:ext>
+          </a:extLst>
+        </p:cNvPr>
+        <p:cNvGrpSpPr/>
+        <p:nvPr/>
+      </p:nvGrpSpPr>
+      <p:grpSpPr>
+        <a:xfrm>
+          <a:off x="0" y="0"/>
+          <a:ext cx="0" cy="0"/>
+          <a:chOff x="0" y="0"/>
+          <a:chExt cx="0" cy="0"/>
+        </a:xfrm>
+      </p:grpSpPr>
+      <p:sp>
+        <p:nvSpPr>
+          <p:cNvPr id="2" name="Title 1">
+            <a:extLst>
+              <a:ext uri="{FF2B5EF4-FFF2-40B4-BE49-F238E27FC236}">
+                <a16:creationId xmlns:a16="http://schemas.microsoft.com/office/drawing/2014/main" id="{FD2E789C-AE17-6A29-626C-13A7786569F5}"/>
+              </a:ext>
+            </a:extLst>
+          </p:cNvPr>
+          <p:cNvSpPr>
+            <a:spLocks noGrp="1"/>
+          </p:cNvSpPr>
+          <p:nvPr>
+            <p:ph type="title"/>
+          </p:nvPr>
+        </p:nvSpPr>
+        <p:spPr/>
+        <p:txBody>
+          <a:bodyPr/>
+          <a:lstStyle/>
+          <a:p>
+            <a:r>
+              <a:rPr lang="en-AU" dirty="0"/>
+              <a:t>QUIZ</a:t>
+            </a:r>
+          </a:p>
+        </p:txBody>
+      </p:sp>
+      <p:pic>
+        <p:nvPicPr>
+          <p:cNvPr id="3" name="Picture 2" descr="A screenshot of a computer&#10;&#10;Description automatically generated">
+            <a:extLst>
+              <a:ext uri="{FF2B5EF4-FFF2-40B4-BE49-F238E27FC236}">
+                <a16:creationId xmlns:a16="http://schemas.microsoft.com/office/drawing/2014/main" id="{7C8D0624-5920-FF87-62F6-607DAE9C0A4F}"/>
+              </a:ext>
+            </a:extLst>
+          </p:cNvPr>
+          <p:cNvPicPr>
+            <a:picLocks noChangeAspect="1"/>
+          </p:cNvPicPr>
+          <p:nvPr/>
+        </p:nvPicPr>
+        <p:blipFill>
+          <a:blip r:embed="rId3"/>
+          <a:stretch>
+            <a:fillRect/>
+          </a:stretch>
+        </p:blipFill>
+        <p:spPr>
+          <a:xfrm>
+            <a:off x="3071876" y="817372"/>
+            <a:ext cx="7772400" cy="3977046"/>
+          </a:xfrm>
+          <a:prstGeom prst="rect">
+            <a:avLst/>
+          </a:prstGeom>
+        </p:spPr>
+      </p:pic>
+    </p:spTree>
+    <p:extLst>
+      <p:ext uri="{BB962C8B-B14F-4D97-AF65-F5344CB8AC3E}">
+        <p14:creationId xmlns:p14="http://schemas.microsoft.com/office/powerpoint/2010/main" val="1263256942"/>
+      </p:ext>
+    </p:extLst>
+  </p:cSld>
+  <p:clrMapOvr>
+    <a:masterClrMapping/>
+  </p:clrMapOvr>
+</p:sld>
+</file>
+
+<file path=ppt/slides/slide5.xml><?xml version="1.0" encoding="utf-8"?>
+<p:sld xmlns:a="http://schemas.openxmlformats.org/drawingml/2006/main" xmlns:r="http://schemas.openxmlformats.org/officeDocument/2006/relationships" xmlns:p="http://schemas.openxmlformats.org/presentationml/2006/main">
+  <p:cSld>
+    <p:spTree>
+      <p:nvGrpSpPr>
+        <p:cNvPr id="1" name=""/>
+        <p:cNvGrpSpPr/>
+        <p:nvPr/>
+      </p:nvGrpSpPr>
+      <p:grpSpPr>
+        <a:xfrm>
+          <a:off x="0" y="0"/>
+          <a:ext cx="0" cy="0"/>
+          <a:chOff x="0" y="0"/>
+          <a:chExt cx="0" cy="0"/>
+        </a:xfrm>
+      </p:grpSpPr>
+      <p:sp>
+        <p:nvSpPr>
+          <p:cNvPr id="2" name="Title 1">
+            <a:extLst>
+              <a:ext uri="{FF2B5EF4-FFF2-40B4-BE49-F238E27FC236}">
                 <a16:creationId xmlns:a16="http://schemas.microsoft.com/office/drawing/2014/main" id="{9B561348-1B1B-1112-EC71-1A65C54554F8}"/>
               </a:ext>
             </a:extLst>
@@ -3867,7 +5290,7 @@
             </a:pPr>
             <a:r>
               <a:rPr lang="en-AU" dirty="0"/>
-              <a:t>Investigate your data: get with your groups and open up your project data. Begin using </a:t>
+              <a:t>Investigate your data: get with your groups and open up your project data. Using </a:t>
             </a:r>
             <a:r>
               <a:rPr lang="en-AU" dirty="0" err="1"/>
@@ -3920,7 +5343,16 @@
             </a:pPr>
             <a:r>
               <a:rPr lang="en-AU" dirty="0"/>
-              <a:t>Open up Quarto and start setting up coding assignment (45 min) </a:t>
+              <a:t>Open up Quarto and start setting up coding assignment (45 min)</a:t>
+            </a:r>
+          </a:p>
+          <a:p>
+            <a:pPr marL="0" indent="0">
+              <a:buNone/>
+            </a:pPr>
+            <a:r>
+              <a:rPr lang="en-AU" dirty="0"/>
+              <a:t>	- Be sure you ask us questions! </a:t>
             </a:r>
           </a:p>
         </p:txBody>
@@ -3929,6 +5361,591 @@
     <p:extLst>
       <p:ext uri="{BB962C8B-B14F-4D97-AF65-F5344CB8AC3E}">
         <p14:creationId xmlns:p14="http://schemas.microsoft.com/office/powerpoint/2010/main" val="1653875993"/>
+      </p:ext>
+    </p:extLst>
+  </p:cSld>
+  <p:clrMapOvr>
+    <a:masterClrMapping/>
+  </p:clrMapOvr>
+</p:sld>
+</file>
+
+<file path=ppt/slides/slide6.xml><?xml version="1.0" encoding="utf-8"?>
+<p:sld xmlns:a="http://schemas.openxmlformats.org/drawingml/2006/main" xmlns:r="http://schemas.openxmlformats.org/officeDocument/2006/relationships" xmlns:p="http://schemas.openxmlformats.org/presentationml/2006/main">
+  <p:cSld>
+    <p:spTree>
+      <p:nvGrpSpPr>
+        <p:cNvPr id="1" name="">
+          <a:extLst>
+            <a:ext uri="{FF2B5EF4-FFF2-40B4-BE49-F238E27FC236}">
+              <a16:creationId xmlns:a16="http://schemas.microsoft.com/office/drawing/2014/main" id="{10678903-B3A1-E39C-04E0-E20F6B258F94}"/>
+            </a:ext>
+          </a:extLst>
+        </p:cNvPr>
+        <p:cNvGrpSpPr/>
+        <p:nvPr/>
+      </p:nvGrpSpPr>
+      <p:grpSpPr>
+        <a:xfrm>
+          <a:off x="0" y="0"/>
+          <a:ext cx="0" cy="0"/>
+          <a:chOff x="0" y="0"/>
+          <a:chExt cx="0" cy="0"/>
+        </a:xfrm>
+      </p:grpSpPr>
+      <p:sp>
+        <p:nvSpPr>
+          <p:cNvPr id="2" name="Title 1">
+            <a:extLst>
+              <a:ext uri="{FF2B5EF4-FFF2-40B4-BE49-F238E27FC236}">
+                <a16:creationId xmlns:a16="http://schemas.microsoft.com/office/drawing/2014/main" id="{E263583B-C6CE-9993-E5CB-DF759E36636D}"/>
+              </a:ext>
+            </a:extLst>
+          </p:cNvPr>
+          <p:cNvSpPr>
+            <a:spLocks noGrp="1"/>
+          </p:cNvSpPr>
+          <p:nvPr>
+            <p:ph type="title"/>
+          </p:nvPr>
+        </p:nvSpPr>
+        <p:spPr/>
+        <p:txBody>
+          <a:bodyPr/>
+          <a:lstStyle/>
+          <a:p>
+            <a:r>
+              <a:rPr lang="en-AU" dirty="0"/>
+              <a:t>Spring cleaning!</a:t>
+            </a:r>
+          </a:p>
+        </p:txBody>
+      </p:sp>
+      <p:sp>
+        <p:nvSpPr>
+          <p:cNvPr id="3" name="Content Placeholder 2">
+            <a:extLst>
+              <a:ext uri="{FF2B5EF4-FFF2-40B4-BE49-F238E27FC236}">
+                <a16:creationId xmlns:a16="http://schemas.microsoft.com/office/drawing/2014/main" id="{CEFAD54C-9E9A-D95B-6799-7096EC266BD1}"/>
+              </a:ext>
+            </a:extLst>
+          </p:cNvPr>
+          <p:cNvSpPr>
+            <a:spLocks noGrp="1"/>
+          </p:cNvSpPr>
+          <p:nvPr>
+            <p:ph idx="1"/>
+          </p:nvPr>
+        </p:nvSpPr>
+        <p:spPr>
+          <a:xfrm>
+            <a:off x="724829" y="1594624"/>
+            <a:ext cx="10628971" cy="5263376"/>
+          </a:xfrm>
+        </p:spPr>
+        <p:txBody>
+          <a:bodyPr>
+            <a:normAutofit/>
+          </a:bodyPr>
+          <a:lstStyle/>
+          <a:p>
+            <a:pPr marL="514350" indent="-514350">
+              <a:buAutoNum type="arabicPeriod"/>
+            </a:pPr>
+            <a:endParaRPr lang="en-AU" dirty="0"/>
+          </a:p>
+        </p:txBody>
+      </p:sp>
+    </p:spTree>
+    <p:extLst>
+      <p:ext uri="{BB962C8B-B14F-4D97-AF65-F5344CB8AC3E}">
+        <p14:creationId xmlns:p14="http://schemas.microsoft.com/office/powerpoint/2010/main" val="3287607734"/>
+      </p:ext>
+    </p:extLst>
+  </p:cSld>
+  <p:clrMapOvr>
+    <a:masterClrMapping/>
+  </p:clrMapOvr>
+</p:sld>
+</file>
+
+<file path=ppt/slides/slide7.xml><?xml version="1.0" encoding="utf-8"?>
+<p:sld xmlns:a="http://schemas.openxmlformats.org/drawingml/2006/main" xmlns:r="http://schemas.openxmlformats.org/officeDocument/2006/relationships" xmlns:p="http://schemas.openxmlformats.org/presentationml/2006/main">
+  <p:cSld>
+    <p:spTree>
+      <p:nvGrpSpPr>
+        <p:cNvPr id="1" name=""/>
+        <p:cNvGrpSpPr/>
+        <p:nvPr/>
+      </p:nvGrpSpPr>
+      <p:grpSpPr>
+        <a:xfrm>
+          <a:off x="0" y="0"/>
+          <a:ext cx="0" cy="0"/>
+          <a:chOff x="0" y="0"/>
+          <a:chExt cx="0" cy="0"/>
+        </a:xfrm>
+      </p:grpSpPr>
+      <p:sp>
+        <p:nvSpPr>
+          <p:cNvPr id="2" name="Title 1">
+            <a:extLst>
+              <a:ext uri="{FF2B5EF4-FFF2-40B4-BE49-F238E27FC236}">
+                <a16:creationId xmlns:a16="http://schemas.microsoft.com/office/drawing/2014/main" id="{5F553821-E3DA-C809-EB32-54452D1E5FE0}"/>
+              </a:ext>
+            </a:extLst>
+          </p:cNvPr>
+          <p:cNvSpPr>
+            <a:spLocks noGrp="1"/>
+          </p:cNvSpPr>
+          <p:nvPr>
+            <p:ph type="title"/>
+          </p:nvPr>
+        </p:nvSpPr>
+        <p:spPr/>
+        <p:txBody>
+          <a:bodyPr/>
+          <a:lstStyle/>
+          <a:p>
+            <a:r>
+              <a:rPr lang="en-AU" b="1" dirty="0"/>
+              <a:t>Coding Assignment – Overview</a:t>
+            </a:r>
+            <a:endParaRPr lang="en-AU" dirty="0"/>
+          </a:p>
+        </p:txBody>
+      </p:sp>
+      <p:sp>
+        <p:nvSpPr>
+          <p:cNvPr id="3" name="Content Placeholder 2">
+            <a:extLst>
+              <a:ext uri="{FF2B5EF4-FFF2-40B4-BE49-F238E27FC236}">
+                <a16:creationId xmlns:a16="http://schemas.microsoft.com/office/drawing/2014/main" id="{759DC288-26AF-6FB5-552D-77156CB2D619}"/>
+              </a:ext>
+            </a:extLst>
+          </p:cNvPr>
+          <p:cNvSpPr>
+            <a:spLocks noGrp="1"/>
+          </p:cNvSpPr>
+          <p:nvPr>
+            <p:ph idx="1"/>
+          </p:nvPr>
+        </p:nvSpPr>
+        <p:spPr/>
+        <p:txBody>
+          <a:bodyPr/>
+          <a:lstStyle/>
+          <a:p>
+            <a:r>
+              <a:rPr lang="en-AU" dirty="0"/>
+              <a:t>Goal: Demonstrate skills from Lectures 2–4 and Workshops 1–3 (20% of your grade)</a:t>
+            </a:r>
+          </a:p>
+          <a:p>
+            <a:r>
+              <a:rPr lang="en-AU" dirty="0"/>
+              <a:t>Apply new coding techniques from class to your project data</a:t>
+            </a:r>
+          </a:p>
+          <a:p>
+            <a:r>
+              <a:rPr lang="en-AU" dirty="0"/>
+              <a:t>Use your lecture notes &amp; workshop assignments as a guide</a:t>
+            </a:r>
+          </a:p>
+          <a:p>
+            <a:r>
+              <a:rPr lang="en-AU" dirty="0"/>
+              <a:t>Deliverables:</a:t>
+            </a:r>
+          </a:p>
+          <a:p>
+            <a:pPr lvl="1"/>
+            <a:r>
+              <a:rPr lang="en-AU" dirty="0"/>
+              <a:t>R Project folder</a:t>
+            </a:r>
+          </a:p>
+          <a:p>
+            <a:pPr lvl="1"/>
+            <a:r>
+              <a:rPr lang="en-AU" dirty="0"/>
+              <a:t>Project data files</a:t>
+            </a:r>
+          </a:p>
+          <a:p>
+            <a:pPr lvl="1"/>
+            <a:r>
+              <a:rPr lang="en-AU" dirty="0"/>
+              <a:t>Quarto document (.</a:t>
+            </a:r>
+            <a:r>
+              <a:rPr lang="en-AU" dirty="0" err="1"/>
+              <a:t>qmd</a:t>
+            </a:r>
+            <a:r>
+              <a:rPr lang="en-AU" dirty="0"/>
+              <a:t>)</a:t>
+            </a:r>
+          </a:p>
+          <a:p>
+            <a:pPr marL="0" indent="0">
+              <a:buNone/>
+            </a:pPr>
+            <a:endParaRPr lang="en-AU" dirty="0"/>
+          </a:p>
+        </p:txBody>
+      </p:sp>
+    </p:spTree>
+    <p:extLst>
+      <p:ext uri="{BB962C8B-B14F-4D97-AF65-F5344CB8AC3E}">
+        <p14:creationId xmlns:p14="http://schemas.microsoft.com/office/powerpoint/2010/main" val="3130493921"/>
+      </p:ext>
+    </p:extLst>
+  </p:cSld>
+  <p:clrMapOvr>
+    <a:masterClrMapping/>
+  </p:clrMapOvr>
+</p:sld>
+</file>
+
+<file path=ppt/slides/slide8.xml><?xml version="1.0" encoding="utf-8"?>
+<p:sld xmlns:a="http://schemas.openxmlformats.org/drawingml/2006/main" xmlns:r="http://schemas.openxmlformats.org/officeDocument/2006/relationships" xmlns:p="http://schemas.openxmlformats.org/presentationml/2006/main">
+  <p:cSld>
+    <p:spTree>
+      <p:nvGrpSpPr>
+        <p:cNvPr id="1" name=""/>
+        <p:cNvGrpSpPr/>
+        <p:nvPr/>
+      </p:nvGrpSpPr>
+      <p:grpSpPr>
+        <a:xfrm>
+          <a:off x="0" y="0"/>
+          <a:ext cx="0" cy="0"/>
+          <a:chOff x="0" y="0"/>
+          <a:chExt cx="0" cy="0"/>
+        </a:xfrm>
+      </p:grpSpPr>
+      <p:sp>
+        <p:nvSpPr>
+          <p:cNvPr id="2" name="Title 1">
+            <a:extLst>
+              <a:ext uri="{FF2B5EF4-FFF2-40B4-BE49-F238E27FC236}">
+                <a16:creationId xmlns:a16="http://schemas.microsoft.com/office/drawing/2014/main" id="{8F8090C3-BAC7-EE61-B0B6-C5014A90F011}"/>
+              </a:ext>
+            </a:extLst>
+          </p:cNvPr>
+          <p:cNvSpPr>
+            <a:spLocks noGrp="1"/>
+          </p:cNvSpPr>
+          <p:nvPr>
+            <p:ph type="title"/>
+          </p:nvPr>
+        </p:nvSpPr>
+        <p:spPr/>
+        <p:txBody>
+          <a:bodyPr/>
+          <a:lstStyle/>
+          <a:p>
+            <a:r>
+              <a:rPr lang="en-AU" b="1" dirty="0"/>
+              <a:t>File Structure &amp; Saving (3%)</a:t>
+            </a:r>
+            <a:endParaRPr lang="en-AU" dirty="0"/>
+          </a:p>
+        </p:txBody>
+      </p:sp>
+      <p:sp>
+        <p:nvSpPr>
+          <p:cNvPr id="3" name="Content Placeholder 2">
+            <a:extLst>
+              <a:ext uri="{FF2B5EF4-FFF2-40B4-BE49-F238E27FC236}">
+                <a16:creationId xmlns:a16="http://schemas.microsoft.com/office/drawing/2014/main" id="{2823AB18-C33E-55CF-86CC-9769B02BE170}"/>
+              </a:ext>
+            </a:extLst>
+          </p:cNvPr>
+          <p:cNvSpPr>
+            <a:spLocks noGrp="1"/>
+          </p:cNvSpPr>
+          <p:nvPr>
+            <p:ph idx="1"/>
+          </p:nvPr>
+        </p:nvSpPr>
+        <p:spPr>
+          <a:xfrm>
+            <a:off x="490654" y="1825625"/>
+            <a:ext cx="10863146" cy="4351338"/>
+          </a:xfrm>
+        </p:spPr>
+        <p:txBody>
+          <a:bodyPr>
+            <a:normAutofit lnSpcReduction="10000"/>
+          </a:bodyPr>
+          <a:lstStyle/>
+          <a:p>
+            <a:r>
+              <a:rPr lang="en-AU" dirty="0"/>
+              <a:t>Name your project and files: STUDENT_FIRST_LAST_NAME_STUDENT#</a:t>
+            </a:r>
+          </a:p>
+          <a:p>
+            <a:r>
+              <a:rPr lang="en-AU" dirty="0"/>
+              <a:t>Folder must contain:</a:t>
+            </a:r>
+          </a:p>
+          <a:p>
+            <a:pPr lvl="1"/>
+            <a:r>
+              <a:rPr lang="en-AU" b="1" dirty="0"/>
+              <a:t>R Project</a:t>
+            </a:r>
+            <a:endParaRPr lang="en-AU" dirty="0"/>
+          </a:p>
+          <a:p>
+            <a:pPr lvl="1"/>
+            <a:r>
+              <a:rPr lang="en-AU" b="1" dirty="0"/>
+              <a:t>Quarto document (.</a:t>
+            </a:r>
+            <a:r>
+              <a:rPr lang="en-AU" b="1" dirty="0" err="1"/>
+              <a:t>qmd</a:t>
+            </a:r>
+            <a:r>
+              <a:rPr lang="en-AU" b="1" dirty="0"/>
+              <a:t>)</a:t>
+            </a:r>
+            <a:endParaRPr lang="en-AU" dirty="0"/>
+          </a:p>
+          <a:p>
+            <a:pPr lvl="1"/>
+            <a:r>
+              <a:rPr lang="en-AU" b="1" dirty="0"/>
+              <a:t>Rendered Word document (.docx)</a:t>
+            </a:r>
+            <a:endParaRPr lang="en-AU" dirty="0"/>
+          </a:p>
+          <a:p>
+            <a:pPr>
+              <a:buFont typeface="Arial" panose="020B0604020202020204" pitchFamily="34" charset="0"/>
+              <a:buChar char="•"/>
+            </a:pPr>
+            <a:r>
+              <a:rPr lang="en-AU" b="1" dirty="0"/>
+              <a:t>Data folder</a:t>
+            </a:r>
+            <a:r>
+              <a:rPr lang="en-AU" dirty="0"/>
+              <a:t> with your project data</a:t>
+            </a:r>
+          </a:p>
+          <a:p>
+            <a:r>
+              <a:rPr lang="en-AU" dirty="0"/>
+              <a:t>Match the file structure covered in class</a:t>
+            </a:r>
+          </a:p>
+          <a:p>
+            <a:r>
+              <a:rPr lang="en-AU" dirty="0"/>
+              <a:t>Zip the entire folder before submission</a:t>
+            </a:r>
+          </a:p>
+          <a:p>
+            <a:r>
+              <a:rPr lang="en-AU" dirty="0"/>
+              <a:t>Ensure the project renders correctly </a:t>
+            </a:r>
+          </a:p>
+          <a:p>
+            <a:endParaRPr lang="en-AU" dirty="0"/>
+          </a:p>
+        </p:txBody>
+      </p:sp>
+      <p:pic>
+        <p:nvPicPr>
+          <p:cNvPr id="6" name="Picture 5">
+            <a:extLst>
+              <a:ext uri="{FF2B5EF4-FFF2-40B4-BE49-F238E27FC236}">
+                <a16:creationId xmlns:a16="http://schemas.microsoft.com/office/drawing/2014/main" id="{FD702BC6-63B9-0FAF-9025-FA11B35D65DC}"/>
+              </a:ext>
+            </a:extLst>
+          </p:cNvPr>
+          <p:cNvPicPr>
+            <a:picLocks noChangeAspect="1"/>
+          </p:cNvPicPr>
+          <p:nvPr/>
+        </p:nvPicPr>
+        <p:blipFill>
+          <a:blip r:embed="rId2"/>
+          <a:stretch>
+            <a:fillRect/>
+          </a:stretch>
+        </p:blipFill>
+        <p:spPr>
+          <a:xfrm>
+            <a:off x="7480871" y="2116010"/>
+            <a:ext cx="4472305" cy="3698875"/>
+          </a:xfrm>
+          <a:prstGeom prst="rect">
+            <a:avLst/>
+          </a:prstGeom>
+        </p:spPr>
+      </p:pic>
+    </p:spTree>
+    <p:extLst>
+      <p:ext uri="{BB962C8B-B14F-4D97-AF65-F5344CB8AC3E}">
+        <p14:creationId xmlns:p14="http://schemas.microsoft.com/office/powerpoint/2010/main" val="1225740371"/>
+      </p:ext>
+    </p:extLst>
+  </p:cSld>
+  <p:clrMapOvr>
+    <a:masterClrMapping/>
+  </p:clrMapOvr>
+</p:sld>
+</file>
+
+<file path=ppt/slides/slide9.xml><?xml version="1.0" encoding="utf-8"?>
+<p:sld xmlns:a="http://schemas.openxmlformats.org/drawingml/2006/main" xmlns:r="http://schemas.openxmlformats.org/officeDocument/2006/relationships" xmlns:p="http://schemas.openxmlformats.org/presentationml/2006/main">
+  <p:cSld>
+    <p:spTree>
+      <p:nvGrpSpPr>
+        <p:cNvPr id="1" name="">
+          <a:extLst>
+            <a:ext uri="{FF2B5EF4-FFF2-40B4-BE49-F238E27FC236}">
+              <a16:creationId xmlns:a16="http://schemas.microsoft.com/office/drawing/2014/main" id="{B9F65B20-872D-7F94-4535-BE860A299328}"/>
+            </a:ext>
+          </a:extLst>
+        </p:cNvPr>
+        <p:cNvGrpSpPr/>
+        <p:nvPr/>
+      </p:nvGrpSpPr>
+      <p:grpSpPr>
+        <a:xfrm>
+          <a:off x="0" y="0"/>
+          <a:ext cx="0" cy="0"/>
+          <a:chOff x="0" y="0"/>
+          <a:chExt cx="0" cy="0"/>
+        </a:xfrm>
+      </p:grpSpPr>
+      <p:sp>
+        <p:nvSpPr>
+          <p:cNvPr id="2" name="Title 1">
+            <a:extLst>
+              <a:ext uri="{FF2B5EF4-FFF2-40B4-BE49-F238E27FC236}">
+                <a16:creationId xmlns:a16="http://schemas.microsoft.com/office/drawing/2014/main" id="{4F651EB7-B028-928D-8F49-94FFECC0F263}"/>
+              </a:ext>
+            </a:extLst>
+          </p:cNvPr>
+          <p:cNvSpPr>
+            <a:spLocks noGrp="1"/>
+          </p:cNvSpPr>
+          <p:nvPr>
+            <p:ph type="title"/>
+          </p:nvPr>
+        </p:nvSpPr>
+        <p:spPr/>
+        <p:txBody>
+          <a:bodyPr/>
+          <a:lstStyle/>
+          <a:p>
+            <a:r>
+              <a:rPr lang="en-AU" b="1" dirty="0"/>
+              <a:t>Functions from Class (5%)</a:t>
+            </a:r>
+          </a:p>
+        </p:txBody>
+      </p:sp>
+      <p:sp>
+        <p:nvSpPr>
+          <p:cNvPr id="3" name="Content Placeholder 2">
+            <a:extLst>
+              <a:ext uri="{FF2B5EF4-FFF2-40B4-BE49-F238E27FC236}">
+                <a16:creationId xmlns:a16="http://schemas.microsoft.com/office/drawing/2014/main" id="{132D7B59-AB34-E30B-B598-87CA1F8072BB}"/>
+              </a:ext>
+            </a:extLst>
+          </p:cNvPr>
+          <p:cNvSpPr>
+            <a:spLocks noGrp="1"/>
+          </p:cNvSpPr>
+          <p:nvPr>
+            <p:ph idx="1"/>
+          </p:nvPr>
+        </p:nvSpPr>
+        <p:spPr>
+          <a:xfrm>
+            <a:off x="490654" y="1825625"/>
+            <a:ext cx="10863146" cy="4351338"/>
+          </a:xfrm>
+        </p:spPr>
+        <p:txBody>
+          <a:bodyPr>
+            <a:normAutofit/>
+          </a:bodyPr>
+          <a:lstStyle/>
+          <a:p>
+            <a:r>
+              <a:rPr lang="en-AU" dirty="0"/>
+              <a:t>Identify </a:t>
+            </a:r>
+            <a:r>
+              <a:rPr lang="en-AU" b="1" dirty="0"/>
+              <a:t>5 functions</a:t>
+            </a:r>
+            <a:r>
+              <a:rPr lang="en-AU" dirty="0"/>
+              <a:t> from Lectures 2–4 (not related to project data)</a:t>
+            </a:r>
+          </a:p>
+          <a:p>
+            <a:endParaRPr lang="en-AU" dirty="0"/>
+          </a:p>
+          <a:p>
+            <a:r>
+              <a:rPr lang="en-AU" dirty="0"/>
+              <a:t>Provide:</a:t>
+            </a:r>
+          </a:p>
+          <a:p>
+            <a:pPr lvl="1"/>
+            <a:r>
+              <a:rPr lang="en-AU" dirty="0"/>
+              <a:t>Function name &amp; description (above code chunk)</a:t>
+            </a:r>
+          </a:p>
+          <a:p>
+            <a:pPr lvl="1"/>
+            <a:r>
+              <a:rPr lang="en-AU" dirty="0"/>
+              <a:t>Example code for each function</a:t>
+            </a:r>
+          </a:p>
+          <a:p>
+            <a:pPr lvl="1"/>
+            <a:r>
+              <a:rPr lang="en-AU" dirty="0"/>
+              <a:t>Clear numbering for each example</a:t>
+            </a:r>
+          </a:p>
+          <a:p>
+            <a:endParaRPr lang="en-AU" dirty="0"/>
+          </a:p>
+          <a:p>
+            <a:r>
+              <a:rPr lang="en-AU" dirty="0"/>
+              <a:t>Ensure outputs display correctly when rendered</a:t>
+            </a:r>
+          </a:p>
+          <a:p>
+            <a:endParaRPr lang="en-AU" dirty="0"/>
+          </a:p>
+        </p:txBody>
+      </p:sp>
+    </p:spTree>
+    <p:extLst>
+      <p:ext uri="{BB962C8B-B14F-4D97-AF65-F5344CB8AC3E}">
+        <p14:creationId xmlns:p14="http://schemas.microsoft.com/office/powerpoint/2010/main" val="3623643879"/>
       </p:ext>
     </p:extLst>
   </p:cSld>

--- a/Week_3/Workshop/Workshop_2.pptx
+++ b/Week_3/Workshop/Workshop_2.pptx
@@ -5,22 +5,21 @@
     <p:sldMasterId id="2147483648" r:id="rId1"/>
   </p:sldMasterIdLst>
   <p:notesMasterIdLst>
-    <p:notesMasterId r:id="rId15"/>
+    <p:notesMasterId r:id="rId14"/>
   </p:notesMasterIdLst>
   <p:sldIdLst>
     <p:sldId id="256" r:id="rId2"/>
-    <p:sldId id="258" r:id="rId3"/>
-    <p:sldId id="265" r:id="rId4"/>
-    <p:sldId id="266" r:id="rId5"/>
-    <p:sldId id="257" r:id="rId6"/>
-    <p:sldId id="267" r:id="rId7"/>
-    <p:sldId id="259" r:id="rId8"/>
-    <p:sldId id="260" r:id="rId9"/>
-    <p:sldId id="261" r:id="rId10"/>
-    <p:sldId id="262" r:id="rId11"/>
-    <p:sldId id="263" r:id="rId12"/>
-    <p:sldId id="264" r:id="rId13"/>
-    <p:sldId id="268" r:id="rId14"/>
+    <p:sldId id="265" r:id="rId3"/>
+    <p:sldId id="266" r:id="rId4"/>
+    <p:sldId id="257" r:id="rId5"/>
+    <p:sldId id="267" r:id="rId6"/>
+    <p:sldId id="259" r:id="rId7"/>
+    <p:sldId id="260" r:id="rId8"/>
+    <p:sldId id="269" r:id="rId9"/>
+    <p:sldId id="270" r:id="rId10"/>
+    <p:sldId id="263" r:id="rId11"/>
+    <p:sldId id="264" r:id="rId12"/>
+    <p:sldId id="268" r:id="rId13"/>
   </p:sldIdLst>
   <p:sldSz cx="12192000" cy="6858000"/>
   <p:notesSz cx="6858000" cy="9144000"/>
@@ -532,24 +531,21 @@
           <a:bodyPr/>
           <a:lstStyle/>
           <a:p>
-            <a:pPr>
-              <a:buFont typeface="Arial" panose="020B0604020202020204" pitchFamily="34" charset="0"/>
-              <a:buChar char="•"/>
-            </a:pPr>
-            <a:r>
-              <a:rPr lang="en-AU" b="0" dirty="0"/>
-              <a:t>This dataset has three rows and five columns</a:t>
-            </a:r>
-          </a:p>
-          <a:p>
-            <a:pPr>
-              <a:buFont typeface="Arial" panose="020B0604020202020204" pitchFamily="34" charset="0"/>
-              <a:buChar char="•"/>
-            </a:pPr>
-            <a:r>
-              <a:rPr lang="en-AU" b="0" dirty="0"/>
-              <a:t>This is a data frame created by multiple lists</a:t>
-            </a:r>
+            <a:r>
+              <a:rPr lang="en-AU" dirty="0"/>
+              <a:t>Introduce </a:t>
+            </a:r>
+            <a:r>
+              <a:rPr lang="en-AU" b="0" i="0" u="none" strike="noStrike" dirty="0">
+                <a:solidFill>
+                  <a:srgbClr val="000000"/>
+                </a:solidFill>
+                <a:effectLst/>
+                <a:latin typeface="Aptos" panose="020B0004020202020204" pitchFamily="34" charset="0"/>
+              </a:rPr>
+              <a:t>Alexis who will be helping in demonstrating. </a:t>
+            </a:r>
+            <a:endParaRPr lang="en-AU" dirty="0"/>
           </a:p>
         </p:txBody>
       </p:sp>
@@ -570,7 +566,7 @@
           <a:p>
             <a:fld id="{8227185B-724B-4A4D-9332-480F4441395B}" type="slidenum">
               <a:rPr lang="en-AU" smtClean="0"/>
-              <a:t>2</a:t>
+              <a:t>1</a:t>
             </a:fld>
             <a:endParaRPr lang="en-AU"/>
           </a:p>
@@ -579,7 +575,7 @@
     </p:spTree>
     <p:extLst>
       <p:ext uri="{BB962C8B-B14F-4D97-AF65-F5344CB8AC3E}">
-        <p14:creationId xmlns:p14="http://schemas.microsoft.com/office/powerpoint/2010/main" val="4049859637"/>
+        <p14:creationId xmlns:p14="http://schemas.microsoft.com/office/powerpoint/2010/main" val="2409715217"/>
       </p:ext>
     </p:extLst>
   </p:cSld>
@@ -657,7 +653,7 @@
           <a:p>
             <a:fld id="{8227185B-724B-4A4D-9332-480F4441395B}" type="slidenum">
               <a:rPr lang="en-AU" smtClean="0"/>
-              <a:t>3</a:t>
+              <a:t>2</a:t>
             </a:fld>
             <a:endParaRPr lang="en-AU"/>
           </a:p>
@@ -752,7 +748,7 @@
           <a:p>
             <a:fld id="{8227185B-724B-4A4D-9332-480F4441395B}" type="slidenum">
               <a:rPr lang="en-AU" smtClean="0"/>
-              <a:t>4</a:t>
+              <a:t>3</a:t>
             </a:fld>
             <a:endParaRPr lang="en-AU"/>
           </a:p>
@@ -3992,6 +3988,14 @@
 <file path=ppt/slides/slide1.xml><?xml version="1.0" encoding="utf-8"?>
 <p:sld xmlns:a="http://schemas.openxmlformats.org/drawingml/2006/main" xmlns:r="http://schemas.openxmlformats.org/officeDocument/2006/relationships" xmlns:p="http://schemas.openxmlformats.org/presentationml/2006/main">
   <p:cSld>
+    <p:bg>
+      <p:bgPr>
+        <a:solidFill>
+          <a:schemeClr val="bg1"/>
+        </a:solidFill>
+        <a:effectLst/>
+      </p:bgPr>
+    </p:bg>
     <p:spTree>
       <p:nvGrpSpPr>
         <p:cNvPr id="1" name=""/>
@@ -4006,6 +4010,591 @@
           <a:chExt cx="0" cy="0"/>
         </a:xfrm>
       </p:grpSpPr>
+      <p:sp useBgFill="1">
+        <p:nvSpPr>
+          <p:cNvPr id="8" name="Rectangle 7">
+            <a:extLst>
+              <a:ext uri="{FF2B5EF4-FFF2-40B4-BE49-F238E27FC236}">
+                <a16:creationId xmlns:a16="http://schemas.microsoft.com/office/drawing/2014/main" id="{8C790BE2-4E4F-4AAF-81A2-4A6F4885EBE6}"/>
+              </a:ext>
+              <a:ext uri="{C183D7F6-B498-43B3-948B-1728B52AA6E4}">
+                <adec:decorative xmlns:adec="http://schemas.microsoft.com/office/drawing/2017/decorative" val="1"/>
+              </a:ext>
+            </a:extLst>
+          </p:cNvPr>
+          <p:cNvSpPr>
+            <a:spLocks noGrp="1" noRot="1" noChangeAspect="1" noMove="1" noResize="1" noEditPoints="1" noAdjustHandles="1" noChangeArrowheads="1" noChangeShapeType="1" noTextEdit="1"/>
+          </p:cNvSpPr>
+          <p:nvPr>
+            <p:extLst>
+              <p:ext uri="{386F3935-93C4-4BCD-93E2-E3B085C9AB24}">
+                <p16:designElem xmlns:p16="http://schemas.microsoft.com/office/powerpoint/2015/main" val="1"/>
+              </p:ext>
+            </p:extLst>
+          </p:nvPr>
+        </p:nvSpPr>
+        <p:spPr>
+          <a:xfrm>
+            <a:off x="0" y="0"/>
+            <a:ext cx="12192000" cy="6858000"/>
+          </a:xfrm>
+          <a:prstGeom prst="rect">
+            <a:avLst/>
+          </a:prstGeom>
+          <a:ln w="12700" cap="flat" cmpd="sng" algn="ctr">
+            <a:noFill/>
+            <a:prstDash val="solid"/>
+            <a:miter lim="800000"/>
+          </a:ln>
+          <a:effectLst/>
+          <a:extLst>
+            <a:ext uri="{91240B29-F687-4F45-9708-019B960494DF}">
+              <a14:hiddenLine xmlns:a14="http://schemas.microsoft.com/office/drawing/2010/main" w="12700" cap="flat" cmpd="sng" algn="ctr">
+                <a:solidFill>
+                  <a:schemeClr val="accent1">
+                    <a:shade val="50000"/>
+                  </a:schemeClr>
+                </a:solidFill>
+                <a:prstDash val="solid"/>
+                <a:miter lim="800000"/>
+              </a14:hiddenLine>
+            </a:ext>
+          </a:extLst>
+        </p:spPr>
+        <p:style>
+          <a:lnRef idx="2">
+            <a:schemeClr val="accent1">
+              <a:shade val="50000"/>
+            </a:schemeClr>
+          </a:lnRef>
+          <a:fillRef idx="1">
+            <a:schemeClr val="accent1"/>
+          </a:fillRef>
+          <a:effectRef idx="0">
+            <a:schemeClr val="accent1"/>
+          </a:effectRef>
+          <a:fontRef idx="minor">
+            <a:schemeClr val="lt1"/>
+          </a:fontRef>
+        </p:style>
+        <p:txBody>
+          <a:bodyPr rtlCol="0" anchor="ctr"/>
+          <a:lstStyle/>
+          <a:p>
+            <a:pPr algn="ctr"/>
+            <a:endParaRPr lang="en-US"/>
+          </a:p>
+        </p:txBody>
+      </p:sp>
+      <p:sp>
+        <p:nvSpPr>
+          <p:cNvPr id="10" name="Rectangle 9">
+            <a:extLst>
+              <a:ext uri="{FF2B5EF4-FFF2-40B4-BE49-F238E27FC236}">
+                <a16:creationId xmlns:a16="http://schemas.microsoft.com/office/drawing/2014/main" id="{D28B54C3-B57B-472A-B96E-1FCB67093DC2}"/>
+              </a:ext>
+              <a:ext uri="{C183D7F6-B498-43B3-948B-1728B52AA6E4}">
+                <adec:decorative xmlns:adec="http://schemas.microsoft.com/office/drawing/2017/decorative" val="1"/>
+              </a:ext>
+            </a:extLst>
+          </p:cNvPr>
+          <p:cNvSpPr>
+            <a:spLocks noGrp="1" noRot="1" noChangeAspect="1" noMove="1" noResize="1" noEditPoints="1" noAdjustHandles="1" noChangeArrowheads="1" noChangeShapeType="1" noTextEdit="1"/>
+          </p:cNvSpPr>
+          <p:nvPr>
+            <p:extLst>
+              <p:ext uri="{386F3935-93C4-4BCD-93E2-E3B085C9AB24}">
+                <p16:designElem xmlns:p16="http://schemas.microsoft.com/office/powerpoint/2015/main" val="1"/>
+              </p:ext>
+            </p:extLst>
+          </p:nvPr>
+        </p:nvSpPr>
+        <p:spPr>
+          <a:xfrm flipH="1">
+            <a:off x="-1" y="0"/>
+            <a:ext cx="12191999" cy="6858000"/>
+          </a:xfrm>
+          <a:prstGeom prst="rect">
+            <a:avLst/>
+          </a:prstGeom>
+          <a:gradFill>
+            <a:gsLst>
+              <a:gs pos="0">
+                <a:schemeClr val="accent1">
+                  <a:lumMod val="50000"/>
+                </a:schemeClr>
+              </a:gs>
+              <a:gs pos="100000">
+                <a:srgbClr val="000000"/>
+              </a:gs>
+            </a:gsLst>
+            <a:lin ang="13800000" scaled="0"/>
+          </a:gradFill>
+          <a:ln>
+            <a:noFill/>
+          </a:ln>
+        </p:spPr>
+        <p:style>
+          <a:lnRef idx="2">
+            <a:schemeClr val="accent1">
+              <a:shade val="50000"/>
+            </a:schemeClr>
+          </a:lnRef>
+          <a:fillRef idx="1">
+            <a:schemeClr val="accent1"/>
+          </a:fillRef>
+          <a:effectRef idx="0">
+            <a:schemeClr val="accent1"/>
+          </a:effectRef>
+          <a:fontRef idx="minor">
+            <a:schemeClr val="lt1"/>
+          </a:fontRef>
+        </p:style>
+        <p:txBody>
+          <a:bodyPr rtlCol="0" anchor="ctr"/>
+          <a:lstStyle/>
+          <a:p>
+            <a:pPr algn="ctr"/>
+            <a:endParaRPr lang="en-US"/>
+          </a:p>
+        </p:txBody>
+      </p:sp>
+      <p:sp>
+        <p:nvSpPr>
+          <p:cNvPr id="12" name="Rectangle 11">
+            <a:extLst>
+              <a:ext uri="{FF2B5EF4-FFF2-40B4-BE49-F238E27FC236}">
+                <a16:creationId xmlns:a16="http://schemas.microsoft.com/office/drawing/2014/main" id="{7DB3C429-F8DA-49B9-AF84-21996FCF78B5}"/>
+              </a:ext>
+              <a:ext uri="{C183D7F6-B498-43B3-948B-1728B52AA6E4}">
+                <adec:decorative xmlns:adec="http://schemas.microsoft.com/office/drawing/2017/decorative" val="1"/>
+              </a:ext>
+            </a:extLst>
+          </p:cNvPr>
+          <p:cNvSpPr>
+            <a:spLocks noGrp="1" noRot="1" noChangeAspect="1" noMove="1" noResize="1" noEditPoints="1" noAdjustHandles="1" noChangeArrowheads="1" noChangeShapeType="1" noTextEdit="1"/>
+          </p:cNvSpPr>
+          <p:nvPr>
+            <p:extLst>
+              <p:ext uri="{386F3935-93C4-4BCD-93E2-E3B085C9AB24}">
+                <p16:designElem xmlns:p16="http://schemas.microsoft.com/office/powerpoint/2015/main" val="1"/>
+              </p:ext>
+            </p:extLst>
+          </p:nvPr>
+        </p:nvSpPr>
+        <p:spPr>
+          <a:xfrm rot="10800000">
+            <a:off x="0" y="-4"/>
+            <a:ext cx="12192000" cy="6402581"/>
+          </a:xfrm>
+          <a:prstGeom prst="rect">
+            <a:avLst/>
+          </a:prstGeom>
+          <a:gradFill>
+            <a:gsLst>
+              <a:gs pos="1000">
+                <a:schemeClr val="accent1">
+                  <a:lumMod val="75000"/>
+                  <a:alpha val="59000"/>
+                </a:schemeClr>
+              </a:gs>
+              <a:gs pos="100000">
+                <a:srgbClr val="000000"/>
+              </a:gs>
+            </a:gsLst>
+            <a:lin ang="15000000" scaled="0"/>
+          </a:gradFill>
+          <a:ln>
+            <a:noFill/>
+          </a:ln>
+        </p:spPr>
+        <p:style>
+          <a:lnRef idx="2">
+            <a:schemeClr val="accent1">
+              <a:shade val="50000"/>
+            </a:schemeClr>
+          </a:lnRef>
+          <a:fillRef idx="1">
+            <a:schemeClr val="accent1"/>
+          </a:fillRef>
+          <a:effectRef idx="0">
+            <a:schemeClr val="accent1"/>
+          </a:effectRef>
+          <a:fontRef idx="minor">
+            <a:schemeClr val="lt1"/>
+          </a:fontRef>
+        </p:style>
+        <p:txBody>
+          <a:bodyPr rtlCol="0" anchor="ctr"/>
+          <a:lstStyle/>
+          <a:p>
+            <a:pPr algn="ctr"/>
+            <a:endParaRPr lang="en-US"/>
+          </a:p>
+        </p:txBody>
+      </p:sp>
+      <p:sp>
+        <p:nvSpPr>
+          <p:cNvPr id="14" name="Rectangle 13">
+            <a:extLst>
+              <a:ext uri="{FF2B5EF4-FFF2-40B4-BE49-F238E27FC236}">
+                <a16:creationId xmlns:a16="http://schemas.microsoft.com/office/drawing/2014/main" id="{E12088DD-B1AD-40E0-8B86-1D87A2CCD9BE}"/>
+              </a:ext>
+              <a:ext uri="{C183D7F6-B498-43B3-948B-1728B52AA6E4}">
+                <adec:decorative xmlns:adec="http://schemas.microsoft.com/office/drawing/2017/decorative" val="1"/>
+              </a:ext>
+            </a:extLst>
+          </p:cNvPr>
+          <p:cNvSpPr>
+            <a:spLocks noGrp="1" noRot="1" noChangeAspect="1" noMove="1" noResize="1" noEditPoints="1" noAdjustHandles="1" noChangeArrowheads="1" noChangeShapeType="1" noTextEdit="1"/>
+          </p:cNvSpPr>
+          <p:nvPr>
+            <p:extLst>
+              <p:ext uri="{386F3935-93C4-4BCD-93E2-E3B085C9AB24}">
+                <p16:designElem xmlns:p16="http://schemas.microsoft.com/office/powerpoint/2015/main" val="1"/>
+              </p:ext>
+            </p:extLst>
+          </p:nvPr>
+        </p:nvSpPr>
+        <p:spPr>
+          <a:xfrm rot="5400000" flipH="1">
+            <a:off x="2663054" y="-2653923"/>
+            <a:ext cx="6858001" cy="12165846"/>
+          </a:xfrm>
+          <a:prstGeom prst="rect">
+            <a:avLst/>
+          </a:prstGeom>
+          <a:gradFill>
+            <a:gsLst>
+              <a:gs pos="13000">
+                <a:schemeClr val="accent1">
+                  <a:lumMod val="50000"/>
+                  <a:alpha val="0"/>
+                </a:schemeClr>
+              </a:gs>
+              <a:gs pos="99000">
+                <a:srgbClr val="000000">
+                  <a:alpha val="28000"/>
+                </a:srgbClr>
+              </a:gs>
+            </a:gsLst>
+            <a:lin ang="0" scaled="0"/>
+          </a:gradFill>
+          <a:ln>
+            <a:noFill/>
+          </a:ln>
+        </p:spPr>
+        <p:style>
+          <a:lnRef idx="2">
+            <a:schemeClr val="accent1">
+              <a:shade val="50000"/>
+            </a:schemeClr>
+          </a:lnRef>
+          <a:fillRef idx="1">
+            <a:schemeClr val="accent1"/>
+          </a:fillRef>
+          <a:effectRef idx="0">
+            <a:schemeClr val="accent1"/>
+          </a:effectRef>
+          <a:fontRef idx="minor">
+            <a:schemeClr val="lt1"/>
+          </a:fontRef>
+        </p:style>
+        <p:txBody>
+          <a:bodyPr rtlCol="0" anchor="ctr"/>
+          <a:lstStyle/>
+          <a:p>
+            <a:pPr algn="ctr"/>
+            <a:endParaRPr lang="en-US" dirty="0"/>
+          </a:p>
+        </p:txBody>
+      </p:sp>
+      <p:sp>
+        <p:nvSpPr>
+          <p:cNvPr id="16" name="Rectangle 15">
+            <a:extLst>
+              <a:ext uri="{FF2B5EF4-FFF2-40B4-BE49-F238E27FC236}">
+                <a16:creationId xmlns:a16="http://schemas.microsoft.com/office/drawing/2014/main" id="{C4C9F2B0-1044-46EB-8AEB-C3BFFDE6C2CC}"/>
+              </a:ext>
+              <a:ext uri="{C183D7F6-B498-43B3-948B-1728B52AA6E4}">
+                <adec:decorative xmlns:adec="http://schemas.microsoft.com/office/drawing/2017/decorative" val="1"/>
+              </a:ext>
+            </a:extLst>
+          </p:cNvPr>
+          <p:cNvSpPr>
+            <a:spLocks noGrp="1" noRot="1" noChangeAspect="1" noMove="1" noResize="1" noEditPoints="1" noAdjustHandles="1" noChangeArrowheads="1" noChangeShapeType="1" noTextEdit="1"/>
+          </p:cNvSpPr>
+          <p:nvPr>
+            <p:extLst>
+              <p:ext uri="{386F3935-93C4-4BCD-93E2-E3B085C9AB24}">
+                <p16:designElem xmlns:p16="http://schemas.microsoft.com/office/powerpoint/2015/main" val="1"/>
+              </p:ext>
+            </p:extLst>
+          </p:nvPr>
+        </p:nvSpPr>
+        <p:spPr>
+          <a:xfrm flipH="1">
+            <a:off x="6094763" y="0"/>
+            <a:ext cx="6096001" cy="6858000"/>
+          </a:xfrm>
+          <a:prstGeom prst="rect">
+            <a:avLst/>
+          </a:prstGeom>
+          <a:gradFill>
+            <a:gsLst>
+              <a:gs pos="13000">
+                <a:schemeClr val="accent1">
+                  <a:lumMod val="50000"/>
+                  <a:alpha val="0"/>
+                </a:schemeClr>
+              </a:gs>
+              <a:gs pos="99000">
+                <a:schemeClr val="accent1">
+                  <a:lumMod val="75000"/>
+                  <a:alpha val="50000"/>
+                </a:schemeClr>
+              </a:gs>
+            </a:gsLst>
+            <a:lin ang="6000000" scaled="0"/>
+          </a:gradFill>
+          <a:ln>
+            <a:noFill/>
+          </a:ln>
+        </p:spPr>
+        <p:style>
+          <a:lnRef idx="2">
+            <a:schemeClr val="accent1">
+              <a:shade val="50000"/>
+            </a:schemeClr>
+          </a:lnRef>
+          <a:fillRef idx="1">
+            <a:schemeClr val="accent1"/>
+          </a:fillRef>
+          <a:effectRef idx="0">
+            <a:schemeClr val="accent1"/>
+          </a:effectRef>
+          <a:fontRef idx="minor">
+            <a:schemeClr val="lt1"/>
+          </a:fontRef>
+        </p:style>
+        <p:txBody>
+          <a:bodyPr rtlCol="0" anchor="ctr"/>
+          <a:lstStyle/>
+          <a:p>
+            <a:pPr algn="ctr"/>
+            <a:endParaRPr lang="en-US" dirty="0"/>
+          </a:p>
+        </p:txBody>
+      </p:sp>
+      <p:sp>
+        <p:nvSpPr>
+          <p:cNvPr id="18" name="Rectangle 17">
+            <a:extLst>
+              <a:ext uri="{FF2B5EF4-FFF2-40B4-BE49-F238E27FC236}">
+                <a16:creationId xmlns:a16="http://schemas.microsoft.com/office/drawing/2014/main" id="{0C395952-4E26-45A2-8756-2ADFD6E53C6E}"/>
+              </a:ext>
+              <a:ext uri="{C183D7F6-B498-43B3-948B-1728B52AA6E4}">
+                <adec:decorative xmlns:adec="http://schemas.microsoft.com/office/drawing/2017/decorative" val="1"/>
+              </a:ext>
+            </a:extLst>
+          </p:cNvPr>
+          <p:cNvSpPr>
+            <a:spLocks noGrp="1" noRot="1" noChangeAspect="1" noMove="1" noResize="1" noEditPoints="1" noAdjustHandles="1" noChangeArrowheads="1" noChangeShapeType="1" noTextEdit="1"/>
+          </p:cNvSpPr>
+          <p:nvPr>
+            <p:extLst>
+              <p:ext uri="{386F3935-93C4-4BCD-93E2-E3B085C9AB24}">
+                <p16:designElem xmlns:p16="http://schemas.microsoft.com/office/powerpoint/2015/main" val="1"/>
+              </p:ext>
+            </p:extLst>
+          </p:nvPr>
+        </p:nvSpPr>
+        <p:spPr>
+          <a:xfrm flipH="1">
+            <a:off x="-4" y="-3"/>
+            <a:ext cx="12182871" cy="6871922"/>
+          </a:xfrm>
+          <a:prstGeom prst="rect">
+            <a:avLst/>
+          </a:prstGeom>
+          <a:gradFill>
+            <a:gsLst>
+              <a:gs pos="13000">
+                <a:srgbClr val="000000">
+                  <a:alpha val="35000"/>
+                </a:srgbClr>
+              </a:gs>
+              <a:gs pos="99000">
+                <a:schemeClr val="accent1">
+                  <a:lumMod val="75000"/>
+                  <a:alpha val="0"/>
+                </a:schemeClr>
+              </a:gs>
+            </a:gsLst>
+            <a:lin ang="4800000" scaled="0"/>
+          </a:gradFill>
+          <a:ln>
+            <a:noFill/>
+          </a:ln>
+        </p:spPr>
+        <p:style>
+          <a:lnRef idx="2">
+            <a:schemeClr val="accent1">
+              <a:shade val="50000"/>
+            </a:schemeClr>
+          </a:lnRef>
+          <a:fillRef idx="1">
+            <a:schemeClr val="accent1"/>
+          </a:fillRef>
+          <a:effectRef idx="0">
+            <a:schemeClr val="accent1"/>
+          </a:effectRef>
+          <a:fontRef idx="minor">
+            <a:schemeClr val="lt1"/>
+          </a:fontRef>
+        </p:style>
+        <p:txBody>
+          <a:bodyPr rtlCol="0" anchor="ctr"/>
+          <a:lstStyle/>
+          <a:p>
+            <a:pPr algn="ctr"/>
+            <a:endParaRPr lang="en-US" dirty="0"/>
+          </a:p>
+        </p:txBody>
+      </p:sp>
+      <p:sp>
+        <p:nvSpPr>
+          <p:cNvPr id="20" name="Freeform: Shape 19">
+            <a:extLst>
+              <a:ext uri="{FF2B5EF4-FFF2-40B4-BE49-F238E27FC236}">
+                <a16:creationId xmlns:a16="http://schemas.microsoft.com/office/drawing/2014/main" id="{4734BADF-9461-4621-B112-2D7BABEA7DD0}"/>
+              </a:ext>
+              <a:ext uri="{C183D7F6-B498-43B3-948B-1728B52AA6E4}">
+                <adec:decorative xmlns:adec="http://schemas.microsoft.com/office/drawing/2017/decorative" val="1"/>
+              </a:ext>
+            </a:extLst>
+          </p:cNvPr>
+          <p:cNvSpPr>
+            <a:spLocks noGrp="1" noRot="1" noChangeAspect="1" noMove="1" noResize="1" noEditPoints="1" noAdjustHandles="1" noChangeArrowheads="1" noChangeShapeType="1" noTextEdit="1"/>
+          </p:cNvSpPr>
+          <p:nvPr>
+            <p:extLst>
+              <p:ext uri="{386F3935-93C4-4BCD-93E2-E3B085C9AB24}">
+                <p16:designElem xmlns:p16="http://schemas.microsoft.com/office/powerpoint/2015/main" val="1"/>
+              </p:ext>
+            </p:extLst>
+          </p:nvPr>
+        </p:nvSpPr>
+        <p:spPr>
+          <a:xfrm>
+            <a:off x="987713" y="4049"/>
+            <a:ext cx="10216576" cy="4729040"/>
+          </a:xfrm>
+          <a:custGeom>
+            <a:avLst/>
+            <a:gdLst>
+              <a:gd name="connsiteX0" fmla="*/ 0 w 10216576"/>
+              <a:gd name="connsiteY0" fmla="*/ 0 h 4729040"/>
+              <a:gd name="connsiteX1" fmla="*/ 10216576 w 10216576"/>
+              <a:gd name="connsiteY1" fmla="*/ 0 h 4729040"/>
+              <a:gd name="connsiteX2" fmla="*/ 10210268 w 10216576"/>
+              <a:gd name="connsiteY2" fmla="*/ 124944 h 4729040"/>
+              <a:gd name="connsiteX3" fmla="*/ 5108288 w 10216576"/>
+              <a:gd name="connsiteY3" fmla="*/ 4729040 h 4729040"/>
+              <a:gd name="connsiteX4" fmla="*/ 6309 w 10216576"/>
+              <a:gd name="connsiteY4" fmla="*/ 124944 h 4729040"/>
+            </a:gdLst>
+            <a:ahLst/>
+            <a:cxnLst>
+              <a:cxn ang="0">
+                <a:pos x="connsiteX0" y="connsiteY0"/>
+              </a:cxn>
+              <a:cxn ang="0">
+                <a:pos x="connsiteX1" y="connsiteY1"/>
+              </a:cxn>
+              <a:cxn ang="0">
+                <a:pos x="connsiteX2" y="connsiteY2"/>
+              </a:cxn>
+              <a:cxn ang="0">
+                <a:pos x="connsiteX3" y="connsiteY3"/>
+              </a:cxn>
+              <a:cxn ang="0">
+                <a:pos x="connsiteX4" y="connsiteY4"/>
+              </a:cxn>
+            </a:cxnLst>
+            <a:rect l="l" t="t" r="r" b="b"/>
+            <a:pathLst>
+              <a:path w="10216576" h="4729040">
+                <a:moveTo>
+                  <a:pt x="0" y="0"/>
+                </a:moveTo>
+                <a:lnTo>
+                  <a:pt x="10216576" y="0"/>
+                </a:lnTo>
+                <a:lnTo>
+                  <a:pt x="10210268" y="124944"/>
+                </a:lnTo>
+                <a:cubicBezTo>
+                  <a:pt x="9947637" y="2710997"/>
+                  <a:pt x="7763635" y="4729040"/>
+                  <a:pt x="5108288" y="4729040"/>
+                </a:cubicBezTo>
+                <a:cubicBezTo>
+                  <a:pt x="2452942" y="4729040"/>
+                  <a:pt x="268937" y="2710997"/>
+                  <a:pt x="6309" y="124944"/>
+                </a:cubicBezTo>
+                <a:close/>
+              </a:path>
+            </a:pathLst>
+          </a:custGeom>
+          <a:gradFill>
+            <a:gsLst>
+              <a:gs pos="7000">
+                <a:schemeClr val="accent1">
+                  <a:lumMod val="50000"/>
+                  <a:alpha val="4000"/>
+                </a:schemeClr>
+              </a:gs>
+              <a:gs pos="99000">
+                <a:schemeClr val="accent1">
+                  <a:alpha val="24000"/>
+                </a:schemeClr>
+              </a:gs>
+            </a:gsLst>
+            <a:lin ang="10200000" scaled="0"/>
+          </a:gradFill>
+          <a:ln>
+            <a:noFill/>
+          </a:ln>
+        </p:spPr>
+        <p:style>
+          <a:lnRef idx="2">
+            <a:schemeClr val="accent1">
+              <a:shade val="50000"/>
+            </a:schemeClr>
+          </a:lnRef>
+          <a:fillRef idx="1">
+            <a:schemeClr val="accent1"/>
+          </a:fillRef>
+          <a:effectRef idx="0">
+            <a:schemeClr val="accent1"/>
+          </a:effectRef>
+          <a:fontRef idx="minor">
+            <a:schemeClr val="lt1"/>
+          </a:fontRef>
+        </p:style>
+        <p:txBody>
+          <a:bodyPr wrap="square" rtlCol="0" anchor="ctr">
+            <a:noAutofit/>
+          </a:bodyPr>
+          <a:lstStyle/>
+          <a:p>
+            <a:pPr algn="ctr"/>
+            <a:endParaRPr lang="en-US"/>
+          </a:p>
+        </p:txBody>
+      </p:sp>
       <p:sp>
         <p:nvSpPr>
           <p:cNvPr id="2" name="Title 1">
@@ -4022,15 +4611,24 @@
             <p:ph type="ctrTitle"/>
           </p:nvPr>
         </p:nvSpPr>
-        <p:spPr/>
-        <p:txBody>
-          <a:bodyPr>
+        <p:spPr>
+          <a:xfrm>
+            <a:off x="2026693" y="1030406"/>
+            <a:ext cx="8147713" cy="3081242"/>
+          </a:xfrm>
+        </p:spPr>
+        <p:txBody>
+          <a:bodyPr anchor="ctr">
             <a:normAutofit/>
           </a:bodyPr>
           <a:lstStyle/>
           <a:p>
             <a:r>
-              <a:rPr lang="en-AU" dirty="0"/>
+              <a:rPr lang="en-AU" sz="4800">
+                <a:solidFill>
+                  <a:srgbClr val="FFFFFF"/>
+                </a:solidFill>
+              </a:rPr>
               <a:t>Workshop 2: Getting to know your data and using Quarto</a:t>
             </a:r>
           </a:p>
@@ -4052,19 +4650,34 @@
             <p:ph type="subTitle" idx="1"/>
           </p:nvPr>
         </p:nvSpPr>
-        <p:spPr/>
-        <p:txBody>
-          <a:bodyPr/>
-          <a:lstStyle/>
-          <a:p>
-            <a:r>
-              <a:rPr lang="en-US" sz="2400" u="sng" dirty="0"/>
+        <p:spPr>
+          <a:xfrm>
+            <a:off x="1559943" y="5171093"/>
+            <a:ext cx="9078628" cy="860620"/>
+          </a:xfrm>
+        </p:spPr>
+        <p:txBody>
+          <a:bodyPr anchor="ctr">
+            <a:normAutofit/>
+          </a:bodyPr>
+          <a:lstStyle/>
+          <a:p>
+            <a:r>
+              <a:rPr lang="en-US" sz="2200" u="sng">
+                <a:solidFill>
+                  <a:srgbClr val="FFFFFF"/>
+                </a:solidFill>
+              </a:rPr>
               <a:t>BIOL90041</a:t>
             </a:r>
           </a:p>
           <a:p>
             <a:r>
-              <a:rPr lang="en-US" sz="2400" dirty="0"/>
+              <a:rPr lang="en-US" sz="2200">
+                <a:solidFill>
+                  <a:srgbClr val="FFFFFF"/>
+                </a:solidFill>
+              </a:rPr>
               <a:t>Week 3</a:t>
             </a:r>
           </a:p>
@@ -4084,239 +4697,6 @@
 </file>
 
 <file path=ppt/slides/slide10.xml><?xml version="1.0" encoding="utf-8"?>
-<p:sld xmlns:a="http://schemas.openxmlformats.org/drawingml/2006/main" xmlns:r="http://schemas.openxmlformats.org/officeDocument/2006/relationships" xmlns:p="http://schemas.openxmlformats.org/presentationml/2006/main">
-  <p:cSld>
-    <p:spTree>
-      <p:nvGrpSpPr>
-        <p:cNvPr id="1" name="">
-          <a:extLst>
-            <a:ext uri="{FF2B5EF4-FFF2-40B4-BE49-F238E27FC236}">
-              <a16:creationId xmlns:a16="http://schemas.microsoft.com/office/drawing/2014/main" id="{DF265FCE-B486-764E-9DE0-36F3CBE6C67B}"/>
-            </a:ext>
-          </a:extLst>
-        </p:cNvPr>
-        <p:cNvGrpSpPr/>
-        <p:nvPr/>
-      </p:nvGrpSpPr>
-      <p:grpSpPr>
-        <a:xfrm>
-          <a:off x="0" y="0"/>
-          <a:ext cx="0" cy="0"/>
-          <a:chOff x="0" y="0"/>
-          <a:chExt cx="0" cy="0"/>
-        </a:xfrm>
-      </p:grpSpPr>
-      <p:sp>
-        <p:nvSpPr>
-          <p:cNvPr id="2" name="Title 1">
-            <a:extLst>
-              <a:ext uri="{FF2B5EF4-FFF2-40B4-BE49-F238E27FC236}">
-                <a16:creationId xmlns:a16="http://schemas.microsoft.com/office/drawing/2014/main" id="{6E3F5BE2-3428-E9C5-C02A-8AC89C056CA0}"/>
-              </a:ext>
-            </a:extLst>
-          </p:cNvPr>
-          <p:cNvSpPr>
-            <a:spLocks noGrp="1"/>
-          </p:cNvSpPr>
-          <p:nvPr>
-            <p:ph type="title"/>
-          </p:nvPr>
-        </p:nvSpPr>
-        <p:spPr/>
-        <p:txBody>
-          <a:bodyPr/>
-          <a:lstStyle/>
-          <a:p>
-            <a:r>
-              <a:rPr lang="en-AU" b="1" dirty="0"/>
-              <a:t>Project Protocol (10%)</a:t>
-            </a:r>
-          </a:p>
-        </p:txBody>
-      </p:sp>
-      <p:sp>
-        <p:nvSpPr>
-          <p:cNvPr id="3" name="Content Placeholder 2">
-            <a:extLst>
-              <a:ext uri="{FF2B5EF4-FFF2-40B4-BE49-F238E27FC236}">
-                <a16:creationId xmlns:a16="http://schemas.microsoft.com/office/drawing/2014/main" id="{A3BFE6F9-11EF-A108-7F36-AB07327F9EF1}"/>
-              </a:ext>
-            </a:extLst>
-          </p:cNvPr>
-          <p:cNvSpPr>
-            <a:spLocks noGrp="1"/>
-          </p:cNvSpPr>
-          <p:nvPr>
-            <p:ph idx="1"/>
-          </p:nvPr>
-        </p:nvSpPr>
-        <p:spPr>
-          <a:xfrm>
-            <a:off x="490654" y="1402080"/>
-            <a:ext cx="10863146" cy="5455920"/>
-          </a:xfrm>
-        </p:spPr>
-        <p:txBody>
-          <a:bodyPr>
-            <a:normAutofit fontScale="92500" lnSpcReduction="20000"/>
-          </a:bodyPr>
-          <a:lstStyle/>
-          <a:p>
-            <a:r>
-              <a:rPr lang="en-AU" dirty="0"/>
-              <a:t>Provide </a:t>
-            </a:r>
-            <a:r>
-              <a:rPr lang="en-AU" b="1" dirty="0"/>
-              <a:t>5+ steps</a:t>
-            </a:r>
-            <a:r>
-              <a:rPr lang="en-AU" dirty="0"/>
-              <a:t> of cleaning, exploring, transforming project data</a:t>
-            </a:r>
-          </a:p>
-          <a:p>
-            <a:endParaRPr lang="en-AU" dirty="0"/>
-          </a:p>
-          <a:p>
-            <a:r>
-              <a:rPr lang="en-AU" dirty="0"/>
-              <a:t>At least </a:t>
-            </a:r>
-            <a:r>
-              <a:rPr lang="en-AU" b="1" dirty="0"/>
-              <a:t>2 steps</a:t>
-            </a:r>
-            <a:r>
-              <a:rPr lang="en-AU" dirty="0"/>
-              <a:t> use pipes (%&gt;%)</a:t>
-            </a:r>
-          </a:p>
-          <a:p>
-            <a:endParaRPr lang="en-AU" dirty="0"/>
-          </a:p>
-          <a:p>
-            <a:r>
-              <a:rPr lang="en-AU" b="1" dirty="0"/>
-              <a:t>3+ steps</a:t>
-            </a:r>
-            <a:r>
-              <a:rPr lang="en-AU" dirty="0"/>
-              <a:t> must address </a:t>
-            </a:r>
-            <a:r>
-              <a:rPr lang="en-AU" dirty="0" err="1"/>
-              <a:t>Zuur</a:t>
-            </a:r>
-            <a:r>
-              <a:rPr lang="en-AU" dirty="0"/>
-              <a:t> et al. (2010) checks:</a:t>
-            </a:r>
-          </a:p>
-          <a:p>
-            <a:pPr lvl="1"/>
-            <a:r>
-              <a:rPr lang="en-AU" dirty="0"/>
-              <a:t>Outliers / NA detection</a:t>
-            </a:r>
-          </a:p>
-          <a:p>
-            <a:pPr lvl="1"/>
-            <a:r>
-              <a:rPr lang="en-AU" dirty="0"/>
-              <a:t>Homogeneity of variance</a:t>
-            </a:r>
-          </a:p>
-          <a:p>
-            <a:pPr lvl="1"/>
-            <a:r>
-              <a:rPr lang="en-AU" dirty="0"/>
-              <a:t>Normality</a:t>
-            </a:r>
-          </a:p>
-          <a:p>
-            <a:pPr lvl="1"/>
-            <a:r>
-              <a:rPr lang="en-AU" dirty="0"/>
-              <a:t>Zero inflation</a:t>
-            </a:r>
-          </a:p>
-          <a:p>
-            <a:pPr lvl="1"/>
-            <a:r>
-              <a:rPr lang="en-AU" dirty="0"/>
-              <a:t>Y–X relationships</a:t>
-            </a:r>
-          </a:p>
-          <a:p>
-            <a:pPr marL="457200" lvl="1" indent="0">
-              <a:buNone/>
-            </a:pPr>
-            <a:endParaRPr lang="en-AU" dirty="0"/>
-          </a:p>
-          <a:p>
-            <a:r>
-              <a:rPr lang="en-AU" dirty="0"/>
-              <a:t>For each step, explain:</a:t>
-            </a:r>
-          </a:p>
-          <a:p>
-            <a:pPr lvl="1">
-              <a:buFont typeface="+mj-lt"/>
-              <a:buAutoNum type="arabicPeriod"/>
-            </a:pPr>
-            <a:r>
-              <a:rPr lang="en-AU" dirty="0"/>
-              <a:t>Initial data issue/check &amp; related </a:t>
-            </a:r>
-            <a:r>
-              <a:rPr lang="en-AU" dirty="0" err="1"/>
-              <a:t>Zuur</a:t>
-            </a:r>
-            <a:r>
-              <a:rPr lang="en-AU" dirty="0"/>
-              <a:t> step</a:t>
-            </a:r>
-          </a:p>
-          <a:p>
-            <a:pPr lvl="1">
-              <a:buFont typeface="+mj-lt"/>
-              <a:buAutoNum type="arabicPeriod"/>
-            </a:pPr>
-            <a:r>
-              <a:rPr lang="en-AU" dirty="0"/>
-              <a:t>What the code achieves</a:t>
-            </a:r>
-          </a:p>
-          <a:p>
-            <a:pPr lvl="1">
-              <a:buFont typeface="+mj-lt"/>
-              <a:buAutoNum type="arabicPeriod"/>
-            </a:pPr>
-            <a:r>
-              <a:rPr lang="en-AU" dirty="0"/>
-              <a:t>Show evidence the data is cleaner (e.g., plots, tables)</a:t>
-            </a:r>
-          </a:p>
-          <a:p>
-            <a:endParaRPr lang="en-AU" dirty="0"/>
-          </a:p>
-        </p:txBody>
-      </p:sp>
-    </p:spTree>
-    <p:extLst>
-      <p:ext uri="{BB962C8B-B14F-4D97-AF65-F5344CB8AC3E}">
-        <p14:creationId xmlns:p14="http://schemas.microsoft.com/office/powerpoint/2010/main" val="2771430931"/>
-      </p:ext>
-    </p:extLst>
-  </p:cSld>
-  <p:clrMapOvr>
-    <a:masterClrMapping/>
-  </p:clrMapOvr>
-</p:sld>
-</file>
-
-<file path=ppt/slides/slide11.xml><?xml version="1.0" encoding="utf-8"?>
 <p:sld xmlns:a="http://schemas.openxmlformats.org/drawingml/2006/main" xmlns:r="http://schemas.openxmlformats.org/officeDocument/2006/relationships" xmlns:p="http://schemas.openxmlformats.org/presentationml/2006/main">
   <p:cSld>
     <p:spTree>
@@ -4411,9 +4791,17 @@
 </p:sld>
 </file>
 
-<file path=ppt/slides/slide12.xml><?xml version="1.0" encoding="utf-8"?>
+<file path=ppt/slides/slide11.xml><?xml version="1.0" encoding="utf-8"?>
 <p:sld xmlns:a="http://schemas.openxmlformats.org/drawingml/2006/main" xmlns:r="http://schemas.openxmlformats.org/officeDocument/2006/relationships" xmlns:p="http://schemas.openxmlformats.org/presentationml/2006/main">
   <p:cSld>
+    <p:bg>
+      <p:bgPr>
+        <a:solidFill>
+          <a:schemeClr val="bg1"/>
+        </a:solidFill>
+        <a:effectLst/>
+      </p:bgPr>
+    </p:bg>
     <p:spTree>
       <p:nvGrpSpPr>
         <p:cNvPr id="1" name=""/>
@@ -4428,54 +4816,86 @@
           <a:chExt cx="0" cy="0"/>
         </a:xfrm>
       </p:grpSpPr>
-      <p:sp>
-        <p:nvSpPr>
-          <p:cNvPr id="2" name="Title 1">
-            <a:extLst>
-              <a:ext uri="{FF2B5EF4-FFF2-40B4-BE49-F238E27FC236}">
-                <a16:creationId xmlns:a16="http://schemas.microsoft.com/office/drawing/2014/main" id="{861FDDA8-EE11-679B-37CF-4084ABC805BD}"/>
-              </a:ext>
-            </a:extLst>
-          </p:cNvPr>
-          <p:cNvSpPr>
-            <a:spLocks noGrp="1"/>
-          </p:cNvSpPr>
-          <p:nvPr>
-            <p:ph type="title"/>
-          </p:nvPr>
-        </p:nvSpPr>
-        <p:spPr/>
-        <p:txBody>
-          <a:bodyPr/>
-          <a:lstStyle/>
-          <a:p>
-            <a:r>
-              <a:rPr lang="en-AU" b="1" dirty="0"/>
-              <a:t>Look at the rubric on LMS</a:t>
-            </a:r>
-          </a:p>
-        </p:txBody>
-      </p:sp>
-      <p:sp>
-        <p:nvSpPr>
-          <p:cNvPr id="3" name="Content Placeholder 2">
-            <a:extLst>
-              <a:ext uri="{FF2B5EF4-FFF2-40B4-BE49-F238E27FC236}">
-                <a16:creationId xmlns:a16="http://schemas.microsoft.com/office/drawing/2014/main" id="{ECB978D5-34EE-7C2C-EE34-F722C8E021FD}"/>
-              </a:ext>
-            </a:extLst>
-          </p:cNvPr>
-          <p:cNvSpPr>
-            <a:spLocks noGrp="1"/>
-          </p:cNvSpPr>
-          <p:nvPr>
-            <p:ph idx="1"/>
+      <p:sp useBgFill="1">
+        <p:nvSpPr>
+          <p:cNvPr id="8" name="Rectangle 7">
+            <a:extLst>
+              <a:ext uri="{FF2B5EF4-FFF2-40B4-BE49-F238E27FC236}">
+                <a16:creationId xmlns:a16="http://schemas.microsoft.com/office/drawing/2014/main" id="{100EDD19-6802-4EC3-95CE-CFFAB042CFD6}"/>
+              </a:ext>
+              <a:ext uri="{C183D7F6-B498-43B3-948B-1728B52AA6E4}">
+                <adec:decorative xmlns:adec="http://schemas.microsoft.com/office/drawing/2017/decorative" val="1"/>
+              </a:ext>
+            </a:extLst>
+          </p:cNvPr>
+          <p:cNvSpPr>
+            <a:spLocks noGrp="1" noRot="1" noChangeAspect="1" noMove="1" noResize="1" noEditPoints="1" noAdjustHandles="1" noChangeArrowheads="1" noChangeShapeType="1" noTextEdit="1"/>
+          </p:cNvSpPr>
+          <p:nvPr>
+            <p:extLst>
+              <p:ext uri="{386F3935-93C4-4BCD-93E2-E3B085C9AB24}">
+                <p16:designElem xmlns:p16="http://schemas.microsoft.com/office/powerpoint/2015/main" val="1"/>
+              </p:ext>
+            </p:extLst>
           </p:nvPr>
         </p:nvSpPr>
         <p:spPr>
           <a:xfrm>
-            <a:off x="207264" y="1313561"/>
-            <a:ext cx="12082272" cy="6623431"/>
+            <a:off x="0" y="0"/>
+            <a:ext cx="12188952" cy="6858000"/>
+          </a:xfrm>
+          <a:prstGeom prst="rect">
+            <a:avLst/>
+          </a:prstGeom>
+          <a:ln>
+            <a:noFill/>
+          </a:ln>
+        </p:spPr>
+        <p:style>
+          <a:lnRef idx="2">
+            <a:schemeClr val="accent1">
+              <a:shade val="50000"/>
+            </a:schemeClr>
+          </a:lnRef>
+          <a:fillRef idx="1">
+            <a:schemeClr val="accent1"/>
+          </a:fillRef>
+          <a:effectRef idx="0">
+            <a:schemeClr val="accent1"/>
+          </a:effectRef>
+          <a:fontRef idx="minor">
+            <a:schemeClr val="lt1"/>
+          </a:fontRef>
+        </p:style>
+        <p:txBody>
+          <a:bodyPr rtlCol="0" anchor="ctr"/>
+          <a:lstStyle/>
+          <a:p>
+            <a:pPr algn="ctr"/>
+            <a:endParaRPr lang="en-US"/>
+          </a:p>
+        </p:txBody>
+      </p:sp>
+      <p:sp>
+        <p:nvSpPr>
+          <p:cNvPr id="2" name="Title 1">
+            <a:extLst>
+              <a:ext uri="{FF2B5EF4-FFF2-40B4-BE49-F238E27FC236}">
+                <a16:creationId xmlns:a16="http://schemas.microsoft.com/office/drawing/2014/main" id="{861FDDA8-EE11-679B-37CF-4084ABC805BD}"/>
+              </a:ext>
+            </a:extLst>
+          </p:cNvPr>
+          <p:cNvSpPr>
+            <a:spLocks noGrp="1"/>
+          </p:cNvSpPr>
+          <p:nvPr>
+            <p:ph type="title"/>
+          </p:nvPr>
+        </p:nvSpPr>
+        <p:spPr>
+          <a:xfrm>
+            <a:off x="838200" y="365125"/>
+            <a:ext cx="10515600" cy="1325563"/>
           </a:xfrm>
         </p:spPr>
         <p:txBody>
@@ -4485,7 +4905,680 @@
           <a:lstStyle/>
           <a:p>
             <a:r>
-              <a:rPr lang="en-AU" dirty="0">
+              <a:rPr lang="en-AU" sz="5400" b="1"/>
+              <a:t>Look at the rubric on LMS</a:t>
+            </a:r>
+          </a:p>
+        </p:txBody>
+      </p:sp>
+      <p:sp>
+        <p:nvSpPr>
+          <p:cNvPr id="10" name="sketch line">
+            <a:extLst>
+              <a:ext uri="{FF2B5EF4-FFF2-40B4-BE49-F238E27FC236}">
+                <a16:creationId xmlns:a16="http://schemas.microsoft.com/office/drawing/2014/main" id="{DB17E863-922E-4C26-BD64-E8FD41D28661}"/>
+              </a:ext>
+              <a:ext uri="{C183D7F6-B498-43B3-948B-1728B52AA6E4}">
+                <adec:decorative xmlns:adec="http://schemas.microsoft.com/office/drawing/2017/decorative" val="1"/>
+              </a:ext>
+            </a:extLst>
+          </p:cNvPr>
+          <p:cNvSpPr>
+            <a:spLocks noGrp="1" noRot="1" noChangeAspect="1" noMove="1" noResize="1" noEditPoints="1" noAdjustHandles="1" noChangeArrowheads="1" noChangeShapeType="1" noTextEdit="1"/>
+          </p:cNvSpPr>
+          <p:nvPr>
+            <p:extLst>
+              <p:ext uri="{386F3935-93C4-4BCD-93E2-E3B085C9AB24}">
+                <p16:designElem xmlns:p16="http://schemas.microsoft.com/office/powerpoint/2015/main" val="1"/>
+              </p:ext>
+            </p:extLst>
+          </p:nvPr>
+        </p:nvSpPr>
+        <p:spPr>
+          <a:xfrm>
+            <a:off x="669036" y="1677373"/>
+            <a:ext cx="10853928" cy="18288"/>
+          </a:xfrm>
+          <a:custGeom>
+            <a:avLst/>
+            <a:gdLst>
+              <a:gd name="connsiteX0" fmla="*/ 0 w 10853928"/>
+              <a:gd name="connsiteY0" fmla="*/ 0 h 18288"/>
+              <a:gd name="connsiteX1" fmla="*/ 461292 w 10853928"/>
+              <a:gd name="connsiteY1" fmla="*/ 0 h 18288"/>
+              <a:gd name="connsiteX2" fmla="*/ 1139662 w 10853928"/>
+              <a:gd name="connsiteY2" fmla="*/ 0 h 18288"/>
+              <a:gd name="connsiteX3" fmla="*/ 1926572 w 10853928"/>
+              <a:gd name="connsiteY3" fmla="*/ 0 h 18288"/>
+              <a:gd name="connsiteX4" fmla="*/ 2279325 w 10853928"/>
+              <a:gd name="connsiteY4" fmla="*/ 0 h 18288"/>
+              <a:gd name="connsiteX5" fmla="*/ 2632078 w 10853928"/>
+              <a:gd name="connsiteY5" fmla="*/ 0 h 18288"/>
+              <a:gd name="connsiteX6" fmla="*/ 3527527 w 10853928"/>
+              <a:gd name="connsiteY6" fmla="*/ 0 h 18288"/>
+              <a:gd name="connsiteX7" fmla="*/ 4205897 w 10853928"/>
+              <a:gd name="connsiteY7" fmla="*/ 0 h 18288"/>
+              <a:gd name="connsiteX8" fmla="*/ 4558650 w 10853928"/>
+              <a:gd name="connsiteY8" fmla="*/ 0 h 18288"/>
+              <a:gd name="connsiteX9" fmla="*/ 5237020 w 10853928"/>
+              <a:gd name="connsiteY9" fmla="*/ 0 h 18288"/>
+              <a:gd name="connsiteX10" fmla="*/ 6132469 w 10853928"/>
+              <a:gd name="connsiteY10" fmla="*/ 0 h 18288"/>
+              <a:gd name="connsiteX11" fmla="*/ 6702301 w 10853928"/>
+              <a:gd name="connsiteY11" fmla="*/ 0 h 18288"/>
+              <a:gd name="connsiteX12" fmla="*/ 7272132 w 10853928"/>
+              <a:gd name="connsiteY12" fmla="*/ 0 h 18288"/>
+              <a:gd name="connsiteX13" fmla="*/ 7950502 w 10853928"/>
+              <a:gd name="connsiteY13" fmla="*/ 0 h 18288"/>
+              <a:gd name="connsiteX14" fmla="*/ 8737412 w 10853928"/>
+              <a:gd name="connsiteY14" fmla="*/ 0 h 18288"/>
+              <a:gd name="connsiteX15" fmla="*/ 9524322 w 10853928"/>
+              <a:gd name="connsiteY15" fmla="*/ 0 h 18288"/>
+              <a:gd name="connsiteX16" fmla="*/ 10853928 w 10853928"/>
+              <a:gd name="connsiteY16" fmla="*/ 0 h 18288"/>
+              <a:gd name="connsiteX17" fmla="*/ 10853928 w 10853928"/>
+              <a:gd name="connsiteY17" fmla="*/ 18288 h 18288"/>
+              <a:gd name="connsiteX18" fmla="*/ 10392636 w 10853928"/>
+              <a:gd name="connsiteY18" fmla="*/ 18288 h 18288"/>
+              <a:gd name="connsiteX19" fmla="*/ 9497187 w 10853928"/>
+              <a:gd name="connsiteY19" fmla="*/ 18288 h 18288"/>
+              <a:gd name="connsiteX20" fmla="*/ 8818817 w 10853928"/>
+              <a:gd name="connsiteY20" fmla="*/ 18288 h 18288"/>
+              <a:gd name="connsiteX21" fmla="*/ 8466064 w 10853928"/>
+              <a:gd name="connsiteY21" fmla="*/ 18288 h 18288"/>
+              <a:gd name="connsiteX22" fmla="*/ 7787693 w 10853928"/>
+              <a:gd name="connsiteY22" fmla="*/ 18288 h 18288"/>
+              <a:gd name="connsiteX23" fmla="*/ 7217862 w 10853928"/>
+              <a:gd name="connsiteY23" fmla="*/ 18288 h 18288"/>
+              <a:gd name="connsiteX24" fmla="*/ 6648031 w 10853928"/>
+              <a:gd name="connsiteY24" fmla="*/ 18288 h 18288"/>
+              <a:gd name="connsiteX25" fmla="*/ 6078200 w 10853928"/>
+              <a:gd name="connsiteY25" fmla="*/ 18288 h 18288"/>
+              <a:gd name="connsiteX26" fmla="*/ 5508368 w 10853928"/>
+              <a:gd name="connsiteY26" fmla="*/ 18288 h 18288"/>
+              <a:gd name="connsiteX27" fmla="*/ 4721459 w 10853928"/>
+              <a:gd name="connsiteY27" fmla="*/ 18288 h 18288"/>
+              <a:gd name="connsiteX28" fmla="*/ 4043088 w 10853928"/>
+              <a:gd name="connsiteY28" fmla="*/ 18288 h 18288"/>
+              <a:gd name="connsiteX29" fmla="*/ 3690336 w 10853928"/>
+              <a:gd name="connsiteY29" fmla="*/ 18288 h 18288"/>
+              <a:gd name="connsiteX30" fmla="*/ 3120504 w 10853928"/>
+              <a:gd name="connsiteY30" fmla="*/ 18288 h 18288"/>
+              <a:gd name="connsiteX31" fmla="*/ 2333595 w 10853928"/>
+              <a:gd name="connsiteY31" fmla="*/ 18288 h 18288"/>
+              <a:gd name="connsiteX32" fmla="*/ 1872303 w 10853928"/>
+              <a:gd name="connsiteY32" fmla="*/ 18288 h 18288"/>
+              <a:gd name="connsiteX33" fmla="*/ 976854 w 10853928"/>
+              <a:gd name="connsiteY33" fmla="*/ 18288 h 18288"/>
+              <a:gd name="connsiteX34" fmla="*/ 0 w 10853928"/>
+              <a:gd name="connsiteY34" fmla="*/ 18288 h 18288"/>
+              <a:gd name="connsiteX35" fmla="*/ 0 w 10853928"/>
+              <a:gd name="connsiteY35" fmla="*/ 0 h 18288"/>
+            </a:gdLst>
+            <a:ahLst/>
+            <a:cxnLst>
+              <a:cxn ang="0">
+                <a:pos x="connsiteX0" y="connsiteY0"/>
+              </a:cxn>
+              <a:cxn ang="0">
+                <a:pos x="connsiteX1" y="connsiteY1"/>
+              </a:cxn>
+              <a:cxn ang="0">
+                <a:pos x="connsiteX2" y="connsiteY2"/>
+              </a:cxn>
+              <a:cxn ang="0">
+                <a:pos x="connsiteX3" y="connsiteY3"/>
+              </a:cxn>
+              <a:cxn ang="0">
+                <a:pos x="connsiteX4" y="connsiteY4"/>
+              </a:cxn>
+              <a:cxn ang="0">
+                <a:pos x="connsiteX5" y="connsiteY5"/>
+              </a:cxn>
+              <a:cxn ang="0">
+                <a:pos x="connsiteX6" y="connsiteY6"/>
+              </a:cxn>
+              <a:cxn ang="0">
+                <a:pos x="connsiteX7" y="connsiteY7"/>
+              </a:cxn>
+              <a:cxn ang="0">
+                <a:pos x="connsiteX8" y="connsiteY8"/>
+              </a:cxn>
+              <a:cxn ang="0">
+                <a:pos x="connsiteX9" y="connsiteY9"/>
+              </a:cxn>
+              <a:cxn ang="0">
+                <a:pos x="connsiteX10" y="connsiteY10"/>
+              </a:cxn>
+              <a:cxn ang="0">
+                <a:pos x="connsiteX11" y="connsiteY11"/>
+              </a:cxn>
+              <a:cxn ang="0">
+                <a:pos x="connsiteX12" y="connsiteY12"/>
+              </a:cxn>
+              <a:cxn ang="0">
+                <a:pos x="connsiteX13" y="connsiteY13"/>
+              </a:cxn>
+              <a:cxn ang="0">
+                <a:pos x="connsiteX14" y="connsiteY14"/>
+              </a:cxn>
+              <a:cxn ang="0">
+                <a:pos x="connsiteX15" y="connsiteY15"/>
+              </a:cxn>
+              <a:cxn ang="0">
+                <a:pos x="connsiteX16" y="connsiteY16"/>
+              </a:cxn>
+              <a:cxn ang="0">
+                <a:pos x="connsiteX17" y="connsiteY17"/>
+              </a:cxn>
+              <a:cxn ang="0">
+                <a:pos x="connsiteX18" y="connsiteY18"/>
+              </a:cxn>
+              <a:cxn ang="0">
+                <a:pos x="connsiteX19" y="connsiteY19"/>
+              </a:cxn>
+              <a:cxn ang="0">
+                <a:pos x="connsiteX20" y="connsiteY20"/>
+              </a:cxn>
+              <a:cxn ang="0">
+                <a:pos x="connsiteX21" y="connsiteY21"/>
+              </a:cxn>
+              <a:cxn ang="0">
+                <a:pos x="connsiteX22" y="connsiteY22"/>
+              </a:cxn>
+              <a:cxn ang="0">
+                <a:pos x="connsiteX23" y="connsiteY23"/>
+              </a:cxn>
+              <a:cxn ang="0">
+                <a:pos x="connsiteX24" y="connsiteY24"/>
+              </a:cxn>
+              <a:cxn ang="0">
+                <a:pos x="connsiteX25" y="connsiteY25"/>
+              </a:cxn>
+              <a:cxn ang="0">
+                <a:pos x="connsiteX26" y="connsiteY26"/>
+              </a:cxn>
+              <a:cxn ang="0">
+                <a:pos x="connsiteX27" y="connsiteY27"/>
+              </a:cxn>
+              <a:cxn ang="0">
+                <a:pos x="connsiteX28" y="connsiteY28"/>
+              </a:cxn>
+              <a:cxn ang="0">
+                <a:pos x="connsiteX29" y="connsiteY29"/>
+              </a:cxn>
+              <a:cxn ang="0">
+                <a:pos x="connsiteX30" y="connsiteY30"/>
+              </a:cxn>
+              <a:cxn ang="0">
+                <a:pos x="connsiteX31" y="connsiteY31"/>
+              </a:cxn>
+              <a:cxn ang="0">
+                <a:pos x="connsiteX32" y="connsiteY32"/>
+              </a:cxn>
+              <a:cxn ang="0">
+                <a:pos x="connsiteX33" y="connsiteY33"/>
+              </a:cxn>
+              <a:cxn ang="0">
+                <a:pos x="connsiteX34" y="connsiteY34"/>
+              </a:cxn>
+              <a:cxn ang="0">
+                <a:pos x="connsiteX35" y="connsiteY35"/>
+              </a:cxn>
+            </a:cxnLst>
+            <a:rect l="l" t="t" r="r" b="b"/>
+            <a:pathLst>
+              <a:path w="10853928" h="18288" fill="none" extrusionOk="0">
+                <a:moveTo>
+                  <a:pt x="0" y="0"/>
+                </a:moveTo>
+                <a:cubicBezTo>
+                  <a:pt x="146993" y="-19076"/>
+                  <a:pt x="347684" y="-4790"/>
+                  <a:pt x="461292" y="0"/>
+                </a:cubicBezTo>
+                <a:cubicBezTo>
+                  <a:pt x="574900" y="4790"/>
+                  <a:pt x="808367" y="19821"/>
+                  <a:pt x="1139662" y="0"/>
+                </a:cubicBezTo>
+                <a:cubicBezTo>
+                  <a:pt x="1470957" y="-19821"/>
+                  <a:pt x="1627405" y="5721"/>
+                  <a:pt x="1926572" y="0"/>
+                </a:cubicBezTo>
+                <a:cubicBezTo>
+                  <a:pt x="2225739" y="-5721"/>
+                  <a:pt x="2137730" y="-3235"/>
+                  <a:pt x="2279325" y="0"/>
+                </a:cubicBezTo>
+                <a:cubicBezTo>
+                  <a:pt x="2420920" y="3235"/>
+                  <a:pt x="2456518" y="9685"/>
+                  <a:pt x="2632078" y="0"/>
+                </a:cubicBezTo>
+                <a:cubicBezTo>
+                  <a:pt x="2807638" y="-9685"/>
+                  <a:pt x="3211516" y="-43007"/>
+                  <a:pt x="3527527" y="0"/>
+                </a:cubicBezTo>
+                <a:cubicBezTo>
+                  <a:pt x="3843538" y="43007"/>
+                  <a:pt x="4058833" y="22042"/>
+                  <a:pt x="4205897" y="0"/>
+                </a:cubicBezTo>
+                <a:cubicBezTo>
+                  <a:pt x="4352961" y="-22042"/>
+                  <a:pt x="4474805" y="-11846"/>
+                  <a:pt x="4558650" y="0"/>
+                </a:cubicBezTo>
+                <a:cubicBezTo>
+                  <a:pt x="4642495" y="11846"/>
+                  <a:pt x="5041928" y="-6069"/>
+                  <a:pt x="5237020" y="0"/>
+                </a:cubicBezTo>
+                <a:cubicBezTo>
+                  <a:pt x="5432112" y="6069"/>
+                  <a:pt x="5943266" y="-17479"/>
+                  <a:pt x="6132469" y="0"/>
+                </a:cubicBezTo>
+                <a:cubicBezTo>
+                  <a:pt x="6321672" y="17479"/>
+                  <a:pt x="6483872" y="26234"/>
+                  <a:pt x="6702301" y="0"/>
+                </a:cubicBezTo>
+                <a:cubicBezTo>
+                  <a:pt x="6920730" y="-26234"/>
+                  <a:pt x="6991194" y="-15156"/>
+                  <a:pt x="7272132" y="0"/>
+                </a:cubicBezTo>
+                <a:cubicBezTo>
+                  <a:pt x="7553070" y="15156"/>
+                  <a:pt x="7684444" y="-32961"/>
+                  <a:pt x="7950502" y="0"/>
+                </a:cubicBezTo>
+                <a:cubicBezTo>
+                  <a:pt x="8216560" y="32961"/>
+                  <a:pt x="8493290" y="-10491"/>
+                  <a:pt x="8737412" y="0"/>
+                </a:cubicBezTo>
+                <a:cubicBezTo>
+                  <a:pt x="8981534" y="10491"/>
+                  <a:pt x="9191586" y="-13899"/>
+                  <a:pt x="9524322" y="0"/>
+                </a:cubicBezTo>
+                <a:cubicBezTo>
+                  <a:pt x="9857058" y="13899"/>
+                  <a:pt x="10297509" y="7485"/>
+                  <a:pt x="10853928" y="0"/>
+                </a:cubicBezTo>
+                <a:cubicBezTo>
+                  <a:pt x="10854574" y="4451"/>
+                  <a:pt x="10854418" y="9226"/>
+                  <a:pt x="10853928" y="18288"/>
+                </a:cubicBezTo>
+                <a:cubicBezTo>
+                  <a:pt x="10691638" y="28522"/>
+                  <a:pt x="10574319" y="29578"/>
+                  <a:pt x="10392636" y="18288"/>
+                </a:cubicBezTo>
+                <a:cubicBezTo>
+                  <a:pt x="10210953" y="6998"/>
+                  <a:pt x="9836277" y="-16742"/>
+                  <a:pt x="9497187" y="18288"/>
+                </a:cubicBezTo>
+                <a:cubicBezTo>
+                  <a:pt x="9158097" y="53318"/>
+                  <a:pt x="9119479" y="30714"/>
+                  <a:pt x="8818817" y="18288"/>
+                </a:cubicBezTo>
+                <a:cubicBezTo>
+                  <a:pt x="8518155" y="5863"/>
+                  <a:pt x="8640037" y="6483"/>
+                  <a:pt x="8466064" y="18288"/>
+                </a:cubicBezTo>
+                <a:cubicBezTo>
+                  <a:pt x="8292091" y="30093"/>
+                  <a:pt x="7997656" y="18914"/>
+                  <a:pt x="7787693" y="18288"/>
+                </a:cubicBezTo>
+                <a:cubicBezTo>
+                  <a:pt x="7577730" y="17662"/>
+                  <a:pt x="7412468" y="21416"/>
+                  <a:pt x="7217862" y="18288"/>
+                </a:cubicBezTo>
+                <a:cubicBezTo>
+                  <a:pt x="7023256" y="15160"/>
+                  <a:pt x="6898018" y="14824"/>
+                  <a:pt x="6648031" y="18288"/>
+                </a:cubicBezTo>
+                <a:cubicBezTo>
+                  <a:pt x="6398044" y="21752"/>
+                  <a:pt x="6254402" y="38625"/>
+                  <a:pt x="6078200" y="18288"/>
+                </a:cubicBezTo>
+                <a:cubicBezTo>
+                  <a:pt x="5901998" y="-2049"/>
+                  <a:pt x="5622886" y="3213"/>
+                  <a:pt x="5508368" y="18288"/>
+                </a:cubicBezTo>
+                <a:cubicBezTo>
+                  <a:pt x="5393850" y="33363"/>
+                  <a:pt x="5036260" y="26830"/>
+                  <a:pt x="4721459" y="18288"/>
+                </a:cubicBezTo>
+                <a:cubicBezTo>
+                  <a:pt x="4406658" y="9746"/>
+                  <a:pt x="4239221" y="41551"/>
+                  <a:pt x="4043088" y="18288"/>
+                </a:cubicBezTo>
+                <a:cubicBezTo>
+                  <a:pt x="3846955" y="-4975"/>
+                  <a:pt x="3818802" y="34658"/>
+                  <a:pt x="3690336" y="18288"/>
+                </a:cubicBezTo>
+                <a:cubicBezTo>
+                  <a:pt x="3561870" y="1918"/>
+                  <a:pt x="3265491" y="42194"/>
+                  <a:pt x="3120504" y="18288"/>
+                </a:cubicBezTo>
+                <a:cubicBezTo>
+                  <a:pt x="2975517" y="-5618"/>
+                  <a:pt x="2720254" y="36673"/>
+                  <a:pt x="2333595" y="18288"/>
+                </a:cubicBezTo>
+                <a:cubicBezTo>
+                  <a:pt x="1946936" y="-97"/>
+                  <a:pt x="2097241" y="5776"/>
+                  <a:pt x="1872303" y="18288"/>
+                </a:cubicBezTo>
+                <a:cubicBezTo>
+                  <a:pt x="1647365" y="30800"/>
+                  <a:pt x="1282708" y="45380"/>
+                  <a:pt x="976854" y="18288"/>
+                </a:cubicBezTo>
+                <a:cubicBezTo>
+                  <a:pt x="671000" y="-8804"/>
+                  <a:pt x="408401" y="-12775"/>
+                  <a:pt x="0" y="18288"/>
+                </a:cubicBezTo>
+                <a:cubicBezTo>
+                  <a:pt x="-213" y="9468"/>
+                  <a:pt x="187" y="4459"/>
+                  <a:pt x="0" y="0"/>
+                </a:cubicBezTo>
+                <a:close/>
+              </a:path>
+              <a:path w="10853928" h="18288" stroke="0" extrusionOk="0">
+                <a:moveTo>
+                  <a:pt x="0" y="0"/>
+                </a:moveTo>
+                <a:cubicBezTo>
+                  <a:pt x="267322" y="15284"/>
+                  <a:pt x="415388" y="-21048"/>
+                  <a:pt x="569831" y="0"/>
+                </a:cubicBezTo>
+                <a:cubicBezTo>
+                  <a:pt x="724274" y="21048"/>
+                  <a:pt x="769333" y="-2353"/>
+                  <a:pt x="922584" y="0"/>
+                </a:cubicBezTo>
+                <a:cubicBezTo>
+                  <a:pt x="1075835" y="2353"/>
+                  <a:pt x="1399490" y="-145"/>
+                  <a:pt x="1818033" y="0"/>
+                </a:cubicBezTo>
+                <a:cubicBezTo>
+                  <a:pt x="2236576" y="145"/>
+                  <a:pt x="2145330" y="5482"/>
+                  <a:pt x="2387864" y="0"/>
+                </a:cubicBezTo>
+                <a:cubicBezTo>
+                  <a:pt x="2630398" y="-5482"/>
+                  <a:pt x="2793207" y="18487"/>
+                  <a:pt x="2957695" y="0"/>
+                </a:cubicBezTo>
+                <a:cubicBezTo>
+                  <a:pt x="3122183" y="-18487"/>
+                  <a:pt x="3579141" y="19003"/>
+                  <a:pt x="3853144" y="0"/>
+                </a:cubicBezTo>
+                <a:cubicBezTo>
+                  <a:pt x="4127147" y="-19003"/>
+                  <a:pt x="4209857" y="12211"/>
+                  <a:pt x="4314436" y="0"/>
+                </a:cubicBezTo>
+                <a:cubicBezTo>
+                  <a:pt x="4419015" y="-12211"/>
+                  <a:pt x="4762459" y="-17220"/>
+                  <a:pt x="5209885" y="0"/>
+                </a:cubicBezTo>
+                <a:cubicBezTo>
+                  <a:pt x="5657311" y="17220"/>
+                  <a:pt x="5692663" y="-3290"/>
+                  <a:pt x="6105335" y="0"/>
+                </a:cubicBezTo>
+                <a:cubicBezTo>
+                  <a:pt x="6518007" y="3290"/>
+                  <a:pt x="6455516" y="-5124"/>
+                  <a:pt x="6783705" y="0"/>
+                </a:cubicBezTo>
+                <a:cubicBezTo>
+                  <a:pt x="7111894" y="5124"/>
+                  <a:pt x="7441941" y="-17829"/>
+                  <a:pt x="7679154" y="0"/>
+                </a:cubicBezTo>
+                <a:cubicBezTo>
+                  <a:pt x="7916367" y="17829"/>
+                  <a:pt x="8102967" y="-24363"/>
+                  <a:pt x="8248985" y="0"/>
+                </a:cubicBezTo>
+                <a:cubicBezTo>
+                  <a:pt x="8395003" y="24363"/>
+                  <a:pt x="8552393" y="25505"/>
+                  <a:pt x="8818817" y="0"/>
+                </a:cubicBezTo>
+                <a:cubicBezTo>
+                  <a:pt x="9085241" y="-25505"/>
+                  <a:pt x="9411308" y="38000"/>
+                  <a:pt x="9605726" y="0"/>
+                </a:cubicBezTo>
+                <a:cubicBezTo>
+                  <a:pt x="9800144" y="-38000"/>
+                  <a:pt x="10006468" y="-25741"/>
+                  <a:pt x="10175558" y="0"/>
+                </a:cubicBezTo>
+                <a:cubicBezTo>
+                  <a:pt x="10344648" y="25741"/>
+                  <a:pt x="10696282" y="695"/>
+                  <a:pt x="10853928" y="0"/>
+                </a:cubicBezTo>
+                <a:cubicBezTo>
+                  <a:pt x="10853521" y="8690"/>
+                  <a:pt x="10853774" y="14141"/>
+                  <a:pt x="10853928" y="18288"/>
+                </a:cubicBezTo>
+                <a:cubicBezTo>
+                  <a:pt x="10608124" y="24255"/>
+                  <a:pt x="10343415" y="22307"/>
+                  <a:pt x="10067018" y="18288"/>
+                </a:cubicBezTo>
+                <a:cubicBezTo>
+                  <a:pt x="9790621" y="14270"/>
+                  <a:pt x="9843266" y="3564"/>
+                  <a:pt x="9714266" y="18288"/>
+                </a:cubicBezTo>
+                <a:cubicBezTo>
+                  <a:pt x="9585266" y="33012"/>
+                  <a:pt x="9379484" y="1875"/>
+                  <a:pt x="9252974" y="18288"/>
+                </a:cubicBezTo>
+                <a:cubicBezTo>
+                  <a:pt x="9126464" y="34701"/>
+                  <a:pt x="8580678" y="-4904"/>
+                  <a:pt x="8357525" y="18288"/>
+                </a:cubicBezTo>
+                <a:cubicBezTo>
+                  <a:pt x="8134372" y="41480"/>
+                  <a:pt x="7903199" y="26458"/>
+                  <a:pt x="7679154" y="18288"/>
+                </a:cubicBezTo>
+                <a:cubicBezTo>
+                  <a:pt x="7455109" y="10118"/>
+                  <a:pt x="7435944" y="27109"/>
+                  <a:pt x="7217862" y="18288"/>
+                </a:cubicBezTo>
+                <a:cubicBezTo>
+                  <a:pt x="6999780" y="9467"/>
+                  <a:pt x="6680409" y="18985"/>
+                  <a:pt x="6539492" y="18288"/>
+                </a:cubicBezTo>
+                <a:cubicBezTo>
+                  <a:pt x="6398575" y="17592"/>
+                  <a:pt x="6312077" y="33018"/>
+                  <a:pt x="6186739" y="18288"/>
+                </a:cubicBezTo>
+                <a:cubicBezTo>
+                  <a:pt x="6061401" y="3558"/>
+                  <a:pt x="5947033" y="12075"/>
+                  <a:pt x="5833986" y="18288"/>
+                </a:cubicBezTo>
+                <a:cubicBezTo>
+                  <a:pt x="5720939" y="24501"/>
+                  <a:pt x="5482226" y="8586"/>
+                  <a:pt x="5155616" y="18288"/>
+                </a:cubicBezTo>
+                <a:cubicBezTo>
+                  <a:pt x="4829006" y="27991"/>
+                  <a:pt x="4841274" y="29316"/>
+                  <a:pt x="4694324" y="18288"/>
+                </a:cubicBezTo>
+                <a:cubicBezTo>
+                  <a:pt x="4547374" y="7260"/>
+                  <a:pt x="4077675" y="7013"/>
+                  <a:pt x="3907414" y="18288"/>
+                </a:cubicBezTo>
+                <a:cubicBezTo>
+                  <a:pt x="3737153" y="29564"/>
+                  <a:pt x="3538393" y="21630"/>
+                  <a:pt x="3446122" y="18288"/>
+                </a:cubicBezTo>
+                <a:cubicBezTo>
+                  <a:pt x="3353851" y="14946"/>
+                  <a:pt x="2990320" y="-8091"/>
+                  <a:pt x="2659212" y="18288"/>
+                </a:cubicBezTo>
+                <a:cubicBezTo>
+                  <a:pt x="2328104" y="44667"/>
+                  <a:pt x="2427653" y="9607"/>
+                  <a:pt x="2306460" y="18288"/>
+                </a:cubicBezTo>
+                <a:cubicBezTo>
+                  <a:pt x="2185267" y="26969"/>
+                  <a:pt x="1719763" y="3717"/>
+                  <a:pt x="1519550" y="18288"/>
+                </a:cubicBezTo>
+                <a:cubicBezTo>
+                  <a:pt x="1319337" y="32860"/>
+                  <a:pt x="1167371" y="17040"/>
+                  <a:pt x="1058258" y="18288"/>
+                </a:cubicBezTo>
+                <a:cubicBezTo>
+                  <a:pt x="949145" y="19536"/>
+                  <a:pt x="780234" y="31447"/>
+                  <a:pt x="705505" y="18288"/>
+                </a:cubicBezTo>
+                <a:cubicBezTo>
+                  <a:pt x="630776" y="5129"/>
+                  <a:pt x="215796" y="30056"/>
+                  <a:pt x="0" y="18288"/>
+                </a:cubicBezTo>
+                <a:cubicBezTo>
+                  <a:pt x="-53" y="11301"/>
+                  <a:pt x="-649" y="7756"/>
+                  <a:pt x="0" y="0"/>
+                </a:cubicBezTo>
+                <a:close/>
+              </a:path>
+            </a:pathLst>
+          </a:custGeom>
+          <a:solidFill>
+            <a:schemeClr val="accent2"/>
+          </a:solidFill>
+          <a:ln w="41275" cap="rnd">
+            <a:solidFill>
+              <a:schemeClr val="accent2"/>
+            </a:solidFill>
+            <a:round/>
+            <a:extLst>
+              <a:ext uri="{C807C97D-BFC1-408E-A445-0C87EB9F89A2}">
+                <ask:lineSketchStyleProps xmlns:ask="http://schemas.microsoft.com/office/drawing/2018/sketchyshapes" sd="1219033472">
+                  <a:prstGeom prst="rect">
+                    <a:avLst/>
+                  </a:prstGeom>
+                  <ask:type>
+                    <ask:lineSketchFreehand/>
+                  </ask:type>
+                </ask:lineSketchStyleProps>
+              </a:ext>
+            </a:extLst>
+          </a:ln>
+        </p:spPr>
+        <p:style>
+          <a:lnRef idx="2">
+            <a:schemeClr val="accent1">
+              <a:shade val="50000"/>
+            </a:schemeClr>
+          </a:lnRef>
+          <a:fillRef idx="1">
+            <a:schemeClr val="accent1"/>
+          </a:fillRef>
+          <a:effectRef idx="0">
+            <a:schemeClr val="accent1"/>
+          </a:effectRef>
+          <a:fontRef idx="minor">
+            <a:schemeClr val="lt1"/>
+          </a:fontRef>
+        </p:style>
+        <p:txBody>
+          <a:bodyPr rtlCol="0" anchor="ctr"/>
+          <a:lstStyle/>
+          <a:p>
+            <a:pPr algn="ctr"/>
+            <a:endParaRPr lang="en-US"/>
+          </a:p>
+        </p:txBody>
+      </p:sp>
+      <p:sp>
+        <p:nvSpPr>
+          <p:cNvPr id="3" name="Content Placeholder 2">
+            <a:extLst>
+              <a:ext uri="{FF2B5EF4-FFF2-40B4-BE49-F238E27FC236}">
+                <a16:creationId xmlns:a16="http://schemas.microsoft.com/office/drawing/2014/main" id="{ECB978D5-34EE-7C2C-EE34-F722C8E021FD}"/>
+              </a:ext>
+            </a:extLst>
+          </p:cNvPr>
+          <p:cNvSpPr>
+            <a:spLocks noGrp="1"/>
+          </p:cNvSpPr>
+          <p:nvPr>
+            <p:ph idx="1"/>
+          </p:nvPr>
+        </p:nvSpPr>
+        <p:spPr>
+          <a:xfrm>
+            <a:off x="838200" y="1929384"/>
+            <a:ext cx="10500360" cy="5361432"/>
+          </a:xfrm>
+        </p:spPr>
+        <p:txBody>
+          <a:bodyPr>
+            <a:normAutofit/>
+          </a:bodyPr>
+          <a:lstStyle/>
+          <a:p>
+            <a:r>
+              <a:rPr lang="en-AU" sz="2200" dirty="0">
                 <a:effectLst/>
                 <a:latin typeface="Aptos" panose="020B0004020202020204" pitchFamily="34" charset="0"/>
                 <a:ea typeface="Aptos" panose="020B0004020202020204" pitchFamily="34" charset="0"/>
@@ -4494,20 +5587,20 @@
               <a:t>Libraries (1%)</a:t>
             </a:r>
             <a:r>
-              <a:rPr lang="en-AU" dirty="0">
+              <a:rPr lang="en-AU" sz="2200" dirty="0">
                 <a:effectLst/>
               </a:rPr>
               <a:t> </a:t>
             </a:r>
           </a:p>
           <a:p>
-            <a:endParaRPr lang="en-AU" dirty="0">
+            <a:endParaRPr lang="en-AU" sz="2200" dirty="0">
               <a:effectLst/>
             </a:endParaRPr>
           </a:p>
           <a:p>
             <a:r>
-              <a:rPr lang="en-AU" dirty="0">
+              <a:rPr lang="en-AU" sz="2200" dirty="0">
                 <a:effectLst/>
                 <a:latin typeface="Aptos" panose="020B0004020202020204" pitchFamily="34" charset="0"/>
                 <a:ea typeface="Aptos" panose="020B0004020202020204" pitchFamily="34" charset="0"/>
@@ -4517,7 +5610,7 @@
             </a:r>
           </a:p>
           <a:p>
-            <a:endParaRPr lang="en-AU" dirty="0">
+            <a:endParaRPr lang="en-AU" sz="2200" dirty="0">
               <a:latin typeface="Aptos" panose="020B0004020202020204" pitchFamily="34" charset="0"/>
               <a:ea typeface="Aptos" panose="020B0004020202020204" pitchFamily="34" charset="0"/>
               <a:cs typeface="Times New Roman" panose="02020603050405020304" pitchFamily="18" charset="0"/>
@@ -4525,7 +5618,7 @@
           </a:p>
           <a:p>
             <a:r>
-              <a:rPr lang="en-AU" dirty="0">
+              <a:rPr lang="en-AU" sz="2200" dirty="0">
                 <a:effectLst/>
                 <a:latin typeface="Aptos" panose="020B0004020202020204" pitchFamily="34" charset="0"/>
                 <a:ea typeface="Aptos" panose="020B0004020202020204" pitchFamily="34" charset="0"/>
@@ -4535,7 +5628,7 @@
             </a:r>
           </a:p>
           <a:p>
-            <a:endParaRPr lang="en-AU" dirty="0">
+            <a:endParaRPr lang="en-AU" sz="2200" dirty="0">
               <a:effectLst/>
               <a:latin typeface="Aptos" panose="020B0004020202020204" pitchFamily="34" charset="0"/>
               <a:ea typeface="Aptos" panose="020B0004020202020204" pitchFamily="34" charset="0"/>
@@ -4544,7 +5637,7 @@
           </a:p>
           <a:p>
             <a:r>
-              <a:rPr lang="en-AU" dirty="0">
+              <a:rPr lang="en-AU" sz="2200" dirty="0">
                 <a:effectLst/>
                 <a:latin typeface="Aptos" panose="020B0004020202020204" pitchFamily="34" charset="0"/>
                 <a:ea typeface="Aptos" panose="020B0004020202020204" pitchFamily="34" charset="0"/>
@@ -4553,7 +5646,7 @@
               <a:t>File formatting and how it is saved (3</a:t>
             </a:r>
             <a:r>
-              <a:rPr lang="en-AU" dirty="0">
+              <a:rPr lang="en-AU" sz="2200" dirty="0">
                 <a:latin typeface="Aptos" panose="020B0004020202020204" pitchFamily="34" charset="0"/>
                 <a:ea typeface="Aptos" panose="020B0004020202020204" pitchFamily="34" charset="0"/>
                 <a:cs typeface="Times New Roman" panose="02020603050405020304" pitchFamily="18" charset="0"/>
@@ -4562,7 +5655,7 @@
             </a:r>
           </a:p>
           <a:p>
-            <a:endParaRPr lang="en-AU" dirty="0">
+            <a:endParaRPr lang="en-AU" sz="2200" dirty="0">
               <a:latin typeface="Aptos" panose="020B0004020202020204" pitchFamily="34" charset="0"/>
               <a:ea typeface="Aptos" panose="020B0004020202020204" pitchFamily="34" charset="0"/>
               <a:cs typeface="Times New Roman" panose="02020603050405020304" pitchFamily="18" charset="0"/>
@@ -4570,7 +5663,7 @@
           </a:p>
           <a:p>
             <a:r>
-              <a:rPr lang="en-AU" dirty="0">
+              <a:rPr lang="en-AU" sz="2200" dirty="0">
                 <a:effectLst/>
                 <a:latin typeface="Aptos" panose="020B0004020202020204" pitchFamily="34" charset="0"/>
                 <a:ea typeface="Aptos" panose="020B0004020202020204" pitchFamily="34" charset="0"/>
@@ -4594,7 +5687,7 @@
               <a:buNone/>
             </a:pPr>
             <a:r>
-              <a:rPr lang="en-AU" b="1" dirty="0">
+              <a:rPr lang="en-AU" sz="2200" b="1" dirty="0">
                 <a:effectLst/>
                 <a:latin typeface="Aptos" panose="020B0004020202020204" pitchFamily="34" charset="0"/>
                 <a:ea typeface="Aptos" panose="020B0004020202020204" pitchFamily="34" charset="0"/>
@@ -4603,14 +5696,14 @@
               <a:t>… If you </a:t>
             </a:r>
             <a:r>
-              <a:rPr lang="en-AU" b="1" dirty="0">
+              <a:rPr lang="en-AU" sz="2200" b="1" dirty="0">
                 <a:latin typeface="Aptos" panose="020B0004020202020204" pitchFamily="34" charset="0"/>
                 <a:ea typeface="Aptos" panose="020B0004020202020204" pitchFamily="34" charset="0"/>
                 <a:cs typeface="Times New Roman" panose="02020603050405020304" pitchFamily="18" charset="0"/>
               </a:rPr>
               <a:t>can’t find your answer there ask at the workshop or email me!</a:t>
             </a:r>
-            <a:endParaRPr lang="en-AU" dirty="0">
+            <a:endParaRPr lang="en-AU" sz="2200" dirty="0">
               <a:effectLst/>
               <a:latin typeface="Aptos" panose="020B0004020202020204" pitchFamily="34" charset="0"/>
               <a:ea typeface="Aptos" panose="020B0004020202020204" pitchFamily="34" charset="0"/>
@@ -4622,12 +5715,12 @@
               <a:buNone/>
             </a:pPr>
             <a:r>
-              <a:rPr lang="en-AU" dirty="0">
+              <a:rPr lang="en-AU" sz="1500" dirty="0">
                 <a:effectLst/>
               </a:rPr>
               <a:t> </a:t>
             </a:r>
-            <a:endParaRPr lang="en-AU" dirty="0"/>
+            <a:endParaRPr lang="en-AU" sz="1500" dirty="0"/>
           </a:p>
         </p:txBody>
       </p:sp>
@@ -4723,7 +5816,7 @@
 </p:sld>
 </file>
 
-<file path=ppt/slides/slide13.xml><?xml version="1.0" encoding="utf-8"?>
+<file path=ppt/slides/slide12.xml><?xml version="1.0" encoding="utf-8"?>
 <p:sld xmlns:a="http://schemas.openxmlformats.org/drawingml/2006/main" xmlns:r="http://schemas.openxmlformats.org/officeDocument/2006/relationships" xmlns:p="http://schemas.openxmlformats.org/presentationml/2006/main">
   <p:cSld>
     <p:bg>
@@ -4939,94 +6032,14 @@
 <file path=ppt/slides/slide2.xml><?xml version="1.0" encoding="utf-8"?>
 <p:sld xmlns:a="http://schemas.openxmlformats.org/drawingml/2006/main" xmlns:r="http://schemas.openxmlformats.org/officeDocument/2006/relationships" xmlns:p="http://schemas.openxmlformats.org/presentationml/2006/main">
   <p:cSld>
-    <p:spTree>
-      <p:nvGrpSpPr>
-        <p:cNvPr id="1" name=""/>
-        <p:cNvGrpSpPr/>
-        <p:nvPr/>
-      </p:nvGrpSpPr>
-      <p:grpSpPr>
-        <a:xfrm>
-          <a:off x="0" y="0"/>
-          <a:ext cx="0" cy="0"/>
-          <a:chOff x="0" y="0"/>
-          <a:chExt cx="0" cy="0"/>
-        </a:xfrm>
-      </p:grpSpPr>
-      <p:sp>
-        <p:nvSpPr>
-          <p:cNvPr id="2" name="Title 1">
-            <a:extLst>
-              <a:ext uri="{FF2B5EF4-FFF2-40B4-BE49-F238E27FC236}">
-                <a16:creationId xmlns:a16="http://schemas.microsoft.com/office/drawing/2014/main" id="{034B267B-6178-0125-C7EB-FFF4EB7C405C}"/>
-              </a:ext>
-            </a:extLst>
-          </p:cNvPr>
-          <p:cNvSpPr>
-            <a:spLocks noGrp="1"/>
-          </p:cNvSpPr>
-          <p:nvPr>
-            <p:ph type="title"/>
-          </p:nvPr>
-        </p:nvSpPr>
-        <p:spPr/>
-        <p:txBody>
-          <a:bodyPr/>
-          <a:lstStyle/>
-          <a:p>
-            <a:r>
-              <a:rPr lang="en-AU" dirty="0"/>
-              <a:t>QUIZ</a:t>
-            </a:r>
-          </a:p>
-        </p:txBody>
-      </p:sp>
-      <p:pic>
-        <p:nvPicPr>
-          <p:cNvPr id="5" name="Picture 4" descr="A screenshot of a computer&#10;&#10;Description automatically generated">
-            <a:extLst>
-              <a:ext uri="{FF2B5EF4-FFF2-40B4-BE49-F238E27FC236}">
-                <a16:creationId xmlns:a16="http://schemas.microsoft.com/office/drawing/2014/main" id="{673CF688-AAAF-78BE-D0B8-E62310AED0B7}"/>
-              </a:ext>
-            </a:extLst>
-          </p:cNvPr>
-          <p:cNvPicPr>
-            <a:picLocks noChangeAspect="1"/>
-          </p:cNvPicPr>
-          <p:nvPr/>
-        </p:nvPicPr>
-        <p:blipFill>
-          <a:blip r:embed="rId3"/>
-          <a:stretch>
-            <a:fillRect/>
-          </a:stretch>
-        </p:blipFill>
-        <p:spPr>
-          <a:xfrm>
-            <a:off x="3102142" y="841248"/>
-            <a:ext cx="7772400" cy="5899158"/>
-          </a:xfrm>
-          <a:prstGeom prst="rect">
-            <a:avLst/>
-          </a:prstGeom>
-        </p:spPr>
-      </p:pic>
-    </p:spTree>
-    <p:extLst>
-      <p:ext uri="{BB962C8B-B14F-4D97-AF65-F5344CB8AC3E}">
-        <p14:creationId xmlns:p14="http://schemas.microsoft.com/office/powerpoint/2010/main" val="2066061685"/>
-      </p:ext>
-    </p:extLst>
-  </p:cSld>
-  <p:clrMapOvr>
-    <a:masterClrMapping/>
-  </p:clrMapOvr>
-</p:sld>
-</file>
-
-<file path=ppt/slides/slide3.xml><?xml version="1.0" encoding="utf-8"?>
-<p:sld xmlns:a="http://schemas.openxmlformats.org/drawingml/2006/main" xmlns:r="http://schemas.openxmlformats.org/officeDocument/2006/relationships" xmlns:p="http://schemas.openxmlformats.org/presentationml/2006/main">
-  <p:cSld>
+    <p:bg>
+      <p:bgPr>
+        <a:solidFill>
+          <a:schemeClr val="bg1"/>
+        </a:solidFill>
+        <a:effectLst/>
+      </p:bgPr>
+    </p:bg>
     <p:spTree>
       <p:nvGrpSpPr>
         <p:cNvPr id="1" name="">
@@ -5047,6 +6060,479 @@
           <a:chExt cx="0" cy="0"/>
         </a:xfrm>
       </p:grpSpPr>
+      <p:sp useBgFill="1">
+        <p:nvSpPr>
+          <p:cNvPr id="12" name="Rectangle 11">
+            <a:extLst>
+              <a:ext uri="{FF2B5EF4-FFF2-40B4-BE49-F238E27FC236}">
+                <a16:creationId xmlns:a16="http://schemas.microsoft.com/office/drawing/2014/main" id="{A8384FB5-9ADC-4DDC-881B-597D56F5B15D}"/>
+              </a:ext>
+              <a:ext uri="{C183D7F6-B498-43B3-948B-1728B52AA6E4}">
+                <adec:decorative xmlns:adec="http://schemas.microsoft.com/office/drawing/2017/decorative" val="1"/>
+              </a:ext>
+            </a:extLst>
+          </p:cNvPr>
+          <p:cNvSpPr>
+            <a:spLocks noGrp="1" noRot="1" noChangeAspect="1" noMove="1" noResize="1" noEditPoints="1" noAdjustHandles="1" noChangeArrowheads="1" noChangeShapeType="1" noTextEdit="1"/>
+          </p:cNvSpPr>
+          <p:nvPr>
+            <p:extLst>
+              <p:ext uri="{386F3935-93C4-4BCD-93E2-E3B085C9AB24}">
+                <p16:designElem xmlns:p16="http://schemas.microsoft.com/office/powerpoint/2015/main" val="1"/>
+              </p:ext>
+            </p:extLst>
+          </p:nvPr>
+        </p:nvSpPr>
+        <p:spPr>
+          <a:xfrm>
+            <a:off x="0" y="0"/>
+            <a:ext cx="12192000" cy="6858000"/>
+          </a:xfrm>
+          <a:prstGeom prst="rect">
+            <a:avLst/>
+          </a:prstGeom>
+          <a:ln w="12700" cap="flat" cmpd="sng" algn="ctr">
+            <a:noFill/>
+            <a:prstDash val="solid"/>
+            <a:miter lim="800000"/>
+          </a:ln>
+          <a:effectLst/>
+          <a:extLst>
+            <a:ext uri="{91240B29-F687-4F45-9708-019B960494DF}">
+              <a14:hiddenLine xmlns:a14="http://schemas.microsoft.com/office/drawing/2010/main" w="12700" cap="flat" cmpd="sng" algn="ctr">
+                <a:solidFill>
+                  <a:schemeClr val="accent1">
+                    <a:shade val="50000"/>
+                  </a:schemeClr>
+                </a:solidFill>
+                <a:prstDash val="solid"/>
+                <a:miter lim="800000"/>
+              </a14:hiddenLine>
+            </a:ext>
+          </a:extLst>
+        </p:spPr>
+        <p:style>
+          <a:lnRef idx="2">
+            <a:schemeClr val="accent1">
+              <a:shade val="50000"/>
+            </a:schemeClr>
+          </a:lnRef>
+          <a:fillRef idx="1">
+            <a:schemeClr val="accent1"/>
+          </a:fillRef>
+          <a:effectRef idx="0">
+            <a:schemeClr val="accent1"/>
+          </a:effectRef>
+          <a:fontRef idx="minor">
+            <a:schemeClr val="lt1"/>
+          </a:fontRef>
+        </p:style>
+        <p:txBody>
+          <a:bodyPr rtlCol="0" anchor="ctr"/>
+          <a:lstStyle/>
+          <a:p>
+            <a:pPr algn="ctr"/>
+            <a:endParaRPr lang="en-US"/>
+          </a:p>
+        </p:txBody>
+      </p:sp>
+      <p:sp>
+        <p:nvSpPr>
+          <p:cNvPr id="14" name="Rectangle 13">
+            <a:extLst>
+              <a:ext uri="{FF2B5EF4-FFF2-40B4-BE49-F238E27FC236}">
+                <a16:creationId xmlns:a16="http://schemas.microsoft.com/office/drawing/2014/main" id="{91E5A9A7-95C6-4F4F-B00E-C82E07FE62EF}"/>
+              </a:ext>
+              <a:ext uri="{C183D7F6-B498-43B3-948B-1728B52AA6E4}">
+                <adec:decorative xmlns:adec="http://schemas.microsoft.com/office/drawing/2017/decorative" val="1"/>
+              </a:ext>
+            </a:extLst>
+          </p:cNvPr>
+          <p:cNvSpPr>
+            <a:spLocks noGrp="1" noRot="1" noChangeAspect="1" noMove="1" noResize="1" noEditPoints="1" noAdjustHandles="1" noChangeArrowheads="1" noChangeShapeType="1" noTextEdit="1"/>
+          </p:cNvSpPr>
+          <p:nvPr>
+            <p:extLst>
+              <p:ext uri="{386F3935-93C4-4BCD-93E2-E3B085C9AB24}">
+                <p16:designElem xmlns:p16="http://schemas.microsoft.com/office/powerpoint/2015/main" val="1"/>
+              </p:ext>
+            </p:extLst>
+          </p:nvPr>
+        </p:nvSpPr>
+        <p:spPr>
+          <a:xfrm rot="5400000" flipH="1">
+            <a:off x="-1417539" y="1417538"/>
+            <a:ext cx="6875818" cy="4040744"/>
+          </a:xfrm>
+          <a:prstGeom prst="rect">
+            <a:avLst/>
+          </a:prstGeom>
+          <a:gradFill>
+            <a:gsLst>
+              <a:gs pos="0">
+                <a:srgbClr val="000000"/>
+              </a:gs>
+              <a:gs pos="100000">
+                <a:schemeClr val="accent1">
+                  <a:lumMod val="75000"/>
+                </a:schemeClr>
+              </a:gs>
+            </a:gsLst>
+            <a:lin ang="18600000" scaled="0"/>
+          </a:gradFill>
+          <a:ln>
+            <a:noFill/>
+          </a:ln>
+        </p:spPr>
+        <p:style>
+          <a:lnRef idx="2">
+            <a:schemeClr val="accent1">
+              <a:shade val="50000"/>
+            </a:schemeClr>
+          </a:lnRef>
+          <a:fillRef idx="1">
+            <a:schemeClr val="accent1"/>
+          </a:fillRef>
+          <a:effectRef idx="0">
+            <a:schemeClr val="accent1"/>
+          </a:effectRef>
+          <a:fontRef idx="minor">
+            <a:schemeClr val="lt1"/>
+          </a:fontRef>
+        </p:style>
+        <p:txBody>
+          <a:bodyPr rtlCol="0" anchor="ctr"/>
+          <a:lstStyle/>
+          <a:p>
+            <a:pPr algn="ctr"/>
+            <a:endParaRPr lang="en-US" dirty="0"/>
+          </a:p>
+        </p:txBody>
+      </p:sp>
+      <p:sp>
+        <p:nvSpPr>
+          <p:cNvPr id="16" name="Rectangle 15">
+            <a:extLst>
+              <a:ext uri="{FF2B5EF4-FFF2-40B4-BE49-F238E27FC236}">
+                <a16:creationId xmlns:a16="http://schemas.microsoft.com/office/drawing/2014/main" id="{D07DD2DE-F619-49DD-B5E7-03A290FF4ED1}"/>
+              </a:ext>
+              <a:ext uri="{C183D7F6-B498-43B3-948B-1728B52AA6E4}">
+                <adec:decorative xmlns:adec="http://schemas.microsoft.com/office/drawing/2017/decorative" val="1"/>
+              </a:ext>
+            </a:extLst>
+          </p:cNvPr>
+          <p:cNvSpPr>
+            <a:spLocks noGrp="1" noRot="1" noChangeAspect="1" noMove="1" noResize="1" noEditPoints="1" noAdjustHandles="1" noChangeArrowheads="1" noChangeShapeType="1" noTextEdit="1"/>
+          </p:cNvSpPr>
+          <p:nvPr>
+            <p:extLst>
+              <p:ext uri="{386F3935-93C4-4BCD-93E2-E3B085C9AB24}">
+                <p16:designElem xmlns:p16="http://schemas.microsoft.com/office/powerpoint/2015/main" val="1"/>
+              </p:ext>
+            </p:extLst>
+          </p:nvPr>
+        </p:nvSpPr>
+        <p:spPr>
+          <a:xfrm rot="16200000">
+            <a:off x="-158495" y="2660473"/>
+            <a:ext cx="4355594" cy="4038603"/>
+          </a:xfrm>
+          <a:prstGeom prst="rect">
+            <a:avLst/>
+          </a:prstGeom>
+          <a:gradFill>
+            <a:gsLst>
+              <a:gs pos="0">
+                <a:schemeClr val="accent1">
+                  <a:alpha val="50000"/>
+                </a:schemeClr>
+              </a:gs>
+              <a:gs pos="100000">
+                <a:schemeClr val="accent1">
+                  <a:lumMod val="50000"/>
+                  <a:alpha val="0"/>
+                </a:schemeClr>
+              </a:gs>
+            </a:gsLst>
+            <a:lin ang="11400000" scaled="0"/>
+          </a:gradFill>
+          <a:ln>
+            <a:noFill/>
+          </a:ln>
+        </p:spPr>
+        <p:style>
+          <a:lnRef idx="2">
+            <a:schemeClr val="accent1">
+              <a:shade val="50000"/>
+            </a:schemeClr>
+          </a:lnRef>
+          <a:fillRef idx="1">
+            <a:schemeClr val="accent1"/>
+          </a:fillRef>
+          <a:effectRef idx="0">
+            <a:schemeClr val="accent1"/>
+          </a:effectRef>
+          <a:fontRef idx="minor">
+            <a:schemeClr val="lt1"/>
+          </a:fontRef>
+        </p:style>
+        <p:txBody>
+          <a:bodyPr rtlCol="0" anchor="ctr"/>
+          <a:lstStyle/>
+          <a:p>
+            <a:pPr algn="ctr"/>
+            <a:endParaRPr lang="en-US"/>
+          </a:p>
+        </p:txBody>
+      </p:sp>
+      <p:sp>
+        <p:nvSpPr>
+          <p:cNvPr id="18" name="Rectangle 17">
+            <a:extLst>
+              <a:ext uri="{FF2B5EF4-FFF2-40B4-BE49-F238E27FC236}">
+                <a16:creationId xmlns:a16="http://schemas.microsoft.com/office/drawing/2014/main" id="{85149191-5F60-4A28-AAFF-039F96B0F3EC}"/>
+              </a:ext>
+              <a:ext uri="{C183D7F6-B498-43B3-948B-1728B52AA6E4}">
+                <adec:decorative xmlns:adec="http://schemas.microsoft.com/office/drawing/2017/decorative" val="1"/>
+              </a:ext>
+            </a:extLst>
+          </p:cNvPr>
+          <p:cNvSpPr>
+            <a:spLocks noGrp="1" noRot="1" noChangeAspect="1" noMove="1" noResize="1" noEditPoints="1" noAdjustHandles="1" noChangeArrowheads="1" noChangeShapeType="1" noTextEdit="1"/>
+          </p:cNvSpPr>
+          <p:nvPr>
+            <p:extLst>
+              <p:ext uri="{386F3935-93C4-4BCD-93E2-E3B085C9AB24}">
+                <p16:designElem xmlns:p16="http://schemas.microsoft.com/office/powerpoint/2015/main" val="1"/>
+              </p:ext>
+            </p:extLst>
+          </p:nvPr>
+        </p:nvSpPr>
+        <p:spPr>
+          <a:xfrm rot="16200000" flipH="1">
+            <a:off x="-1180882" y="1638085"/>
+            <a:ext cx="6857572" cy="3581401"/>
+          </a:xfrm>
+          <a:prstGeom prst="rect">
+            <a:avLst/>
+          </a:prstGeom>
+          <a:gradFill>
+            <a:gsLst>
+              <a:gs pos="0">
+                <a:srgbClr val="000000">
+                  <a:alpha val="59000"/>
+                </a:srgbClr>
+              </a:gs>
+              <a:gs pos="69000">
+                <a:schemeClr val="accent1">
+                  <a:alpha val="0"/>
+                </a:schemeClr>
+              </a:gs>
+            </a:gsLst>
+            <a:lin ang="13200000" scaled="0"/>
+          </a:gradFill>
+          <a:ln>
+            <a:noFill/>
+          </a:ln>
+        </p:spPr>
+        <p:style>
+          <a:lnRef idx="2">
+            <a:schemeClr val="accent1">
+              <a:shade val="50000"/>
+            </a:schemeClr>
+          </a:lnRef>
+          <a:fillRef idx="1">
+            <a:schemeClr val="accent1"/>
+          </a:fillRef>
+          <a:effectRef idx="0">
+            <a:schemeClr val="accent1"/>
+          </a:effectRef>
+          <a:fontRef idx="minor">
+            <a:schemeClr val="lt1"/>
+          </a:fontRef>
+        </p:style>
+        <p:txBody>
+          <a:bodyPr rtlCol="0" anchor="ctr"/>
+          <a:lstStyle/>
+          <a:p>
+            <a:pPr algn="ctr"/>
+            <a:endParaRPr lang="en-US" dirty="0"/>
+          </a:p>
+        </p:txBody>
+      </p:sp>
+      <p:sp>
+        <p:nvSpPr>
+          <p:cNvPr id="20" name="Freeform: Shape 19">
+            <a:extLst>
+              <a:ext uri="{FF2B5EF4-FFF2-40B4-BE49-F238E27FC236}">
+                <a16:creationId xmlns:a16="http://schemas.microsoft.com/office/drawing/2014/main" id="{F8260ED5-17F7-4158-B241-D51DD4CF1B7E}"/>
+              </a:ext>
+              <a:ext uri="{C183D7F6-B498-43B3-948B-1728B52AA6E4}">
+                <adec:decorative xmlns:adec="http://schemas.microsoft.com/office/drawing/2017/decorative" val="1"/>
+              </a:ext>
+            </a:extLst>
+          </p:cNvPr>
+          <p:cNvSpPr>
+            <a:spLocks noGrp="1" noRot="1" noChangeAspect="1" noMove="1" noResize="1" noEditPoints="1" noAdjustHandles="1" noChangeArrowheads="1" noChangeShapeType="1" noTextEdit="1"/>
+          </p:cNvSpPr>
+          <p:nvPr>
+            <p:extLst>
+              <p:ext uri="{386F3935-93C4-4BCD-93E2-E3B085C9AB24}">
+                <p16:designElem xmlns:p16="http://schemas.microsoft.com/office/powerpoint/2015/main" val="1"/>
+              </p:ext>
+            </p:extLst>
+          </p:nvPr>
+        </p:nvSpPr>
+        <p:spPr>
+          <a:xfrm rot="6097846">
+            <a:off x="-747355" y="1201312"/>
+            <a:ext cx="4808302" cy="4088666"/>
+          </a:xfrm>
+          <a:custGeom>
+            <a:avLst/>
+            <a:gdLst>
+              <a:gd name="connsiteX0" fmla="*/ 48844 w 4808302"/>
+              <a:gd name="connsiteY0" fmla="*/ 2888671 h 4088666"/>
+              <a:gd name="connsiteX1" fmla="*/ 0 w 4808302"/>
+              <a:gd name="connsiteY1" fmla="*/ 2404151 h 4088666"/>
+              <a:gd name="connsiteX2" fmla="*/ 2404151 w 4808302"/>
+              <a:gd name="connsiteY2" fmla="*/ 0 h 4088666"/>
+              <a:gd name="connsiteX3" fmla="*/ 4808302 w 4808302"/>
+              <a:gd name="connsiteY3" fmla="*/ 2404151 h 4088666"/>
+              <a:gd name="connsiteX4" fmla="*/ 4700216 w 4808302"/>
+              <a:gd name="connsiteY4" fmla="*/ 3119072 h 4088666"/>
+              <a:gd name="connsiteX5" fmla="*/ 4643143 w 4808302"/>
+              <a:gd name="connsiteY5" fmla="*/ 3275009 h 4088666"/>
+              <a:gd name="connsiteX6" fmla="*/ 690093 w 4808302"/>
+              <a:gd name="connsiteY6" fmla="*/ 4088666 h 4088666"/>
+              <a:gd name="connsiteX7" fmla="*/ 548991 w 4808302"/>
+              <a:gd name="connsiteY7" fmla="*/ 3933414 h 4088666"/>
+              <a:gd name="connsiteX8" fmla="*/ 48844 w 4808302"/>
+              <a:gd name="connsiteY8" fmla="*/ 2888671 h 4088666"/>
+            </a:gdLst>
+            <a:ahLst/>
+            <a:cxnLst>
+              <a:cxn ang="0">
+                <a:pos x="connsiteX0" y="connsiteY0"/>
+              </a:cxn>
+              <a:cxn ang="0">
+                <a:pos x="connsiteX1" y="connsiteY1"/>
+              </a:cxn>
+              <a:cxn ang="0">
+                <a:pos x="connsiteX2" y="connsiteY2"/>
+              </a:cxn>
+              <a:cxn ang="0">
+                <a:pos x="connsiteX3" y="connsiteY3"/>
+              </a:cxn>
+              <a:cxn ang="0">
+                <a:pos x="connsiteX4" y="connsiteY4"/>
+              </a:cxn>
+              <a:cxn ang="0">
+                <a:pos x="connsiteX5" y="connsiteY5"/>
+              </a:cxn>
+              <a:cxn ang="0">
+                <a:pos x="connsiteX6" y="connsiteY6"/>
+              </a:cxn>
+              <a:cxn ang="0">
+                <a:pos x="connsiteX7" y="connsiteY7"/>
+              </a:cxn>
+              <a:cxn ang="0">
+                <a:pos x="connsiteX8" y="connsiteY8"/>
+              </a:cxn>
+            </a:cxnLst>
+            <a:rect l="l" t="t" r="r" b="b"/>
+            <a:pathLst>
+              <a:path w="4808302" h="4088666">
+                <a:moveTo>
+                  <a:pt x="48844" y="2888671"/>
+                </a:moveTo>
+                <a:cubicBezTo>
+                  <a:pt x="16818" y="2732167"/>
+                  <a:pt x="0" y="2570123"/>
+                  <a:pt x="0" y="2404151"/>
+                </a:cubicBezTo>
+                <a:cubicBezTo>
+                  <a:pt x="0" y="1076375"/>
+                  <a:pt x="1076375" y="0"/>
+                  <a:pt x="2404151" y="0"/>
+                </a:cubicBezTo>
+                <a:cubicBezTo>
+                  <a:pt x="3731927" y="0"/>
+                  <a:pt x="4808302" y="1076375"/>
+                  <a:pt x="4808302" y="2404151"/>
+                </a:cubicBezTo>
+                <a:cubicBezTo>
+                  <a:pt x="4808302" y="2653109"/>
+                  <a:pt x="4770461" y="2893229"/>
+                  <a:pt x="4700216" y="3119072"/>
+                </a:cubicBezTo>
+                <a:lnTo>
+                  <a:pt x="4643143" y="3275009"/>
+                </a:lnTo>
+                <a:lnTo>
+                  <a:pt x="690093" y="4088666"/>
+                </a:lnTo>
+                <a:lnTo>
+                  <a:pt x="548991" y="3933414"/>
+                </a:lnTo>
+                <a:cubicBezTo>
+                  <a:pt x="304015" y="3636572"/>
+                  <a:pt x="128908" y="3279932"/>
+                  <a:pt x="48844" y="2888671"/>
+                </a:cubicBezTo>
+                <a:close/>
+              </a:path>
+            </a:pathLst>
+          </a:custGeom>
+          <a:gradFill>
+            <a:gsLst>
+              <a:gs pos="39000">
+                <a:schemeClr val="accent1">
+                  <a:lumMod val="60000"/>
+                  <a:lumOff val="40000"/>
+                  <a:alpha val="0"/>
+                </a:schemeClr>
+              </a:gs>
+              <a:gs pos="100000">
+                <a:schemeClr val="accent1">
+                  <a:lumMod val="75000"/>
+                  <a:alpha val="26000"/>
+                </a:schemeClr>
+              </a:gs>
+            </a:gsLst>
+            <a:lin ang="18600000" scaled="0"/>
+          </a:gradFill>
+          <a:ln>
+            <a:noFill/>
+          </a:ln>
+        </p:spPr>
+        <p:style>
+          <a:lnRef idx="2">
+            <a:schemeClr val="accent1">
+              <a:shade val="50000"/>
+            </a:schemeClr>
+          </a:lnRef>
+          <a:fillRef idx="1">
+            <a:schemeClr val="accent1"/>
+          </a:fillRef>
+          <a:effectRef idx="0">
+            <a:schemeClr val="accent1"/>
+          </a:effectRef>
+          <a:fontRef idx="minor">
+            <a:schemeClr val="lt1"/>
+          </a:fontRef>
+        </p:style>
+        <p:txBody>
+          <a:bodyPr wrap="square" rtlCol="0" anchor="ctr">
+            <a:noAutofit/>
+          </a:bodyPr>
+          <a:lstStyle/>
+          <a:p>
+            <a:pPr algn="ctr"/>
+            <a:endParaRPr lang="en-US" dirty="0"/>
+          </a:p>
+        </p:txBody>
+      </p:sp>
       <p:sp>
         <p:nvSpPr>
           <p:cNvPr id="2" name="Title 1">
@@ -5063,13 +6549,27 @@
             <p:ph type="title"/>
           </p:nvPr>
         </p:nvSpPr>
-        <p:spPr/>
-        <p:txBody>
-          <a:bodyPr/>
-          <a:lstStyle/>
-          <a:p>
-            <a:r>
-              <a:rPr lang="en-AU" dirty="0"/>
+        <p:spPr>
+          <a:xfrm>
+            <a:off x="660041" y="2767106"/>
+            <a:ext cx="2880828" cy="3071906"/>
+          </a:xfrm>
+        </p:spPr>
+        <p:txBody>
+          <a:bodyPr vert="horz" lIns="91440" tIns="45720" rIns="91440" bIns="45720" rtlCol="0" anchor="t">
+            <a:normAutofit/>
+          </a:bodyPr>
+          <a:lstStyle/>
+          <a:p>
+            <a:r>
+              <a:rPr lang="en-US" sz="4000" kern="1200">
+                <a:solidFill>
+                  <a:srgbClr val="FFFFFF"/>
+                </a:solidFill>
+                <a:latin typeface="+mj-lt"/>
+                <a:ea typeface="+mj-ea"/>
+                <a:cs typeface="+mj-cs"/>
+              </a:rPr>
               <a:t>QUIZ</a:t>
             </a:r>
           </a:p>
@@ -5097,8 +6597,8 @@
         </p:blipFill>
         <p:spPr>
           <a:xfrm>
-            <a:off x="3123692" y="885444"/>
-            <a:ext cx="7772400" cy="3260716"/>
+            <a:off x="4502428" y="1911593"/>
+            <a:ext cx="7225748" cy="3034814"/>
           </a:xfrm>
           <a:prstGeom prst="rect">
             <a:avLst/>
@@ -5118,9 +6618,17 @@
 </p:sld>
 </file>
 
-<file path=ppt/slides/slide4.xml><?xml version="1.0" encoding="utf-8"?>
+<file path=ppt/slides/slide3.xml><?xml version="1.0" encoding="utf-8"?>
 <p:sld xmlns:a="http://schemas.openxmlformats.org/drawingml/2006/main" xmlns:r="http://schemas.openxmlformats.org/officeDocument/2006/relationships" xmlns:p="http://schemas.openxmlformats.org/presentationml/2006/main">
   <p:cSld>
+    <p:bg>
+      <p:bgPr>
+        <a:solidFill>
+          <a:schemeClr val="bg1"/>
+        </a:solidFill>
+        <a:effectLst/>
+      </p:bgPr>
+    </p:bg>
     <p:spTree>
       <p:nvGrpSpPr>
         <p:cNvPr id="1" name="">
@@ -5141,6 +6649,479 @@
           <a:chExt cx="0" cy="0"/>
         </a:xfrm>
       </p:grpSpPr>
+      <p:sp useBgFill="1">
+        <p:nvSpPr>
+          <p:cNvPr id="8" name="Rectangle 7">
+            <a:extLst>
+              <a:ext uri="{FF2B5EF4-FFF2-40B4-BE49-F238E27FC236}">
+                <a16:creationId xmlns:a16="http://schemas.microsoft.com/office/drawing/2014/main" id="{A8384FB5-9ADC-4DDC-881B-597D56F5B15D}"/>
+              </a:ext>
+              <a:ext uri="{C183D7F6-B498-43B3-948B-1728B52AA6E4}">
+                <adec:decorative xmlns:adec="http://schemas.microsoft.com/office/drawing/2017/decorative" val="1"/>
+              </a:ext>
+            </a:extLst>
+          </p:cNvPr>
+          <p:cNvSpPr>
+            <a:spLocks noGrp="1" noRot="1" noChangeAspect="1" noMove="1" noResize="1" noEditPoints="1" noAdjustHandles="1" noChangeArrowheads="1" noChangeShapeType="1" noTextEdit="1"/>
+          </p:cNvSpPr>
+          <p:nvPr>
+            <p:extLst>
+              <p:ext uri="{386F3935-93C4-4BCD-93E2-E3B085C9AB24}">
+                <p16:designElem xmlns:p16="http://schemas.microsoft.com/office/powerpoint/2015/main" val="1"/>
+              </p:ext>
+            </p:extLst>
+          </p:nvPr>
+        </p:nvSpPr>
+        <p:spPr>
+          <a:xfrm>
+            <a:off x="0" y="0"/>
+            <a:ext cx="12192000" cy="6858000"/>
+          </a:xfrm>
+          <a:prstGeom prst="rect">
+            <a:avLst/>
+          </a:prstGeom>
+          <a:ln w="12700" cap="flat" cmpd="sng" algn="ctr">
+            <a:noFill/>
+            <a:prstDash val="solid"/>
+            <a:miter lim="800000"/>
+          </a:ln>
+          <a:effectLst/>
+          <a:extLst>
+            <a:ext uri="{91240B29-F687-4F45-9708-019B960494DF}">
+              <a14:hiddenLine xmlns:a14="http://schemas.microsoft.com/office/drawing/2010/main" w="12700" cap="flat" cmpd="sng" algn="ctr">
+                <a:solidFill>
+                  <a:schemeClr val="accent1">
+                    <a:shade val="50000"/>
+                  </a:schemeClr>
+                </a:solidFill>
+                <a:prstDash val="solid"/>
+                <a:miter lim="800000"/>
+              </a14:hiddenLine>
+            </a:ext>
+          </a:extLst>
+        </p:spPr>
+        <p:style>
+          <a:lnRef idx="2">
+            <a:schemeClr val="accent1">
+              <a:shade val="50000"/>
+            </a:schemeClr>
+          </a:lnRef>
+          <a:fillRef idx="1">
+            <a:schemeClr val="accent1"/>
+          </a:fillRef>
+          <a:effectRef idx="0">
+            <a:schemeClr val="accent1"/>
+          </a:effectRef>
+          <a:fontRef idx="minor">
+            <a:schemeClr val="lt1"/>
+          </a:fontRef>
+        </p:style>
+        <p:txBody>
+          <a:bodyPr rtlCol="0" anchor="ctr"/>
+          <a:lstStyle/>
+          <a:p>
+            <a:pPr algn="ctr"/>
+            <a:endParaRPr lang="en-US"/>
+          </a:p>
+        </p:txBody>
+      </p:sp>
+      <p:sp>
+        <p:nvSpPr>
+          <p:cNvPr id="10" name="Rectangle 9">
+            <a:extLst>
+              <a:ext uri="{FF2B5EF4-FFF2-40B4-BE49-F238E27FC236}">
+                <a16:creationId xmlns:a16="http://schemas.microsoft.com/office/drawing/2014/main" id="{91E5A9A7-95C6-4F4F-B00E-C82E07FE62EF}"/>
+              </a:ext>
+              <a:ext uri="{C183D7F6-B498-43B3-948B-1728B52AA6E4}">
+                <adec:decorative xmlns:adec="http://schemas.microsoft.com/office/drawing/2017/decorative" val="1"/>
+              </a:ext>
+            </a:extLst>
+          </p:cNvPr>
+          <p:cNvSpPr>
+            <a:spLocks noGrp="1" noRot="1" noChangeAspect="1" noMove="1" noResize="1" noEditPoints="1" noAdjustHandles="1" noChangeArrowheads="1" noChangeShapeType="1" noTextEdit="1"/>
+          </p:cNvSpPr>
+          <p:nvPr>
+            <p:extLst>
+              <p:ext uri="{386F3935-93C4-4BCD-93E2-E3B085C9AB24}">
+                <p16:designElem xmlns:p16="http://schemas.microsoft.com/office/powerpoint/2015/main" val="1"/>
+              </p:ext>
+            </p:extLst>
+          </p:nvPr>
+        </p:nvSpPr>
+        <p:spPr>
+          <a:xfrm rot="5400000" flipH="1">
+            <a:off x="-1417539" y="1417538"/>
+            <a:ext cx="6875818" cy="4040744"/>
+          </a:xfrm>
+          <a:prstGeom prst="rect">
+            <a:avLst/>
+          </a:prstGeom>
+          <a:gradFill>
+            <a:gsLst>
+              <a:gs pos="0">
+                <a:srgbClr val="000000"/>
+              </a:gs>
+              <a:gs pos="100000">
+                <a:schemeClr val="accent1">
+                  <a:lumMod val="75000"/>
+                </a:schemeClr>
+              </a:gs>
+            </a:gsLst>
+            <a:lin ang="18600000" scaled="0"/>
+          </a:gradFill>
+          <a:ln>
+            <a:noFill/>
+          </a:ln>
+        </p:spPr>
+        <p:style>
+          <a:lnRef idx="2">
+            <a:schemeClr val="accent1">
+              <a:shade val="50000"/>
+            </a:schemeClr>
+          </a:lnRef>
+          <a:fillRef idx="1">
+            <a:schemeClr val="accent1"/>
+          </a:fillRef>
+          <a:effectRef idx="0">
+            <a:schemeClr val="accent1"/>
+          </a:effectRef>
+          <a:fontRef idx="minor">
+            <a:schemeClr val="lt1"/>
+          </a:fontRef>
+        </p:style>
+        <p:txBody>
+          <a:bodyPr rtlCol="0" anchor="ctr"/>
+          <a:lstStyle/>
+          <a:p>
+            <a:pPr algn="ctr"/>
+            <a:endParaRPr lang="en-US" dirty="0"/>
+          </a:p>
+        </p:txBody>
+      </p:sp>
+      <p:sp>
+        <p:nvSpPr>
+          <p:cNvPr id="12" name="Rectangle 11">
+            <a:extLst>
+              <a:ext uri="{FF2B5EF4-FFF2-40B4-BE49-F238E27FC236}">
+                <a16:creationId xmlns:a16="http://schemas.microsoft.com/office/drawing/2014/main" id="{D07DD2DE-F619-49DD-B5E7-03A290FF4ED1}"/>
+              </a:ext>
+              <a:ext uri="{C183D7F6-B498-43B3-948B-1728B52AA6E4}">
+                <adec:decorative xmlns:adec="http://schemas.microsoft.com/office/drawing/2017/decorative" val="1"/>
+              </a:ext>
+            </a:extLst>
+          </p:cNvPr>
+          <p:cNvSpPr>
+            <a:spLocks noGrp="1" noRot="1" noChangeAspect="1" noMove="1" noResize="1" noEditPoints="1" noAdjustHandles="1" noChangeArrowheads="1" noChangeShapeType="1" noTextEdit="1"/>
+          </p:cNvSpPr>
+          <p:nvPr>
+            <p:extLst>
+              <p:ext uri="{386F3935-93C4-4BCD-93E2-E3B085C9AB24}">
+                <p16:designElem xmlns:p16="http://schemas.microsoft.com/office/powerpoint/2015/main" val="1"/>
+              </p:ext>
+            </p:extLst>
+          </p:nvPr>
+        </p:nvSpPr>
+        <p:spPr>
+          <a:xfrm rot="16200000">
+            <a:off x="-158495" y="2660473"/>
+            <a:ext cx="4355594" cy="4038603"/>
+          </a:xfrm>
+          <a:prstGeom prst="rect">
+            <a:avLst/>
+          </a:prstGeom>
+          <a:gradFill>
+            <a:gsLst>
+              <a:gs pos="0">
+                <a:schemeClr val="accent1">
+                  <a:alpha val="50000"/>
+                </a:schemeClr>
+              </a:gs>
+              <a:gs pos="100000">
+                <a:schemeClr val="accent1">
+                  <a:lumMod val="50000"/>
+                  <a:alpha val="0"/>
+                </a:schemeClr>
+              </a:gs>
+            </a:gsLst>
+            <a:lin ang="11400000" scaled="0"/>
+          </a:gradFill>
+          <a:ln>
+            <a:noFill/>
+          </a:ln>
+        </p:spPr>
+        <p:style>
+          <a:lnRef idx="2">
+            <a:schemeClr val="accent1">
+              <a:shade val="50000"/>
+            </a:schemeClr>
+          </a:lnRef>
+          <a:fillRef idx="1">
+            <a:schemeClr val="accent1"/>
+          </a:fillRef>
+          <a:effectRef idx="0">
+            <a:schemeClr val="accent1"/>
+          </a:effectRef>
+          <a:fontRef idx="minor">
+            <a:schemeClr val="lt1"/>
+          </a:fontRef>
+        </p:style>
+        <p:txBody>
+          <a:bodyPr rtlCol="0" anchor="ctr"/>
+          <a:lstStyle/>
+          <a:p>
+            <a:pPr algn="ctr"/>
+            <a:endParaRPr lang="en-US"/>
+          </a:p>
+        </p:txBody>
+      </p:sp>
+      <p:sp>
+        <p:nvSpPr>
+          <p:cNvPr id="14" name="Rectangle 13">
+            <a:extLst>
+              <a:ext uri="{FF2B5EF4-FFF2-40B4-BE49-F238E27FC236}">
+                <a16:creationId xmlns:a16="http://schemas.microsoft.com/office/drawing/2014/main" id="{85149191-5F60-4A28-AAFF-039F96B0F3EC}"/>
+              </a:ext>
+              <a:ext uri="{C183D7F6-B498-43B3-948B-1728B52AA6E4}">
+                <adec:decorative xmlns:adec="http://schemas.microsoft.com/office/drawing/2017/decorative" val="1"/>
+              </a:ext>
+            </a:extLst>
+          </p:cNvPr>
+          <p:cNvSpPr>
+            <a:spLocks noGrp="1" noRot="1" noChangeAspect="1" noMove="1" noResize="1" noEditPoints="1" noAdjustHandles="1" noChangeArrowheads="1" noChangeShapeType="1" noTextEdit="1"/>
+          </p:cNvSpPr>
+          <p:nvPr>
+            <p:extLst>
+              <p:ext uri="{386F3935-93C4-4BCD-93E2-E3B085C9AB24}">
+                <p16:designElem xmlns:p16="http://schemas.microsoft.com/office/powerpoint/2015/main" val="1"/>
+              </p:ext>
+            </p:extLst>
+          </p:nvPr>
+        </p:nvSpPr>
+        <p:spPr>
+          <a:xfrm rot="16200000" flipH="1">
+            <a:off x="-1180882" y="1638085"/>
+            <a:ext cx="6857572" cy="3581401"/>
+          </a:xfrm>
+          <a:prstGeom prst="rect">
+            <a:avLst/>
+          </a:prstGeom>
+          <a:gradFill>
+            <a:gsLst>
+              <a:gs pos="0">
+                <a:srgbClr val="000000">
+                  <a:alpha val="59000"/>
+                </a:srgbClr>
+              </a:gs>
+              <a:gs pos="69000">
+                <a:schemeClr val="accent1">
+                  <a:alpha val="0"/>
+                </a:schemeClr>
+              </a:gs>
+            </a:gsLst>
+            <a:lin ang="13200000" scaled="0"/>
+          </a:gradFill>
+          <a:ln>
+            <a:noFill/>
+          </a:ln>
+        </p:spPr>
+        <p:style>
+          <a:lnRef idx="2">
+            <a:schemeClr val="accent1">
+              <a:shade val="50000"/>
+            </a:schemeClr>
+          </a:lnRef>
+          <a:fillRef idx="1">
+            <a:schemeClr val="accent1"/>
+          </a:fillRef>
+          <a:effectRef idx="0">
+            <a:schemeClr val="accent1"/>
+          </a:effectRef>
+          <a:fontRef idx="minor">
+            <a:schemeClr val="lt1"/>
+          </a:fontRef>
+        </p:style>
+        <p:txBody>
+          <a:bodyPr rtlCol="0" anchor="ctr"/>
+          <a:lstStyle/>
+          <a:p>
+            <a:pPr algn="ctr"/>
+            <a:endParaRPr lang="en-US" dirty="0"/>
+          </a:p>
+        </p:txBody>
+      </p:sp>
+      <p:sp>
+        <p:nvSpPr>
+          <p:cNvPr id="16" name="Freeform: Shape 15">
+            <a:extLst>
+              <a:ext uri="{FF2B5EF4-FFF2-40B4-BE49-F238E27FC236}">
+                <a16:creationId xmlns:a16="http://schemas.microsoft.com/office/drawing/2014/main" id="{F8260ED5-17F7-4158-B241-D51DD4CF1B7E}"/>
+              </a:ext>
+              <a:ext uri="{C183D7F6-B498-43B3-948B-1728B52AA6E4}">
+                <adec:decorative xmlns:adec="http://schemas.microsoft.com/office/drawing/2017/decorative" val="1"/>
+              </a:ext>
+            </a:extLst>
+          </p:cNvPr>
+          <p:cNvSpPr>
+            <a:spLocks noGrp="1" noRot="1" noChangeAspect="1" noMove="1" noResize="1" noEditPoints="1" noAdjustHandles="1" noChangeArrowheads="1" noChangeShapeType="1" noTextEdit="1"/>
+          </p:cNvSpPr>
+          <p:nvPr>
+            <p:extLst>
+              <p:ext uri="{386F3935-93C4-4BCD-93E2-E3B085C9AB24}">
+                <p16:designElem xmlns:p16="http://schemas.microsoft.com/office/powerpoint/2015/main" val="1"/>
+              </p:ext>
+            </p:extLst>
+          </p:nvPr>
+        </p:nvSpPr>
+        <p:spPr>
+          <a:xfrm rot="6097846">
+            <a:off x="-747355" y="1201312"/>
+            <a:ext cx="4808302" cy="4088666"/>
+          </a:xfrm>
+          <a:custGeom>
+            <a:avLst/>
+            <a:gdLst>
+              <a:gd name="connsiteX0" fmla="*/ 48844 w 4808302"/>
+              <a:gd name="connsiteY0" fmla="*/ 2888671 h 4088666"/>
+              <a:gd name="connsiteX1" fmla="*/ 0 w 4808302"/>
+              <a:gd name="connsiteY1" fmla="*/ 2404151 h 4088666"/>
+              <a:gd name="connsiteX2" fmla="*/ 2404151 w 4808302"/>
+              <a:gd name="connsiteY2" fmla="*/ 0 h 4088666"/>
+              <a:gd name="connsiteX3" fmla="*/ 4808302 w 4808302"/>
+              <a:gd name="connsiteY3" fmla="*/ 2404151 h 4088666"/>
+              <a:gd name="connsiteX4" fmla="*/ 4700216 w 4808302"/>
+              <a:gd name="connsiteY4" fmla="*/ 3119072 h 4088666"/>
+              <a:gd name="connsiteX5" fmla="*/ 4643143 w 4808302"/>
+              <a:gd name="connsiteY5" fmla="*/ 3275009 h 4088666"/>
+              <a:gd name="connsiteX6" fmla="*/ 690093 w 4808302"/>
+              <a:gd name="connsiteY6" fmla="*/ 4088666 h 4088666"/>
+              <a:gd name="connsiteX7" fmla="*/ 548991 w 4808302"/>
+              <a:gd name="connsiteY7" fmla="*/ 3933414 h 4088666"/>
+              <a:gd name="connsiteX8" fmla="*/ 48844 w 4808302"/>
+              <a:gd name="connsiteY8" fmla="*/ 2888671 h 4088666"/>
+            </a:gdLst>
+            <a:ahLst/>
+            <a:cxnLst>
+              <a:cxn ang="0">
+                <a:pos x="connsiteX0" y="connsiteY0"/>
+              </a:cxn>
+              <a:cxn ang="0">
+                <a:pos x="connsiteX1" y="connsiteY1"/>
+              </a:cxn>
+              <a:cxn ang="0">
+                <a:pos x="connsiteX2" y="connsiteY2"/>
+              </a:cxn>
+              <a:cxn ang="0">
+                <a:pos x="connsiteX3" y="connsiteY3"/>
+              </a:cxn>
+              <a:cxn ang="0">
+                <a:pos x="connsiteX4" y="connsiteY4"/>
+              </a:cxn>
+              <a:cxn ang="0">
+                <a:pos x="connsiteX5" y="connsiteY5"/>
+              </a:cxn>
+              <a:cxn ang="0">
+                <a:pos x="connsiteX6" y="connsiteY6"/>
+              </a:cxn>
+              <a:cxn ang="0">
+                <a:pos x="connsiteX7" y="connsiteY7"/>
+              </a:cxn>
+              <a:cxn ang="0">
+                <a:pos x="connsiteX8" y="connsiteY8"/>
+              </a:cxn>
+            </a:cxnLst>
+            <a:rect l="l" t="t" r="r" b="b"/>
+            <a:pathLst>
+              <a:path w="4808302" h="4088666">
+                <a:moveTo>
+                  <a:pt x="48844" y="2888671"/>
+                </a:moveTo>
+                <a:cubicBezTo>
+                  <a:pt x="16818" y="2732167"/>
+                  <a:pt x="0" y="2570123"/>
+                  <a:pt x="0" y="2404151"/>
+                </a:cubicBezTo>
+                <a:cubicBezTo>
+                  <a:pt x="0" y="1076375"/>
+                  <a:pt x="1076375" y="0"/>
+                  <a:pt x="2404151" y="0"/>
+                </a:cubicBezTo>
+                <a:cubicBezTo>
+                  <a:pt x="3731927" y="0"/>
+                  <a:pt x="4808302" y="1076375"/>
+                  <a:pt x="4808302" y="2404151"/>
+                </a:cubicBezTo>
+                <a:cubicBezTo>
+                  <a:pt x="4808302" y="2653109"/>
+                  <a:pt x="4770461" y="2893229"/>
+                  <a:pt x="4700216" y="3119072"/>
+                </a:cubicBezTo>
+                <a:lnTo>
+                  <a:pt x="4643143" y="3275009"/>
+                </a:lnTo>
+                <a:lnTo>
+                  <a:pt x="690093" y="4088666"/>
+                </a:lnTo>
+                <a:lnTo>
+                  <a:pt x="548991" y="3933414"/>
+                </a:lnTo>
+                <a:cubicBezTo>
+                  <a:pt x="304015" y="3636572"/>
+                  <a:pt x="128908" y="3279932"/>
+                  <a:pt x="48844" y="2888671"/>
+                </a:cubicBezTo>
+                <a:close/>
+              </a:path>
+            </a:pathLst>
+          </a:custGeom>
+          <a:gradFill>
+            <a:gsLst>
+              <a:gs pos="39000">
+                <a:schemeClr val="accent1">
+                  <a:lumMod val="60000"/>
+                  <a:lumOff val="40000"/>
+                  <a:alpha val="0"/>
+                </a:schemeClr>
+              </a:gs>
+              <a:gs pos="100000">
+                <a:schemeClr val="accent1">
+                  <a:lumMod val="75000"/>
+                  <a:alpha val="26000"/>
+                </a:schemeClr>
+              </a:gs>
+            </a:gsLst>
+            <a:lin ang="18600000" scaled="0"/>
+          </a:gradFill>
+          <a:ln>
+            <a:noFill/>
+          </a:ln>
+        </p:spPr>
+        <p:style>
+          <a:lnRef idx="2">
+            <a:schemeClr val="accent1">
+              <a:shade val="50000"/>
+            </a:schemeClr>
+          </a:lnRef>
+          <a:fillRef idx="1">
+            <a:schemeClr val="accent1"/>
+          </a:fillRef>
+          <a:effectRef idx="0">
+            <a:schemeClr val="accent1"/>
+          </a:effectRef>
+          <a:fontRef idx="minor">
+            <a:schemeClr val="lt1"/>
+          </a:fontRef>
+        </p:style>
+        <p:txBody>
+          <a:bodyPr wrap="square" rtlCol="0" anchor="ctr">
+            <a:noAutofit/>
+          </a:bodyPr>
+          <a:lstStyle/>
+          <a:p>
+            <a:pPr algn="ctr"/>
+            <a:endParaRPr lang="en-US" dirty="0"/>
+          </a:p>
+        </p:txBody>
+      </p:sp>
       <p:sp>
         <p:nvSpPr>
           <p:cNvPr id="2" name="Title 1">
@@ -5157,13 +7138,27 @@
             <p:ph type="title"/>
           </p:nvPr>
         </p:nvSpPr>
-        <p:spPr/>
-        <p:txBody>
-          <a:bodyPr/>
-          <a:lstStyle/>
-          <a:p>
-            <a:r>
-              <a:rPr lang="en-AU" dirty="0"/>
+        <p:spPr>
+          <a:xfrm>
+            <a:off x="660041" y="2767106"/>
+            <a:ext cx="2880828" cy="3071906"/>
+          </a:xfrm>
+        </p:spPr>
+        <p:txBody>
+          <a:bodyPr vert="horz" lIns="91440" tIns="45720" rIns="91440" bIns="45720" rtlCol="0" anchor="t">
+            <a:normAutofit/>
+          </a:bodyPr>
+          <a:lstStyle/>
+          <a:p>
+            <a:r>
+              <a:rPr lang="en-US" sz="4000" kern="1200">
+                <a:solidFill>
+                  <a:srgbClr val="FFFFFF"/>
+                </a:solidFill>
+                <a:latin typeface="+mj-lt"/>
+                <a:ea typeface="+mj-ea"/>
+                <a:cs typeface="+mj-cs"/>
+              </a:rPr>
               <a:t>QUIZ</a:t>
             </a:r>
           </a:p>
@@ -5191,8 +7186,8 @@
         </p:blipFill>
         <p:spPr>
           <a:xfrm>
-            <a:off x="3071876" y="817372"/>
-            <a:ext cx="7772400" cy="3977046"/>
+            <a:off x="4502428" y="1577402"/>
+            <a:ext cx="7225748" cy="3703195"/>
           </a:xfrm>
           <a:prstGeom prst="rect">
             <a:avLst/>
@@ -5212,9 +7207,17 @@
 </p:sld>
 </file>
 
-<file path=ppt/slides/slide5.xml><?xml version="1.0" encoding="utf-8"?>
+<file path=ppt/slides/slide4.xml><?xml version="1.0" encoding="utf-8"?>
 <p:sld xmlns:a="http://schemas.openxmlformats.org/drawingml/2006/main" xmlns:r="http://schemas.openxmlformats.org/officeDocument/2006/relationships" xmlns:p="http://schemas.openxmlformats.org/presentationml/2006/main">
   <p:cSld>
+    <p:bg>
+      <p:bgPr>
+        <a:solidFill>
+          <a:schemeClr val="bg1"/>
+        </a:solidFill>
+        <a:effectLst/>
+      </p:bgPr>
+    </p:bg>
     <p:spTree>
       <p:nvGrpSpPr>
         <p:cNvPr id="1" name=""/>
@@ -5229,54 +7232,402 @@
           <a:chExt cx="0" cy="0"/>
         </a:xfrm>
       </p:grpSpPr>
-      <p:sp>
-        <p:nvSpPr>
-          <p:cNvPr id="2" name="Title 1">
-            <a:extLst>
-              <a:ext uri="{FF2B5EF4-FFF2-40B4-BE49-F238E27FC236}">
-                <a16:creationId xmlns:a16="http://schemas.microsoft.com/office/drawing/2014/main" id="{9B561348-1B1B-1112-EC71-1A65C54554F8}"/>
-              </a:ext>
-            </a:extLst>
-          </p:cNvPr>
-          <p:cNvSpPr>
-            <a:spLocks noGrp="1"/>
-          </p:cNvSpPr>
-          <p:nvPr>
-            <p:ph type="title"/>
-          </p:nvPr>
-        </p:nvSpPr>
-        <p:spPr/>
-        <p:txBody>
-          <a:bodyPr/>
-          <a:lstStyle/>
-          <a:p>
-            <a:r>
-              <a:rPr lang="en-AU" dirty="0"/>
-              <a:t>Todays objectives</a:t>
-            </a:r>
-          </a:p>
-        </p:txBody>
-      </p:sp>
-      <p:sp>
-        <p:nvSpPr>
-          <p:cNvPr id="3" name="Content Placeholder 2">
-            <a:extLst>
-              <a:ext uri="{FF2B5EF4-FFF2-40B4-BE49-F238E27FC236}">
-                <a16:creationId xmlns:a16="http://schemas.microsoft.com/office/drawing/2014/main" id="{92F3711E-3841-B0E5-E34F-4CF4FA4A3F32}"/>
-              </a:ext>
-            </a:extLst>
-          </p:cNvPr>
-          <p:cNvSpPr>
-            <a:spLocks noGrp="1"/>
-          </p:cNvSpPr>
-          <p:nvPr>
-            <p:ph idx="1"/>
+      <p:sp useBgFill="1">
+        <p:nvSpPr>
+          <p:cNvPr id="8" name="Rectangle 7">
+            <a:extLst>
+              <a:ext uri="{FF2B5EF4-FFF2-40B4-BE49-F238E27FC236}">
+                <a16:creationId xmlns:a16="http://schemas.microsoft.com/office/drawing/2014/main" id="{1B15ED52-F352-441B-82BF-E0EA34836D08}"/>
+              </a:ext>
+              <a:ext uri="{C183D7F6-B498-43B3-948B-1728B52AA6E4}">
+                <adec:decorative xmlns:adec="http://schemas.microsoft.com/office/drawing/2017/decorative" val="1"/>
+              </a:ext>
+            </a:extLst>
+          </p:cNvPr>
+          <p:cNvSpPr>
+            <a:spLocks noGrp="1" noRot="1" noChangeAspect="1" noMove="1" noResize="1" noEditPoints="1" noAdjustHandles="1" noChangeArrowheads="1" noChangeShapeType="1" noTextEdit="1"/>
+          </p:cNvSpPr>
+          <p:nvPr>
+            <p:extLst>
+              <p:ext uri="{386F3935-93C4-4BCD-93E2-E3B085C9AB24}">
+                <p16:designElem xmlns:p16="http://schemas.microsoft.com/office/powerpoint/2015/main" val="1"/>
+              </p:ext>
+            </p:extLst>
           </p:nvPr>
         </p:nvSpPr>
         <p:spPr>
           <a:xfrm>
-            <a:off x="724829" y="1594624"/>
-            <a:ext cx="10628971" cy="5263376"/>
+            <a:off x="0" y="0"/>
+            <a:ext cx="12192000" cy="6858000"/>
+          </a:xfrm>
+          <a:prstGeom prst="rect">
+            <a:avLst/>
+          </a:prstGeom>
+          <a:ln w="12700" cap="flat" cmpd="sng" algn="ctr">
+            <a:noFill/>
+            <a:prstDash val="solid"/>
+            <a:miter lim="800000"/>
+          </a:ln>
+          <a:effectLst/>
+          <a:extLst>
+            <a:ext uri="{91240B29-F687-4F45-9708-019B960494DF}">
+              <a14:hiddenLine xmlns:a14="http://schemas.microsoft.com/office/drawing/2010/main" w="12700" cap="flat" cmpd="sng" algn="ctr">
+                <a:solidFill>
+                  <a:schemeClr val="accent1">
+                    <a:shade val="50000"/>
+                  </a:schemeClr>
+                </a:solidFill>
+                <a:prstDash val="solid"/>
+                <a:miter lim="800000"/>
+              </a14:hiddenLine>
+            </a:ext>
+          </a:extLst>
+        </p:spPr>
+        <p:style>
+          <a:lnRef idx="2">
+            <a:schemeClr val="accent1">
+              <a:shade val="50000"/>
+            </a:schemeClr>
+          </a:lnRef>
+          <a:fillRef idx="1">
+            <a:schemeClr val="accent1"/>
+          </a:fillRef>
+          <a:effectRef idx="0">
+            <a:schemeClr val="accent1"/>
+          </a:effectRef>
+          <a:fontRef idx="minor">
+            <a:schemeClr val="lt1"/>
+          </a:fontRef>
+        </p:style>
+        <p:txBody>
+          <a:bodyPr rtlCol="0" anchor="ctr"/>
+          <a:lstStyle/>
+          <a:p>
+            <a:pPr algn="ctr"/>
+            <a:endParaRPr lang="en-US"/>
+          </a:p>
+        </p:txBody>
+      </p:sp>
+      <p:sp>
+        <p:nvSpPr>
+          <p:cNvPr id="10" name="Rectangle 9">
+            <a:extLst>
+              <a:ext uri="{FF2B5EF4-FFF2-40B4-BE49-F238E27FC236}">
+                <a16:creationId xmlns:a16="http://schemas.microsoft.com/office/drawing/2014/main" id="{3B2E3793-BFE6-45A2-9B7B-E18844431C99}"/>
+              </a:ext>
+              <a:ext uri="{C183D7F6-B498-43B3-948B-1728B52AA6E4}">
+                <adec:decorative xmlns:adec="http://schemas.microsoft.com/office/drawing/2017/decorative" val="1"/>
+              </a:ext>
+            </a:extLst>
+          </p:cNvPr>
+          <p:cNvSpPr>
+            <a:spLocks noGrp="1" noRot="1" noChangeAspect="1" noMove="1" noResize="1" noEditPoints="1" noAdjustHandles="1" noChangeArrowheads="1" noChangeShapeType="1" noTextEdit="1"/>
+          </p:cNvSpPr>
+          <p:nvPr>
+            <p:extLst>
+              <p:ext uri="{386F3935-93C4-4BCD-93E2-E3B085C9AB24}">
+                <p16:designElem xmlns:p16="http://schemas.microsoft.com/office/powerpoint/2015/main" val="1"/>
+              </p:ext>
+            </p:extLst>
+          </p:nvPr>
+        </p:nvSpPr>
+        <p:spPr>
+          <a:xfrm flipH="1">
+            <a:off x="-1" y="-1"/>
+            <a:ext cx="12191998" cy="1590742"/>
+          </a:xfrm>
+          <a:prstGeom prst="rect">
+            <a:avLst/>
+          </a:prstGeom>
+          <a:gradFill>
+            <a:gsLst>
+              <a:gs pos="0">
+                <a:srgbClr val="000000"/>
+              </a:gs>
+              <a:gs pos="100000">
+                <a:schemeClr val="accent1">
+                  <a:lumMod val="75000"/>
+                </a:schemeClr>
+              </a:gs>
+            </a:gsLst>
+            <a:lin ang="8400000" scaled="0"/>
+          </a:gradFill>
+          <a:ln>
+            <a:noFill/>
+          </a:ln>
+        </p:spPr>
+        <p:style>
+          <a:lnRef idx="2">
+            <a:schemeClr val="accent1">
+              <a:shade val="50000"/>
+            </a:schemeClr>
+          </a:lnRef>
+          <a:fillRef idx="1">
+            <a:schemeClr val="accent1"/>
+          </a:fillRef>
+          <a:effectRef idx="0">
+            <a:schemeClr val="accent1"/>
+          </a:effectRef>
+          <a:fontRef idx="minor">
+            <a:schemeClr val="lt1"/>
+          </a:fontRef>
+        </p:style>
+        <p:txBody>
+          <a:bodyPr rtlCol="0" anchor="ctr"/>
+          <a:lstStyle/>
+          <a:p>
+            <a:pPr algn="ctr"/>
+            <a:endParaRPr lang="en-US"/>
+          </a:p>
+        </p:txBody>
+      </p:sp>
+      <p:sp>
+        <p:nvSpPr>
+          <p:cNvPr id="12" name="Rectangle 11">
+            <a:extLst>
+              <a:ext uri="{FF2B5EF4-FFF2-40B4-BE49-F238E27FC236}">
+                <a16:creationId xmlns:a16="http://schemas.microsoft.com/office/drawing/2014/main" id="{BC4C4868-CB8F-4AF9-9CDB-8108F2C19B67}"/>
+              </a:ext>
+              <a:ext uri="{C183D7F6-B498-43B3-948B-1728B52AA6E4}">
+                <adec:decorative xmlns:adec="http://schemas.microsoft.com/office/drawing/2017/decorative" val="1"/>
+              </a:ext>
+            </a:extLst>
+          </p:cNvPr>
+          <p:cNvSpPr>
+            <a:spLocks noGrp="1" noRot="1" noChangeAspect="1" noMove="1" noResize="1" noEditPoints="1" noAdjustHandles="1" noChangeArrowheads="1" noChangeShapeType="1" noTextEdit="1"/>
+          </p:cNvSpPr>
+          <p:nvPr>
+            <p:extLst>
+              <p:ext uri="{386F3935-93C4-4BCD-93E2-E3B085C9AB24}">
+                <p16:designElem xmlns:p16="http://schemas.microsoft.com/office/powerpoint/2015/main" val="1"/>
+              </p:ext>
+            </p:extLst>
+          </p:nvPr>
+        </p:nvSpPr>
+        <p:spPr>
+          <a:xfrm rot="10800000" flipH="1">
+            <a:off x="-3" y="0"/>
+            <a:ext cx="8115306" cy="1590742"/>
+          </a:xfrm>
+          <a:prstGeom prst="rect">
+            <a:avLst/>
+          </a:prstGeom>
+          <a:gradFill>
+            <a:gsLst>
+              <a:gs pos="20000">
+                <a:schemeClr val="accent1">
+                  <a:alpha val="0"/>
+                </a:schemeClr>
+              </a:gs>
+              <a:gs pos="100000">
+                <a:schemeClr val="accent1">
+                  <a:lumMod val="50000"/>
+                  <a:alpha val="55000"/>
+                </a:schemeClr>
+              </a:gs>
+            </a:gsLst>
+            <a:lin ang="13800000" scaled="0"/>
+          </a:gradFill>
+          <a:ln>
+            <a:noFill/>
+          </a:ln>
+        </p:spPr>
+        <p:style>
+          <a:lnRef idx="2">
+            <a:schemeClr val="accent1">
+              <a:shade val="50000"/>
+            </a:schemeClr>
+          </a:lnRef>
+          <a:fillRef idx="1">
+            <a:schemeClr val="accent1"/>
+          </a:fillRef>
+          <a:effectRef idx="0">
+            <a:schemeClr val="accent1"/>
+          </a:effectRef>
+          <a:fontRef idx="minor">
+            <a:schemeClr val="lt1"/>
+          </a:fontRef>
+        </p:style>
+        <p:txBody>
+          <a:bodyPr rtlCol="0" anchor="ctr"/>
+          <a:lstStyle/>
+          <a:p>
+            <a:pPr algn="ctr"/>
+            <a:endParaRPr lang="en-US"/>
+          </a:p>
+        </p:txBody>
+      </p:sp>
+      <p:sp>
+        <p:nvSpPr>
+          <p:cNvPr id="14" name="Rectangle 13">
+            <a:extLst>
+              <a:ext uri="{FF2B5EF4-FFF2-40B4-BE49-F238E27FC236}">
+                <a16:creationId xmlns:a16="http://schemas.microsoft.com/office/drawing/2014/main" id="{375E0459-6403-40CD-989D-56A4407CA12E}"/>
+              </a:ext>
+              <a:ext uri="{C183D7F6-B498-43B3-948B-1728B52AA6E4}">
+                <adec:decorative xmlns:adec="http://schemas.microsoft.com/office/drawing/2017/decorative" val="1"/>
+              </a:ext>
+            </a:extLst>
+          </p:cNvPr>
+          <p:cNvSpPr>
+            <a:spLocks noGrp="1" noRot="1" noChangeAspect="1" noMove="1" noResize="1" noEditPoints="1" noAdjustHandles="1" noChangeArrowheads="1" noChangeShapeType="1" noTextEdit="1"/>
+          </p:cNvSpPr>
+          <p:nvPr>
+            <p:extLst>
+              <p:ext uri="{386F3935-93C4-4BCD-93E2-E3B085C9AB24}">
+                <p16:designElem xmlns:p16="http://schemas.microsoft.com/office/powerpoint/2015/main" val="1"/>
+              </p:ext>
+            </p:extLst>
+          </p:nvPr>
+        </p:nvSpPr>
+        <p:spPr>
+          <a:xfrm flipH="1">
+            <a:off x="8115299" y="-1"/>
+            <a:ext cx="4076698" cy="1590742"/>
+          </a:xfrm>
+          <a:prstGeom prst="rect">
+            <a:avLst/>
+          </a:prstGeom>
+          <a:gradFill>
+            <a:gsLst>
+              <a:gs pos="0">
+                <a:schemeClr val="accent1">
+                  <a:alpha val="66000"/>
+                </a:schemeClr>
+              </a:gs>
+              <a:gs pos="100000">
+                <a:srgbClr val="000000">
+                  <a:alpha val="30000"/>
+                </a:srgbClr>
+              </a:gs>
+            </a:gsLst>
+            <a:lin ang="13200000" scaled="0"/>
+          </a:gradFill>
+          <a:ln>
+            <a:noFill/>
+          </a:ln>
+        </p:spPr>
+        <p:style>
+          <a:lnRef idx="2">
+            <a:schemeClr val="accent1">
+              <a:shade val="50000"/>
+            </a:schemeClr>
+          </a:lnRef>
+          <a:fillRef idx="1">
+            <a:schemeClr val="accent1"/>
+          </a:fillRef>
+          <a:effectRef idx="0">
+            <a:schemeClr val="accent1"/>
+          </a:effectRef>
+          <a:fontRef idx="minor">
+            <a:schemeClr val="lt1"/>
+          </a:fontRef>
+        </p:style>
+        <p:txBody>
+          <a:bodyPr rtlCol="0" anchor="ctr"/>
+          <a:lstStyle/>
+          <a:p>
+            <a:pPr algn="ctr"/>
+            <a:endParaRPr lang="en-US"/>
+          </a:p>
+        </p:txBody>
+      </p:sp>
+      <p:sp>
+        <p:nvSpPr>
+          <p:cNvPr id="16" name="Rectangle 15">
+            <a:extLst>
+              <a:ext uri="{FF2B5EF4-FFF2-40B4-BE49-F238E27FC236}">
+                <a16:creationId xmlns:a16="http://schemas.microsoft.com/office/drawing/2014/main" id="{53E5B1A8-3AC9-4BD1-9BBC-78CA94F2D1BA}"/>
+              </a:ext>
+              <a:ext uri="{C183D7F6-B498-43B3-948B-1728B52AA6E4}">
+                <adec:decorative xmlns:adec="http://schemas.microsoft.com/office/drawing/2017/decorative" val="1"/>
+              </a:ext>
+            </a:extLst>
+          </p:cNvPr>
+          <p:cNvSpPr>
+            <a:spLocks noGrp="1" noRot="1" noChangeAspect="1" noMove="1" noResize="1" noEditPoints="1" noAdjustHandles="1" noChangeArrowheads="1" noChangeShapeType="1" noTextEdit="1"/>
+          </p:cNvSpPr>
+          <p:nvPr>
+            <p:extLst>
+              <p:ext uri="{386F3935-93C4-4BCD-93E2-E3B085C9AB24}">
+                <p16:designElem xmlns:p16="http://schemas.microsoft.com/office/powerpoint/2015/main" val="1"/>
+              </p:ext>
+            </p:extLst>
+          </p:nvPr>
+        </p:nvSpPr>
+        <p:spPr>
+          <a:xfrm>
+            <a:off x="459350" y="-1"/>
+            <a:ext cx="11732646" cy="1597433"/>
+          </a:xfrm>
+          <a:prstGeom prst="rect">
+            <a:avLst/>
+          </a:prstGeom>
+          <a:gradFill>
+            <a:gsLst>
+              <a:gs pos="50000">
+                <a:srgbClr val="000000">
+                  <a:alpha val="0"/>
+                </a:srgbClr>
+              </a:gs>
+              <a:gs pos="99000">
+                <a:schemeClr val="accent1">
+                  <a:lumMod val="50000"/>
+                  <a:alpha val="52000"/>
+                </a:schemeClr>
+              </a:gs>
+            </a:gsLst>
+            <a:lin ang="16800000" scaled="0"/>
+          </a:gradFill>
+          <a:ln>
+            <a:noFill/>
+          </a:ln>
+        </p:spPr>
+        <p:style>
+          <a:lnRef idx="2">
+            <a:schemeClr val="accent1">
+              <a:shade val="50000"/>
+            </a:schemeClr>
+          </a:lnRef>
+          <a:fillRef idx="1">
+            <a:schemeClr val="accent1"/>
+          </a:fillRef>
+          <a:effectRef idx="0">
+            <a:schemeClr val="accent1"/>
+          </a:effectRef>
+          <a:fontRef idx="minor">
+            <a:schemeClr val="lt1"/>
+          </a:fontRef>
+        </p:style>
+        <p:txBody>
+          <a:bodyPr rtlCol="0" anchor="ctr"/>
+          <a:lstStyle/>
+          <a:p>
+            <a:pPr algn="ctr"/>
+            <a:endParaRPr lang="en-US"/>
+          </a:p>
+        </p:txBody>
+      </p:sp>
+      <p:sp>
+        <p:nvSpPr>
+          <p:cNvPr id="2" name="Title 1">
+            <a:extLst>
+              <a:ext uri="{FF2B5EF4-FFF2-40B4-BE49-F238E27FC236}">
+                <a16:creationId xmlns:a16="http://schemas.microsoft.com/office/drawing/2014/main" id="{9B561348-1B1B-1112-EC71-1A65C54554F8}"/>
+              </a:ext>
+            </a:extLst>
+          </p:cNvPr>
+          <p:cNvSpPr>
+            <a:spLocks noGrp="1"/>
+          </p:cNvSpPr>
+          <p:nvPr>
+            <p:ph type="title"/>
+          </p:nvPr>
+        </p:nvSpPr>
+        <p:spPr>
+          <a:xfrm>
+            <a:off x="1371599" y="294538"/>
+            <a:ext cx="9895951" cy="1033669"/>
           </a:xfrm>
         </p:spPr>
         <p:txBody>
@@ -5285,34 +7636,65 @@
           </a:bodyPr>
           <a:lstStyle/>
           <a:p>
+            <a:r>
+              <a:rPr lang="en-AU" sz="4000">
+                <a:solidFill>
+                  <a:srgbClr val="FFFFFF"/>
+                </a:solidFill>
+              </a:rPr>
+              <a:t>Todays objectives</a:t>
+            </a:r>
+          </a:p>
+        </p:txBody>
+      </p:sp>
+      <p:sp>
+        <p:nvSpPr>
+          <p:cNvPr id="3" name="Content Placeholder 2">
+            <a:extLst>
+              <a:ext uri="{FF2B5EF4-FFF2-40B4-BE49-F238E27FC236}">
+                <a16:creationId xmlns:a16="http://schemas.microsoft.com/office/drawing/2014/main" id="{92F3711E-3841-B0E5-E34F-4CF4FA4A3F32}"/>
+              </a:ext>
+            </a:extLst>
+          </p:cNvPr>
+          <p:cNvSpPr>
+            <a:spLocks noGrp="1"/>
+          </p:cNvSpPr>
+          <p:nvPr>
+            <p:ph idx="1"/>
+          </p:nvPr>
+        </p:nvSpPr>
+        <p:spPr>
+          <a:xfrm>
+            <a:off x="1371599" y="2318197"/>
+            <a:ext cx="9724031" cy="3683358"/>
+          </a:xfrm>
+        </p:spPr>
+        <p:txBody>
+          <a:bodyPr anchor="ctr">
+            <a:normAutofit/>
+          </a:bodyPr>
+          <a:lstStyle/>
+          <a:p>
             <a:pPr marL="514350" indent="-514350">
               <a:buAutoNum type="arabicPeriod"/>
             </a:pPr>
             <a:r>
-              <a:rPr lang="en-AU" dirty="0"/>
-              <a:t>Investigate your data: get with your groups and open up your project data. Using </a:t>
-            </a:r>
-            <a:r>
-              <a:rPr lang="en-AU" dirty="0" err="1"/>
-              <a:t>dplyr</a:t>
-            </a:r>
-            <a:r>
-              <a:rPr lang="en-AU" dirty="0"/>
-              <a:t> verbs look at your data  (40min)</a:t>
+              <a:rPr lang="en-AU" sz="1900"/>
+              <a:t>Investigate your data: get with your groups and open up your project data. Using dplyr verbs look at your data  (40min)</a:t>
             </a:r>
           </a:p>
           <a:p>
             <a:pPr marL="514350" indent="-514350">
               <a:buAutoNum type="arabicPeriod"/>
             </a:pPr>
-            <a:endParaRPr lang="en-AU" dirty="0"/>
+            <a:endParaRPr lang="en-AU" sz="1900"/>
           </a:p>
           <a:p>
             <a:pPr marL="514350" indent="-514350">
               <a:buAutoNum type="arabicPeriod"/>
             </a:pPr>
             <a:r>
-              <a:rPr lang="en-AU" dirty="0"/>
+              <a:rPr lang="en-AU" sz="1900"/>
               <a:t>Show and tell: each group will come up and walk through an example of a problem and their solution (20 min)</a:t>
             </a:r>
           </a:p>
@@ -5320,14 +7702,14 @@
             <a:pPr marL="514350" indent="-514350">
               <a:buAutoNum type="arabicPeriod"/>
             </a:pPr>
-            <a:endParaRPr lang="en-AU" dirty="0"/>
+            <a:endParaRPr lang="en-AU" sz="1900"/>
           </a:p>
           <a:p>
             <a:pPr marL="514350" indent="-514350">
               <a:buAutoNum type="arabicPeriod"/>
             </a:pPr>
             <a:r>
-              <a:rPr lang="en-AU" dirty="0"/>
+              <a:rPr lang="en-AU" sz="1900"/>
               <a:t>Coding assignment: I will walk you through your coding assignment rubric (15 min)</a:t>
             </a:r>
           </a:p>
@@ -5335,14 +7717,14 @@
             <a:pPr marL="514350" indent="-514350">
               <a:buAutoNum type="arabicPeriod"/>
             </a:pPr>
-            <a:endParaRPr lang="en-AU" dirty="0"/>
+            <a:endParaRPr lang="en-AU" sz="1900"/>
           </a:p>
           <a:p>
             <a:pPr marL="514350" indent="-514350">
               <a:buAutoNum type="arabicPeriod"/>
             </a:pPr>
             <a:r>
-              <a:rPr lang="en-AU" dirty="0"/>
+              <a:rPr lang="en-AU" sz="1900"/>
               <a:t>Open up Quarto and start setting up coding assignment (45 min)</a:t>
             </a:r>
           </a:p>
@@ -5351,7 +7733,7 @@
               <a:buNone/>
             </a:pPr>
             <a:r>
-              <a:rPr lang="en-AU" dirty="0"/>
+              <a:rPr lang="en-AU" sz="1900"/>
               <a:t>	- Be sure you ask us questions! </a:t>
             </a:r>
           </a:p>
@@ -5370,9 +7752,17 @@
 </p:sld>
 </file>
 
-<file path=ppt/slides/slide6.xml><?xml version="1.0" encoding="utf-8"?>
+<file path=ppt/slides/slide5.xml><?xml version="1.0" encoding="utf-8"?>
 <p:sld xmlns:a="http://schemas.openxmlformats.org/drawingml/2006/main" xmlns:r="http://schemas.openxmlformats.org/officeDocument/2006/relationships" xmlns:p="http://schemas.openxmlformats.org/presentationml/2006/main">
   <p:cSld>
+    <p:bg>
+      <p:bgPr>
+        <a:solidFill>
+          <a:schemeClr val="bg1"/>
+        </a:solidFill>
+        <a:effectLst/>
+      </p:bgPr>
+    </p:bg>
     <p:spTree>
       <p:nvGrpSpPr>
         <p:cNvPr id="1" name="">
@@ -5393,66 +7783,257 @@
           <a:chExt cx="0" cy="0"/>
         </a:xfrm>
       </p:grpSpPr>
-      <p:sp>
-        <p:nvSpPr>
-          <p:cNvPr id="2" name="Title 1">
-            <a:extLst>
-              <a:ext uri="{FF2B5EF4-FFF2-40B4-BE49-F238E27FC236}">
-                <a16:creationId xmlns:a16="http://schemas.microsoft.com/office/drawing/2014/main" id="{E263583B-C6CE-9993-E5CB-DF759E36636D}"/>
-              </a:ext>
-            </a:extLst>
-          </p:cNvPr>
-          <p:cNvSpPr>
-            <a:spLocks noGrp="1"/>
-          </p:cNvSpPr>
-          <p:nvPr>
-            <p:ph type="title"/>
-          </p:nvPr>
-        </p:nvSpPr>
-        <p:spPr/>
-        <p:txBody>
-          <a:bodyPr/>
-          <a:lstStyle/>
-          <a:p>
-            <a:r>
-              <a:rPr lang="en-AU" dirty="0"/>
-              <a:t>Spring cleaning!</a:t>
-            </a:r>
-          </a:p>
-        </p:txBody>
-      </p:sp>
-      <p:sp>
-        <p:nvSpPr>
-          <p:cNvPr id="3" name="Content Placeholder 2">
-            <a:extLst>
-              <a:ext uri="{FF2B5EF4-FFF2-40B4-BE49-F238E27FC236}">
-                <a16:creationId xmlns:a16="http://schemas.microsoft.com/office/drawing/2014/main" id="{CEFAD54C-9E9A-D95B-6799-7096EC266BD1}"/>
-              </a:ext>
-            </a:extLst>
-          </p:cNvPr>
-          <p:cNvSpPr>
-            <a:spLocks noGrp="1"/>
-          </p:cNvSpPr>
-          <p:nvPr>
-            <p:ph idx="1"/>
+      <p:sp useBgFill="1">
+        <p:nvSpPr>
+          <p:cNvPr id="8" name="Rectangle 7">
+            <a:extLst>
+              <a:ext uri="{FF2B5EF4-FFF2-40B4-BE49-F238E27FC236}">
+                <a16:creationId xmlns:a16="http://schemas.microsoft.com/office/drawing/2014/main" id="{F609FF9A-4FCE-468E-A86A-C9AB525EAE71}"/>
+              </a:ext>
+              <a:ext uri="{C183D7F6-B498-43B3-948B-1728B52AA6E4}">
+                <adec:decorative xmlns:adec="http://schemas.microsoft.com/office/drawing/2017/decorative" val="1"/>
+              </a:ext>
+            </a:extLst>
+          </p:cNvPr>
+          <p:cNvSpPr>
+            <a:spLocks noGrp="1" noRot="1" noChangeAspect="1" noMove="1" noResize="1" noEditPoints="1" noAdjustHandles="1" noChangeArrowheads="1" noChangeShapeType="1" noTextEdit="1"/>
+          </p:cNvSpPr>
+          <p:nvPr>
+            <p:extLst>
+              <p:ext uri="{386F3935-93C4-4BCD-93E2-E3B085C9AB24}">
+                <p16:designElem xmlns:p16="http://schemas.microsoft.com/office/powerpoint/2015/main" val="1"/>
+              </p:ext>
+            </p:extLst>
           </p:nvPr>
         </p:nvSpPr>
         <p:spPr>
           <a:xfrm>
-            <a:off x="724829" y="1594624"/>
-            <a:ext cx="10628971" cy="5263376"/>
+            <a:off x="0" y="-1"/>
+            <a:ext cx="12188952" cy="6858000"/>
+          </a:xfrm>
+          <a:prstGeom prst="rect">
+            <a:avLst/>
+          </a:prstGeom>
+          <a:ln>
+            <a:noFill/>
+          </a:ln>
+        </p:spPr>
+        <p:style>
+          <a:lnRef idx="2">
+            <a:schemeClr val="accent1">
+              <a:shade val="50000"/>
+            </a:schemeClr>
+          </a:lnRef>
+          <a:fillRef idx="1">
+            <a:schemeClr val="accent1"/>
+          </a:fillRef>
+          <a:effectRef idx="0">
+            <a:schemeClr val="accent1"/>
+          </a:effectRef>
+          <a:fontRef idx="minor">
+            <a:schemeClr val="lt1"/>
+          </a:fontRef>
+        </p:style>
+        <p:txBody>
+          <a:bodyPr rtlCol="0" anchor="ctr"/>
+          <a:lstStyle/>
+          <a:p>
+            <a:pPr marL="0" marR="0" lvl="0" indent="0" algn="ctr" defTabSz="914400" rtl="0" eaLnBrk="1" fontAlgn="auto" latinLnBrk="0" hangingPunct="1">
+              <a:lnSpc>
+                <a:spcPct val="100000"/>
+              </a:lnSpc>
+              <a:spcBef>
+                <a:spcPts val="0"/>
+              </a:spcBef>
+              <a:spcAft>
+                <a:spcPts val="0"/>
+              </a:spcAft>
+              <a:buClrTx/>
+              <a:buSzTx/>
+              <a:buFontTx/>
+              <a:buNone/>
+              <a:tabLst/>
+              <a:defRPr/>
+            </a:pPr>
+            <a:endParaRPr kumimoji="0" lang="en-US" sz="1800" b="0" i="0" u="none" strike="noStrike" kern="1200" cap="none" spc="0" normalizeH="0" baseline="0" noProof="0">
+              <a:ln>
+                <a:noFill/>
+              </a:ln>
+              <a:solidFill>
+                <a:prstClr val="white"/>
+              </a:solidFill>
+              <a:effectLst/>
+              <a:uLnTx/>
+              <a:uFillTx/>
+              <a:latin typeface="Calibri" panose="020F0502020204030204"/>
+              <a:ea typeface="+mn-ea"/>
+              <a:cs typeface="+mn-cs"/>
+            </a:endParaRPr>
+          </a:p>
+        </p:txBody>
+      </p:sp>
+      <p:sp>
+        <p:nvSpPr>
+          <p:cNvPr id="10" name="Rectangle 9">
+            <a:extLst>
+              <a:ext uri="{FF2B5EF4-FFF2-40B4-BE49-F238E27FC236}">
+                <a16:creationId xmlns:a16="http://schemas.microsoft.com/office/drawing/2014/main" id="{021E12D4-3A88-428D-8E5E-AF1AFD923D63}"/>
+              </a:ext>
+              <a:ext uri="{C183D7F6-B498-43B3-948B-1728B52AA6E4}">
+                <adec:decorative xmlns:adec="http://schemas.microsoft.com/office/drawing/2017/decorative" val="1"/>
+              </a:ext>
+            </a:extLst>
+          </p:cNvPr>
+          <p:cNvSpPr>
+            <a:spLocks noGrp="1" noRot="1" noChangeAspect="1" noMove="1" noResize="1" noEditPoints="1" noAdjustHandles="1" noChangeArrowheads="1" noChangeShapeType="1" noTextEdit="1"/>
+          </p:cNvSpPr>
+          <p:nvPr>
+            <p:extLst>
+              <p:ext uri="{386F3935-93C4-4BCD-93E2-E3B085C9AB24}">
+                <p16:designElem xmlns:p16="http://schemas.microsoft.com/office/powerpoint/2015/main" val="1"/>
+              </p:ext>
+            </p:extLst>
+          </p:nvPr>
+        </p:nvSpPr>
+        <p:spPr>
+          <a:xfrm>
+            <a:off x="0" y="0"/>
+            <a:ext cx="12192000" cy="6858000"/>
+          </a:xfrm>
+          <a:prstGeom prst="rect">
+            <a:avLst/>
+          </a:prstGeom>
+          <a:solidFill>
+            <a:srgbClr val="000000"/>
+          </a:solidFill>
+          <a:ln>
+            <a:noFill/>
+          </a:ln>
+        </p:spPr>
+        <p:style>
+          <a:lnRef idx="2">
+            <a:schemeClr val="accent1">
+              <a:shade val="50000"/>
+            </a:schemeClr>
+          </a:lnRef>
+          <a:fillRef idx="1">
+            <a:schemeClr val="accent1"/>
+          </a:fillRef>
+          <a:effectRef idx="0">
+            <a:schemeClr val="accent1"/>
+          </a:effectRef>
+          <a:fontRef idx="minor">
+            <a:schemeClr val="lt1"/>
+          </a:fontRef>
+        </p:style>
+        <p:txBody>
+          <a:bodyPr rtlCol="0" anchor="ctr"/>
+          <a:lstStyle/>
+          <a:p>
+            <a:pPr marL="0" marR="0" lvl="0" indent="0" algn="ctr" defTabSz="914400" rtl="0" eaLnBrk="1" fontAlgn="auto" latinLnBrk="0" hangingPunct="1">
+              <a:lnSpc>
+                <a:spcPct val="100000"/>
+              </a:lnSpc>
+              <a:spcBef>
+                <a:spcPts val="0"/>
+              </a:spcBef>
+              <a:spcAft>
+                <a:spcPts val="0"/>
+              </a:spcAft>
+              <a:buClrTx/>
+              <a:buSzTx/>
+              <a:buFontTx/>
+              <a:buNone/>
+              <a:tabLst/>
+              <a:defRPr/>
+            </a:pPr>
+            <a:endParaRPr kumimoji="0" lang="en-US" sz="1800" b="0" i="0" u="none" strike="noStrike" kern="1200" cap="none" spc="0" normalizeH="0" baseline="0" noProof="0">
+              <a:ln>
+                <a:noFill/>
+              </a:ln>
+              <a:solidFill>
+                <a:srgbClr val="000000"/>
+              </a:solidFill>
+              <a:effectLst/>
+              <a:uLnTx/>
+              <a:uFillTx/>
+              <a:latin typeface="Calibri" panose="020F0502020204030204"/>
+              <a:ea typeface="+mn-ea"/>
+              <a:cs typeface="+mn-cs"/>
+            </a:endParaRPr>
+          </a:p>
+        </p:txBody>
+      </p:sp>
+      <p:pic>
+        <p:nvPicPr>
+          <p:cNvPr id="4" name="Picture 3" descr="Plastic containers in bright colours">
+            <a:extLst>
+              <a:ext uri="{FF2B5EF4-FFF2-40B4-BE49-F238E27FC236}">
+                <a16:creationId xmlns:a16="http://schemas.microsoft.com/office/drawing/2014/main" id="{8E4F0908-EB70-8911-5C3E-21807BCA4251}"/>
+              </a:ext>
+            </a:extLst>
+          </p:cNvPr>
+          <p:cNvPicPr>
+            <a:picLocks noChangeAspect="1"/>
+          </p:cNvPicPr>
+          <p:nvPr/>
+        </p:nvPicPr>
+        <p:blipFill>
+          <a:blip r:embed="rId2">
+            <a:alphaModFix amt="60000"/>
+          </a:blip>
+          <a:srcRect t="8769" b="6961"/>
+          <a:stretch>
+            <a:fillRect/>
+          </a:stretch>
+        </p:blipFill>
+        <p:spPr>
+          <a:xfrm>
+            <a:off x="-1" y="10"/>
+            <a:ext cx="12192001" cy="6857990"/>
+          </a:xfrm>
+          <a:prstGeom prst="rect">
+            <a:avLst/>
+          </a:prstGeom>
+        </p:spPr>
+      </p:pic>
+      <p:sp>
+        <p:nvSpPr>
+          <p:cNvPr id="2" name="Title 1">
+            <a:extLst>
+              <a:ext uri="{FF2B5EF4-FFF2-40B4-BE49-F238E27FC236}">
+                <a16:creationId xmlns:a16="http://schemas.microsoft.com/office/drawing/2014/main" id="{E263583B-C6CE-9993-E5CB-DF759E36636D}"/>
+              </a:ext>
+            </a:extLst>
+          </p:cNvPr>
+          <p:cNvSpPr>
+            <a:spLocks noGrp="1"/>
+          </p:cNvSpPr>
+          <p:nvPr>
+            <p:ph type="title"/>
+          </p:nvPr>
+        </p:nvSpPr>
+        <p:spPr>
+          <a:xfrm>
+            <a:off x="838200" y="914402"/>
+            <a:ext cx="10515600" cy="2985923"/>
           </a:xfrm>
         </p:spPr>
         <p:txBody>
-          <a:bodyPr>
+          <a:bodyPr vert="horz" lIns="91440" tIns="45720" rIns="91440" bIns="45720" rtlCol="0" anchor="b">
             <a:normAutofit/>
           </a:bodyPr>
           <a:lstStyle/>
           <a:p>
-            <a:pPr marL="514350" indent="-514350">
-              <a:buAutoNum type="arabicPeriod"/>
-            </a:pPr>
-            <a:endParaRPr lang="en-AU" dirty="0"/>
+            <a:pPr algn="ctr"/>
+            <a:r>
+              <a:rPr lang="en-US" sz="5200">
+                <a:solidFill>
+                  <a:srgbClr val="FFFFFF"/>
+                </a:solidFill>
+              </a:rPr>
+              <a:t>Spring cleaning!</a:t>
+            </a:r>
           </a:p>
         </p:txBody>
       </p:sp>
@@ -5466,12 +8047,112 @@
   <p:clrMapOvr>
     <a:masterClrMapping/>
   </p:clrMapOvr>
+  <p:timing>
+    <p:tnLst>
+      <p:par>
+        <p:cTn id="1" dur="indefinite" restart="never" nodeType="tmRoot">
+          <p:childTnLst>
+            <p:seq concurrent="1" nextAc="seek">
+              <p:cTn id="2" dur="indefinite" nodeType="mainSeq">
+                <p:childTnLst>
+                  <p:par>
+                    <p:cTn id="3" fill="hold">
+                      <p:stCondLst>
+                        <p:cond delay="indefinite"/>
+                        <p:cond evt="onBegin" delay="0">
+                          <p:tn val="2"/>
+                        </p:cond>
+                      </p:stCondLst>
+                      <p:childTnLst>
+                        <p:par>
+                          <p:cTn id="4" fill="hold">
+                            <p:stCondLst>
+                              <p:cond delay="0"/>
+                            </p:stCondLst>
+                            <p:childTnLst>
+                              <p:par>
+                                <p:cTn id="5" presetID="10" presetClass="entr" presetSubtype="0" fill="hold" grpId="0" nodeType="withEffect">
+                                  <p:stCondLst>
+                                    <p:cond delay="1000"/>
+                                  </p:stCondLst>
+                                  <p:iterate type="lt">
+                                    <p:tmPct val="10000"/>
+                                  </p:iterate>
+                                  <p:childTnLst>
+                                    <p:set>
+                                      <p:cBhvr>
+                                        <p:cTn id="6" dur="1" fill="hold">
+                                          <p:stCondLst>
+                                            <p:cond delay="0"/>
+                                          </p:stCondLst>
+                                        </p:cTn>
+                                        <p:tgtEl>
+                                          <p:spTgt spid="2"/>
+                                        </p:tgtEl>
+                                        <p:attrNameLst>
+                                          <p:attrName>style.visibility</p:attrName>
+                                        </p:attrNameLst>
+                                      </p:cBhvr>
+                                      <p:to>
+                                        <p:strVal val="visible"/>
+                                      </p:to>
+                                    </p:set>
+                                    <p:animEffect transition="in" filter="fade">
+                                      <p:cBhvr>
+                                        <p:cTn id="7" dur="400"/>
+                                        <p:tgtEl>
+                                          <p:spTgt spid="2"/>
+                                        </p:tgtEl>
+                                      </p:cBhvr>
+                                    </p:animEffect>
+                                  </p:childTnLst>
+                                </p:cTn>
+                              </p:par>
+                            </p:childTnLst>
+                          </p:cTn>
+                        </p:par>
+                      </p:childTnLst>
+                    </p:cTn>
+                  </p:par>
+                </p:childTnLst>
+              </p:cTn>
+              <p:prevCondLst>
+                <p:cond evt="onPrev" delay="0">
+                  <p:tgtEl>
+                    <p:sldTgt/>
+                  </p:tgtEl>
+                </p:cond>
+              </p:prevCondLst>
+              <p:nextCondLst>
+                <p:cond evt="onNext" delay="0">
+                  <p:tgtEl>
+                    <p:sldTgt/>
+                  </p:tgtEl>
+                </p:cond>
+              </p:nextCondLst>
+            </p:seq>
+          </p:childTnLst>
+        </p:cTn>
+      </p:par>
+    </p:tnLst>
+    <p:bldLst>
+      <p:bldP spid="2" grpId="0"/>
+    </p:bldLst>
+  </p:timing>
 </p:sld>
 </file>
 
-<file path=ppt/slides/slide7.xml><?xml version="1.0" encoding="utf-8"?>
+<file path=ppt/slides/slide6.xml><?xml version="1.0" encoding="utf-8"?>
 <p:sld xmlns:a="http://schemas.openxmlformats.org/drawingml/2006/main" xmlns:r="http://schemas.openxmlformats.org/officeDocument/2006/relationships" xmlns:p="http://schemas.openxmlformats.org/presentationml/2006/main">
   <p:cSld>
+    <p:bg>
+      <p:bgPr>
+        <a:solidFill>
+          <a:schemeClr val="bg1"/>
+        </a:solidFill>
+        <a:effectLst/>
+      </p:bgPr>
+    </p:bg>
     <p:spTree>
       <p:nvGrpSpPr>
         <p:cNvPr id="1" name=""/>
@@ -5486,6 +8167,164 @@
           <a:chExt cx="0" cy="0"/>
         </a:xfrm>
       </p:grpSpPr>
+      <p:sp useBgFill="1">
+        <p:nvSpPr>
+          <p:cNvPr id="9" name="Slide Background">
+            <a:extLst>
+              <a:ext uri="{FF2B5EF4-FFF2-40B4-BE49-F238E27FC236}">
+                <a16:creationId xmlns:a16="http://schemas.microsoft.com/office/drawing/2014/main" id="{3ECBE1F1-D69B-4AFA-ABD5-8E41720EF6DE}"/>
+              </a:ext>
+              <a:ext uri="{C183D7F6-B498-43B3-948B-1728B52AA6E4}">
+                <adec:decorative xmlns:adec="http://schemas.microsoft.com/office/drawing/2017/decorative" val="1"/>
+              </a:ext>
+            </a:extLst>
+          </p:cNvPr>
+          <p:cNvSpPr>
+            <a:spLocks noGrp="1" noRot="1" noChangeAspect="1" noMove="1" noResize="1" noEditPoints="1" noAdjustHandles="1" noChangeArrowheads="1" noChangeShapeType="1" noTextEdit="1"/>
+          </p:cNvSpPr>
+          <p:nvPr>
+            <p:extLst>
+              <p:ext uri="{386F3935-93C4-4BCD-93E2-E3B085C9AB24}">
+                <p16:designElem xmlns:p16="http://schemas.microsoft.com/office/powerpoint/2015/main" val="1"/>
+              </p:ext>
+            </p:extLst>
+          </p:nvPr>
+        </p:nvSpPr>
+        <p:spPr>
+          <a:xfrm>
+            <a:off x="0" y="0"/>
+            <a:ext cx="12192000" cy="6858000"/>
+          </a:xfrm>
+          <a:prstGeom prst="rect">
+            <a:avLst/>
+          </a:prstGeom>
+          <a:ln>
+            <a:noFill/>
+          </a:ln>
+        </p:spPr>
+        <p:style>
+          <a:lnRef idx="2">
+            <a:schemeClr val="accent1">
+              <a:shade val="50000"/>
+            </a:schemeClr>
+          </a:lnRef>
+          <a:fillRef idx="1">
+            <a:schemeClr val="accent1"/>
+          </a:fillRef>
+          <a:effectRef idx="0">
+            <a:schemeClr val="accent1"/>
+          </a:effectRef>
+          <a:fontRef idx="minor">
+            <a:schemeClr val="lt1"/>
+          </a:fontRef>
+        </p:style>
+        <p:txBody>
+          <a:bodyPr rtlCol="0" anchor="ctr"/>
+          <a:lstStyle/>
+          <a:p>
+            <a:pPr algn="ctr"/>
+            <a:endParaRPr lang="en-US"/>
+          </a:p>
+        </p:txBody>
+      </p:sp>
+      <p:pic>
+        <p:nvPicPr>
+          <p:cNvPr id="5" name="Picture 4" descr="Computer script on a screen">
+            <a:extLst>
+              <a:ext uri="{FF2B5EF4-FFF2-40B4-BE49-F238E27FC236}">
+                <a16:creationId xmlns:a16="http://schemas.microsoft.com/office/drawing/2014/main" id="{68FDC3D7-7D7B-4FCC-DA5B-9544822D695F}"/>
+              </a:ext>
+            </a:extLst>
+          </p:cNvPr>
+          <p:cNvPicPr>
+            <a:picLocks noChangeAspect="1"/>
+          </p:cNvPicPr>
+          <p:nvPr/>
+        </p:nvPicPr>
+        <p:blipFill>
+          <a:blip r:embed="rId2"/>
+          <a:srcRect l="3784" r="43557" b="-2"/>
+          <a:stretch>
+            <a:fillRect/>
+          </a:stretch>
+        </p:blipFill>
+        <p:spPr>
+          <a:xfrm>
+            <a:off x="-1" y="-2"/>
+            <a:ext cx="5410198" cy="6858002"/>
+          </a:xfrm>
+          <a:prstGeom prst="rect">
+            <a:avLst/>
+          </a:prstGeom>
+        </p:spPr>
+      </p:pic>
+      <p:sp useBgFill="1">
+        <p:nvSpPr>
+          <p:cNvPr id="11" name="Rectangle 10">
+            <a:extLst>
+              <a:ext uri="{FF2B5EF4-FFF2-40B4-BE49-F238E27FC236}">
+                <a16:creationId xmlns:a16="http://schemas.microsoft.com/office/drawing/2014/main" id="{603A6265-E10C-4B85-9C20-E75FCAF9CC63}"/>
+              </a:ext>
+              <a:ext uri="{C183D7F6-B498-43B3-948B-1728B52AA6E4}">
+                <adec:decorative xmlns:adec="http://schemas.microsoft.com/office/drawing/2017/decorative" val="1"/>
+              </a:ext>
+            </a:extLst>
+          </p:cNvPr>
+          <p:cNvSpPr>
+            <a:spLocks noGrp="1" noRot="1" noChangeAspect="1" noMove="1" noResize="1" noEditPoints="1" noAdjustHandles="1" noChangeArrowheads="1" noChangeShapeType="1" noTextEdit="1"/>
+          </p:cNvSpPr>
+          <p:nvPr>
+            <p:extLst>
+              <p:ext uri="{386F3935-93C4-4BCD-93E2-E3B085C9AB24}">
+                <p16:designElem xmlns:p16="http://schemas.microsoft.com/office/powerpoint/2015/main" val="1"/>
+              </p:ext>
+            </p:extLst>
+          </p:nvPr>
+        </p:nvSpPr>
+        <p:spPr>
+          <a:xfrm>
+            <a:off x="5410197" y="-1"/>
+            <a:ext cx="6781802" cy="2286000"/>
+          </a:xfrm>
+          <a:prstGeom prst="rect">
+            <a:avLst/>
+          </a:prstGeom>
+          <a:ln>
+            <a:noFill/>
+          </a:ln>
+          <a:effectLst>
+            <a:outerShdw blurRad="355600" dist="152400" sx="95000" sy="95000" algn="t" rotWithShape="0">
+              <a:srgbClr val="000000">
+                <a:alpha val="29000"/>
+              </a:srgbClr>
+            </a:outerShdw>
+          </a:effectLst>
+        </p:spPr>
+        <p:style>
+          <a:lnRef idx="2">
+            <a:schemeClr val="accent1">
+              <a:shade val="50000"/>
+            </a:schemeClr>
+          </a:lnRef>
+          <a:fillRef idx="1">
+            <a:schemeClr val="accent1"/>
+          </a:fillRef>
+          <a:effectRef idx="0">
+            <a:schemeClr val="accent1"/>
+          </a:effectRef>
+          <a:fontRef idx="minor">
+            <a:schemeClr val="lt1"/>
+          </a:fontRef>
+        </p:style>
+        <p:txBody>
+          <a:bodyPr rtlCol="0" anchor="ctr"/>
+          <a:lstStyle/>
+          <a:p>
+            <a:pPr algn="ctr"/>
+            <a:endParaRPr lang="en-US"/>
+          </a:p>
+        </p:txBody>
+      </p:sp>
       <p:sp>
         <p:nvSpPr>
           <p:cNvPr id="2" name="Title 1">
@@ -5502,16 +8341,23 @@
             <p:ph type="title"/>
           </p:nvPr>
         </p:nvSpPr>
-        <p:spPr/>
-        <p:txBody>
-          <a:bodyPr/>
-          <a:lstStyle/>
-          <a:p>
-            <a:r>
-              <a:rPr lang="en-AU" b="1" dirty="0"/>
+        <p:spPr>
+          <a:xfrm>
+            <a:off x="6115317" y="405685"/>
+            <a:ext cx="5464968" cy="1559301"/>
+          </a:xfrm>
+        </p:spPr>
+        <p:txBody>
+          <a:bodyPr>
+            <a:normAutofit/>
+          </a:bodyPr>
+          <a:lstStyle/>
+          <a:p>
+            <a:r>
+              <a:rPr lang="en-AU" sz="4000" b="1"/>
               <a:t>Coding Assignment – Overview</a:t>
             </a:r>
-            <a:endParaRPr lang="en-AU" dirty="0"/>
+            <a:endParaRPr lang="en-AU" sz="4000"/>
           </a:p>
         </p:txBody>
       </p:sp>
@@ -5531,60 +8377,67 @@
             <p:ph idx="1"/>
           </p:nvPr>
         </p:nvSpPr>
-        <p:spPr/>
-        <p:txBody>
-          <a:bodyPr/>
-          <a:lstStyle/>
-          <a:p>
-            <a:r>
-              <a:rPr lang="en-AU" dirty="0"/>
+        <p:spPr>
+          <a:xfrm>
+            <a:off x="6115317" y="2743200"/>
+            <a:ext cx="5247340" cy="3496878"/>
+          </a:xfrm>
+        </p:spPr>
+        <p:txBody>
+          <a:bodyPr anchor="ctr">
+            <a:normAutofit/>
+          </a:bodyPr>
+          <a:lstStyle/>
+          <a:p>
+            <a:r>
+              <a:rPr lang="en-AU" sz="2000" dirty="0"/>
               <a:t>Goal: Demonstrate skills from Lectures 2–4 and Workshops 1–3 (20% of your grade)</a:t>
             </a:r>
           </a:p>
           <a:p>
             <a:r>
-              <a:rPr lang="en-AU" dirty="0"/>
+              <a:rPr lang="en-AU" sz="2000" dirty="0"/>
               <a:t>Apply new coding techniques from class to your project data</a:t>
             </a:r>
           </a:p>
           <a:p>
             <a:r>
-              <a:rPr lang="en-AU" dirty="0"/>
+              <a:rPr lang="en-AU" sz="2000" dirty="0"/>
               <a:t>Use your lecture notes &amp; workshop assignments as a guide</a:t>
             </a:r>
           </a:p>
           <a:p>
             <a:r>
-              <a:rPr lang="en-AU" dirty="0"/>
+              <a:rPr lang="en-AU" sz="2000" dirty="0"/>
               <a:t>Deliverables:</a:t>
             </a:r>
           </a:p>
           <a:p>
             <a:pPr lvl="1"/>
             <a:r>
-              <a:rPr lang="en-AU" dirty="0"/>
+              <a:rPr lang="en-AU" sz="2000" dirty="0"/>
               <a:t>R Project folder</a:t>
             </a:r>
           </a:p>
           <a:p>
             <a:pPr lvl="1"/>
             <a:r>
-              <a:rPr lang="en-AU" dirty="0"/>
+              <a:rPr lang="en-AU" sz="2000" dirty="0"/>
               <a:t>Project data files</a:t>
             </a:r>
           </a:p>
           <a:p>
             <a:pPr lvl="1"/>
             <a:r>
-              <a:rPr lang="en-AU" dirty="0"/>
+              <a:rPr lang="en-AU" sz="2000" dirty="0"/>
               <a:t>Quarto document (.</a:t>
             </a:r>
             <a:r>
-              <a:rPr lang="en-AU" dirty="0" err="1"/>
+              <a:rPr lang="en-AU" sz="2000" dirty="0" err="1"/>
               <a:t>qmd</a:t>
             </a:r>
             <a:r>
-              <a:rPr lang="en-AU" dirty="0"/>
+              <a:rPr lang="en-AU" sz="2000" dirty="0"/>
               <a:t>)</a:t>
             </a:r>
           </a:p>
@@ -5592,7 +8445,7 @@
             <a:pPr marL="0" indent="0">
               <a:buNone/>
             </a:pPr>
-            <a:endParaRPr lang="en-AU" dirty="0"/>
+            <a:endParaRPr lang="en-AU" sz="2000" dirty="0"/>
           </a:p>
         </p:txBody>
       </p:sp>
@@ -5609,9 +8462,17 @@
 </p:sld>
 </file>
 
-<file path=ppt/slides/slide8.xml><?xml version="1.0" encoding="utf-8"?>
+<file path=ppt/slides/slide7.xml><?xml version="1.0" encoding="utf-8"?>
 <p:sld xmlns:a="http://schemas.openxmlformats.org/drawingml/2006/main" xmlns:r="http://schemas.openxmlformats.org/officeDocument/2006/relationships" xmlns:p="http://schemas.openxmlformats.org/presentationml/2006/main">
   <p:cSld>
+    <p:bg>
+      <p:bgPr>
+        <a:solidFill>
+          <a:schemeClr val="bg1"/>
+        </a:solidFill>
+        <a:effectLst/>
+      </p:bgPr>
+    </p:bg>
     <p:spTree>
       <p:nvGrpSpPr>
         <p:cNvPr id="1" name=""/>
@@ -5626,105 +8487,437 @@
           <a:chExt cx="0" cy="0"/>
         </a:xfrm>
       </p:grpSpPr>
-      <p:sp>
-        <p:nvSpPr>
-          <p:cNvPr id="2" name="Title 1">
-            <a:extLst>
-              <a:ext uri="{FF2B5EF4-FFF2-40B4-BE49-F238E27FC236}">
-                <a16:creationId xmlns:a16="http://schemas.microsoft.com/office/drawing/2014/main" id="{8F8090C3-BAC7-EE61-B0B6-C5014A90F011}"/>
-              </a:ext>
-            </a:extLst>
-          </p:cNvPr>
-          <p:cNvSpPr>
-            <a:spLocks noGrp="1"/>
-          </p:cNvSpPr>
-          <p:nvPr>
-            <p:ph type="title"/>
-          </p:nvPr>
-        </p:nvSpPr>
-        <p:spPr/>
-        <p:txBody>
-          <a:bodyPr/>
-          <a:lstStyle/>
-          <a:p>
-            <a:r>
-              <a:rPr lang="en-AU" b="1" dirty="0"/>
-              <a:t>File Structure &amp; Saving (3%)</a:t>
-            </a:r>
-            <a:endParaRPr lang="en-AU" dirty="0"/>
-          </a:p>
-        </p:txBody>
-      </p:sp>
-      <p:sp>
-        <p:nvSpPr>
-          <p:cNvPr id="3" name="Content Placeholder 2">
-            <a:extLst>
-              <a:ext uri="{FF2B5EF4-FFF2-40B4-BE49-F238E27FC236}">
-                <a16:creationId xmlns:a16="http://schemas.microsoft.com/office/drawing/2014/main" id="{2823AB18-C33E-55CF-86CC-9769B02BE170}"/>
-              </a:ext>
-            </a:extLst>
-          </p:cNvPr>
-          <p:cNvSpPr>
-            <a:spLocks noGrp="1"/>
-          </p:cNvSpPr>
-          <p:nvPr>
-            <p:ph idx="1"/>
+      <p:sp useBgFill="1">
+        <p:nvSpPr>
+          <p:cNvPr id="11" name="Rectangle 10">
+            <a:extLst>
+              <a:ext uri="{FF2B5EF4-FFF2-40B4-BE49-F238E27FC236}">
+                <a16:creationId xmlns:a16="http://schemas.microsoft.com/office/drawing/2014/main" id="{743AA782-23D1-4521-8CAD-47662984AA08}"/>
+              </a:ext>
+              <a:ext uri="{C183D7F6-B498-43B3-948B-1728B52AA6E4}">
+                <adec:decorative xmlns:adec="http://schemas.microsoft.com/office/drawing/2017/decorative" val="1"/>
+              </a:ext>
+            </a:extLst>
+          </p:cNvPr>
+          <p:cNvSpPr>
+            <a:spLocks noGrp="1" noRot="1" noChangeAspect="1" noMove="1" noResize="1" noEditPoints="1" noAdjustHandles="1" noChangeArrowheads="1" noChangeShapeType="1" noTextEdit="1"/>
+          </p:cNvSpPr>
+          <p:nvPr>
+            <p:extLst>
+              <p:ext uri="{386F3935-93C4-4BCD-93E2-E3B085C9AB24}">
+                <p16:designElem xmlns:p16="http://schemas.microsoft.com/office/powerpoint/2015/main" val="1"/>
+              </p:ext>
+            </p:extLst>
           </p:nvPr>
         </p:nvSpPr>
         <p:spPr>
           <a:xfrm>
-            <a:off x="490654" y="1825625"/>
-            <a:ext cx="10863146" cy="4351338"/>
+            <a:off x="0" y="0"/>
+            <a:ext cx="12192000" cy="6858000"/>
+          </a:xfrm>
+          <a:prstGeom prst="rect">
+            <a:avLst/>
+          </a:prstGeom>
+          <a:ln>
+            <a:noFill/>
+          </a:ln>
+        </p:spPr>
+        <p:style>
+          <a:lnRef idx="2">
+            <a:schemeClr val="accent1">
+              <a:shade val="50000"/>
+            </a:schemeClr>
+          </a:lnRef>
+          <a:fillRef idx="1">
+            <a:schemeClr val="accent1"/>
+          </a:fillRef>
+          <a:effectRef idx="0">
+            <a:schemeClr val="accent1"/>
+          </a:effectRef>
+          <a:fontRef idx="minor">
+            <a:schemeClr val="lt1"/>
+          </a:fontRef>
+        </p:style>
+        <p:txBody>
+          <a:bodyPr rtlCol="0" anchor="ctr"/>
+          <a:lstStyle/>
+          <a:p>
+            <a:pPr algn="ctr"/>
+            <a:endParaRPr lang="en-US"/>
+          </a:p>
+        </p:txBody>
+      </p:sp>
+      <p:sp>
+        <p:nvSpPr>
+          <p:cNvPr id="2" name="Title 1">
+            <a:extLst>
+              <a:ext uri="{FF2B5EF4-FFF2-40B4-BE49-F238E27FC236}">
+                <a16:creationId xmlns:a16="http://schemas.microsoft.com/office/drawing/2014/main" id="{8F8090C3-BAC7-EE61-B0B6-C5014A90F011}"/>
+              </a:ext>
+            </a:extLst>
+          </p:cNvPr>
+          <p:cNvSpPr>
+            <a:spLocks noGrp="1"/>
+          </p:cNvSpPr>
+          <p:nvPr>
+            <p:ph type="title"/>
+          </p:nvPr>
+        </p:nvSpPr>
+        <p:spPr>
+          <a:xfrm>
+            <a:off x="630936" y="640080"/>
+            <a:ext cx="4818888" cy="1481328"/>
           </a:xfrm>
         </p:spPr>
         <p:txBody>
-          <a:bodyPr>
-            <a:normAutofit lnSpcReduction="10000"/>
+          <a:bodyPr anchor="b">
+            <a:normAutofit/>
           </a:bodyPr>
           <a:lstStyle/>
           <a:p>
             <a:r>
-              <a:rPr lang="en-AU" dirty="0"/>
+              <a:rPr lang="en-AU" sz="5000" b="1"/>
+              <a:t>File Structure &amp; Saving (3%)</a:t>
+            </a:r>
+            <a:endParaRPr lang="en-AU" sz="5000"/>
+          </a:p>
+        </p:txBody>
+      </p:sp>
+      <p:sp>
+        <p:nvSpPr>
+          <p:cNvPr id="13" name="sketch line">
+            <a:extLst>
+              <a:ext uri="{FF2B5EF4-FFF2-40B4-BE49-F238E27FC236}">
+                <a16:creationId xmlns:a16="http://schemas.microsoft.com/office/drawing/2014/main" id="{71877DBC-BB60-40F0-AC93-2ACDBAAE60CE}"/>
+              </a:ext>
+              <a:ext uri="{C183D7F6-B498-43B3-948B-1728B52AA6E4}">
+                <adec:decorative xmlns:adec="http://schemas.microsoft.com/office/drawing/2017/decorative" val="1"/>
+              </a:ext>
+            </a:extLst>
+          </p:cNvPr>
+          <p:cNvSpPr>
+            <a:spLocks noGrp="1" noRot="1" noChangeAspect="1" noMove="1" noResize="1" noEditPoints="1" noAdjustHandles="1" noChangeArrowheads="1" noChangeShapeType="1" noTextEdit="1"/>
+          </p:cNvSpPr>
+          <p:nvPr>
+            <p:extLst>
+              <p:ext uri="{386F3935-93C4-4BCD-93E2-E3B085C9AB24}">
+                <p16:designElem xmlns:p16="http://schemas.microsoft.com/office/powerpoint/2015/main" val="1"/>
+              </p:ext>
+            </p:extLst>
+          </p:nvPr>
+        </p:nvSpPr>
+        <p:spPr>
+          <a:xfrm>
+            <a:off x="643278" y="2372868"/>
+            <a:ext cx="3255095" cy="18288"/>
+          </a:xfrm>
+          <a:custGeom>
+            <a:avLst/>
+            <a:gdLst>
+              <a:gd name="connsiteX0" fmla="*/ 0 w 3255095"/>
+              <a:gd name="connsiteY0" fmla="*/ 0 h 18288"/>
+              <a:gd name="connsiteX1" fmla="*/ 618468 w 3255095"/>
+              <a:gd name="connsiteY1" fmla="*/ 0 h 18288"/>
+              <a:gd name="connsiteX2" fmla="*/ 1269487 w 3255095"/>
+              <a:gd name="connsiteY2" fmla="*/ 0 h 18288"/>
+              <a:gd name="connsiteX3" fmla="*/ 1953057 w 3255095"/>
+              <a:gd name="connsiteY3" fmla="*/ 0 h 18288"/>
+              <a:gd name="connsiteX4" fmla="*/ 2636627 w 3255095"/>
+              <a:gd name="connsiteY4" fmla="*/ 0 h 18288"/>
+              <a:gd name="connsiteX5" fmla="*/ 3255095 w 3255095"/>
+              <a:gd name="connsiteY5" fmla="*/ 0 h 18288"/>
+              <a:gd name="connsiteX6" fmla="*/ 3255095 w 3255095"/>
+              <a:gd name="connsiteY6" fmla="*/ 18288 h 18288"/>
+              <a:gd name="connsiteX7" fmla="*/ 2538974 w 3255095"/>
+              <a:gd name="connsiteY7" fmla="*/ 18288 h 18288"/>
+              <a:gd name="connsiteX8" fmla="*/ 1822853 w 3255095"/>
+              <a:gd name="connsiteY8" fmla="*/ 18288 h 18288"/>
+              <a:gd name="connsiteX9" fmla="*/ 1171834 w 3255095"/>
+              <a:gd name="connsiteY9" fmla="*/ 18288 h 18288"/>
+              <a:gd name="connsiteX10" fmla="*/ 0 w 3255095"/>
+              <a:gd name="connsiteY10" fmla="*/ 18288 h 18288"/>
+              <a:gd name="connsiteX11" fmla="*/ 0 w 3255095"/>
+              <a:gd name="connsiteY11" fmla="*/ 0 h 18288"/>
+            </a:gdLst>
+            <a:ahLst/>
+            <a:cxnLst>
+              <a:cxn ang="0">
+                <a:pos x="connsiteX0" y="connsiteY0"/>
+              </a:cxn>
+              <a:cxn ang="0">
+                <a:pos x="connsiteX1" y="connsiteY1"/>
+              </a:cxn>
+              <a:cxn ang="0">
+                <a:pos x="connsiteX2" y="connsiteY2"/>
+              </a:cxn>
+              <a:cxn ang="0">
+                <a:pos x="connsiteX3" y="connsiteY3"/>
+              </a:cxn>
+              <a:cxn ang="0">
+                <a:pos x="connsiteX4" y="connsiteY4"/>
+              </a:cxn>
+              <a:cxn ang="0">
+                <a:pos x="connsiteX5" y="connsiteY5"/>
+              </a:cxn>
+              <a:cxn ang="0">
+                <a:pos x="connsiteX6" y="connsiteY6"/>
+              </a:cxn>
+              <a:cxn ang="0">
+                <a:pos x="connsiteX7" y="connsiteY7"/>
+              </a:cxn>
+              <a:cxn ang="0">
+                <a:pos x="connsiteX8" y="connsiteY8"/>
+              </a:cxn>
+              <a:cxn ang="0">
+                <a:pos x="connsiteX9" y="connsiteY9"/>
+              </a:cxn>
+              <a:cxn ang="0">
+                <a:pos x="connsiteX10" y="connsiteY10"/>
+              </a:cxn>
+              <a:cxn ang="0">
+                <a:pos x="connsiteX11" y="connsiteY11"/>
+              </a:cxn>
+            </a:cxnLst>
+            <a:rect l="l" t="t" r="r" b="b"/>
+            <a:pathLst>
+              <a:path w="3255095" h="18288" fill="none" extrusionOk="0">
+                <a:moveTo>
+                  <a:pt x="0" y="0"/>
+                </a:moveTo>
+                <a:cubicBezTo>
+                  <a:pt x="240201" y="-22123"/>
+                  <a:pt x="462021" y="-19623"/>
+                  <a:pt x="618468" y="0"/>
+                </a:cubicBezTo>
+                <a:cubicBezTo>
+                  <a:pt x="774915" y="19623"/>
+                  <a:pt x="974734" y="2035"/>
+                  <a:pt x="1269487" y="0"/>
+                </a:cubicBezTo>
+                <a:cubicBezTo>
+                  <a:pt x="1564240" y="-2035"/>
+                  <a:pt x="1733579" y="10639"/>
+                  <a:pt x="1953057" y="0"/>
+                </a:cubicBezTo>
+                <a:cubicBezTo>
+                  <a:pt x="2172535" y="-10639"/>
+                  <a:pt x="2453962" y="14018"/>
+                  <a:pt x="2636627" y="0"/>
+                </a:cubicBezTo>
+                <a:cubicBezTo>
+                  <a:pt x="2819292" y="-14018"/>
+                  <a:pt x="3121375" y="5399"/>
+                  <a:pt x="3255095" y="0"/>
+                </a:cubicBezTo>
+                <a:cubicBezTo>
+                  <a:pt x="3254386" y="8157"/>
+                  <a:pt x="3254682" y="12125"/>
+                  <a:pt x="3255095" y="18288"/>
+                </a:cubicBezTo>
+                <a:cubicBezTo>
+                  <a:pt x="3088545" y="23203"/>
+                  <a:pt x="2687475" y="7419"/>
+                  <a:pt x="2538974" y="18288"/>
+                </a:cubicBezTo>
+                <a:cubicBezTo>
+                  <a:pt x="2390473" y="29157"/>
+                  <a:pt x="2137381" y="-8959"/>
+                  <a:pt x="1822853" y="18288"/>
+                </a:cubicBezTo>
+                <a:cubicBezTo>
+                  <a:pt x="1508325" y="45535"/>
+                  <a:pt x="1466437" y="20385"/>
+                  <a:pt x="1171834" y="18288"/>
+                </a:cubicBezTo>
+                <a:cubicBezTo>
+                  <a:pt x="877231" y="16191"/>
+                  <a:pt x="561097" y="37643"/>
+                  <a:pt x="0" y="18288"/>
+                </a:cubicBezTo>
+                <a:cubicBezTo>
+                  <a:pt x="-46" y="12483"/>
+                  <a:pt x="-203" y="6491"/>
+                  <a:pt x="0" y="0"/>
+                </a:cubicBezTo>
+                <a:close/>
+              </a:path>
+              <a:path w="3255095" h="18288" stroke="0" extrusionOk="0">
+                <a:moveTo>
+                  <a:pt x="0" y="0"/>
+                </a:moveTo>
+                <a:cubicBezTo>
+                  <a:pt x="291965" y="19429"/>
+                  <a:pt x="363155" y="8568"/>
+                  <a:pt x="618468" y="0"/>
+                </a:cubicBezTo>
+                <a:cubicBezTo>
+                  <a:pt x="873781" y="-8568"/>
+                  <a:pt x="904459" y="-19505"/>
+                  <a:pt x="1171834" y="0"/>
+                </a:cubicBezTo>
+                <a:cubicBezTo>
+                  <a:pt x="1439209" y="19505"/>
+                  <a:pt x="1744369" y="9790"/>
+                  <a:pt x="1887955" y="0"/>
+                </a:cubicBezTo>
+                <a:cubicBezTo>
+                  <a:pt x="2031541" y="-9790"/>
+                  <a:pt x="2346378" y="21240"/>
+                  <a:pt x="2506423" y="0"/>
+                </a:cubicBezTo>
+                <a:cubicBezTo>
+                  <a:pt x="2666468" y="-21240"/>
+                  <a:pt x="2990257" y="30414"/>
+                  <a:pt x="3255095" y="0"/>
+                </a:cubicBezTo>
+                <a:cubicBezTo>
+                  <a:pt x="3254831" y="4493"/>
+                  <a:pt x="3255479" y="9472"/>
+                  <a:pt x="3255095" y="18288"/>
+                </a:cubicBezTo>
+                <a:cubicBezTo>
+                  <a:pt x="3120743" y="16690"/>
+                  <a:pt x="2759628" y="42462"/>
+                  <a:pt x="2604076" y="18288"/>
+                </a:cubicBezTo>
+                <a:cubicBezTo>
+                  <a:pt x="2448524" y="-5886"/>
+                  <a:pt x="2184336" y="19599"/>
+                  <a:pt x="1887955" y="18288"/>
+                </a:cubicBezTo>
+                <a:cubicBezTo>
+                  <a:pt x="1591574" y="16977"/>
+                  <a:pt x="1548845" y="6870"/>
+                  <a:pt x="1334589" y="18288"/>
+                </a:cubicBezTo>
+                <a:cubicBezTo>
+                  <a:pt x="1120333" y="29706"/>
+                  <a:pt x="996014" y="9662"/>
+                  <a:pt x="683570" y="18288"/>
+                </a:cubicBezTo>
+                <a:cubicBezTo>
+                  <a:pt x="371126" y="26914"/>
+                  <a:pt x="198687" y="16167"/>
+                  <a:pt x="0" y="18288"/>
+                </a:cubicBezTo>
+                <a:cubicBezTo>
+                  <a:pt x="843" y="9577"/>
+                  <a:pt x="371" y="6900"/>
+                  <a:pt x="0" y="0"/>
+                </a:cubicBezTo>
+                <a:close/>
+              </a:path>
+            </a:pathLst>
+          </a:custGeom>
+          <a:solidFill>
+            <a:schemeClr val="accent2"/>
+          </a:solidFill>
+          <a:ln w="38100" cap="rnd">
+            <a:solidFill>
+              <a:schemeClr val="accent2"/>
+            </a:solidFill>
+            <a:round/>
+            <a:extLst>
+              <a:ext uri="{C807C97D-BFC1-408E-A445-0C87EB9F89A2}">
+                <ask:lineSketchStyleProps xmlns:ask="http://schemas.microsoft.com/office/drawing/2018/sketchyshapes" sd="1219033472">
+                  <a:prstGeom prst="rect">
+                    <a:avLst/>
+                  </a:prstGeom>
+                  <ask:type>
+                    <ask:lineSketchFreehand/>
+                  </ask:type>
+                </ask:lineSketchStyleProps>
+              </a:ext>
+            </a:extLst>
+          </a:ln>
+        </p:spPr>
+        <p:style>
+          <a:lnRef idx="2">
+            <a:schemeClr val="accent1">
+              <a:shade val="50000"/>
+            </a:schemeClr>
+          </a:lnRef>
+          <a:fillRef idx="1">
+            <a:schemeClr val="accent1"/>
+          </a:fillRef>
+          <a:effectRef idx="0">
+            <a:schemeClr val="accent1"/>
+          </a:effectRef>
+          <a:fontRef idx="minor">
+            <a:schemeClr val="lt1"/>
+          </a:fontRef>
+        </p:style>
+        <p:txBody>
+          <a:bodyPr rtlCol="0" anchor="ctr"/>
+          <a:lstStyle/>
+          <a:p>
+            <a:pPr algn="ctr"/>
+            <a:endParaRPr lang="en-US"/>
+          </a:p>
+        </p:txBody>
+      </p:sp>
+      <p:sp>
+        <p:nvSpPr>
+          <p:cNvPr id="3" name="Content Placeholder 2">
+            <a:extLst>
+              <a:ext uri="{FF2B5EF4-FFF2-40B4-BE49-F238E27FC236}">
+                <a16:creationId xmlns:a16="http://schemas.microsoft.com/office/drawing/2014/main" id="{2823AB18-C33E-55CF-86CC-9769B02BE170}"/>
+              </a:ext>
+            </a:extLst>
+          </p:cNvPr>
+          <p:cNvSpPr>
+            <a:spLocks noGrp="1"/>
+          </p:cNvSpPr>
+          <p:nvPr>
+            <p:ph idx="1"/>
+          </p:nvPr>
+        </p:nvSpPr>
+        <p:spPr>
+          <a:xfrm>
+            <a:off x="630936" y="2660904"/>
+            <a:ext cx="4818888" cy="3547872"/>
+          </a:xfrm>
+        </p:spPr>
+        <p:txBody>
+          <a:bodyPr anchor="t">
+            <a:normAutofit/>
+          </a:bodyPr>
+          <a:lstStyle/>
+          <a:p>
+            <a:r>
+              <a:rPr lang="en-AU" sz="1900"/>
               <a:t>Name your project and files: STUDENT_FIRST_LAST_NAME_STUDENT#</a:t>
             </a:r>
           </a:p>
           <a:p>
             <a:r>
-              <a:rPr lang="en-AU" dirty="0"/>
+              <a:rPr lang="en-AU" sz="1900"/>
               <a:t>Folder must contain:</a:t>
             </a:r>
           </a:p>
           <a:p>
             <a:pPr lvl="1"/>
             <a:r>
-              <a:rPr lang="en-AU" b="1" dirty="0"/>
+              <a:rPr lang="en-AU" sz="1900" b="1"/>
               <a:t>R Project</a:t>
             </a:r>
-            <a:endParaRPr lang="en-AU" dirty="0"/>
+            <a:endParaRPr lang="en-AU" sz="1900"/>
           </a:p>
           <a:p>
             <a:pPr lvl="1"/>
             <a:r>
-              <a:rPr lang="en-AU" b="1" dirty="0"/>
-              <a:t>Quarto document (.</a:t>
-            </a:r>
-            <a:r>
-              <a:rPr lang="en-AU" b="1" dirty="0" err="1"/>
-              <a:t>qmd</a:t>
-            </a:r>
-            <a:r>
-              <a:rPr lang="en-AU" b="1" dirty="0"/>
-              <a:t>)</a:t>
-            </a:r>
-            <a:endParaRPr lang="en-AU" dirty="0"/>
+              <a:rPr lang="en-AU" sz="1900" b="1"/>
+              <a:t>Quarto document (.qmd)</a:t>
+            </a:r>
+            <a:endParaRPr lang="en-AU" sz="1900"/>
           </a:p>
           <a:p>
             <a:pPr lvl="1"/>
             <a:r>
-              <a:rPr lang="en-AU" b="1" dirty="0"/>
+              <a:rPr lang="en-AU" sz="1900" b="1"/>
               <a:t>Rendered Word document (.docx)</a:t>
             </a:r>
-            <a:endParaRPr lang="en-AU" dirty="0"/>
+            <a:endParaRPr lang="en-AU" sz="1900"/>
           </a:p>
           <a:p>
             <a:pPr>
@@ -5732,34 +8925,34 @@
               <a:buChar char="•"/>
             </a:pPr>
             <a:r>
-              <a:rPr lang="en-AU" b="1" dirty="0"/>
+              <a:rPr lang="en-AU" sz="1900" b="1"/>
               <a:t>Data folder</a:t>
             </a:r>
             <a:r>
-              <a:rPr lang="en-AU" dirty="0"/>
+              <a:rPr lang="en-AU" sz="1900"/>
               <a:t> with your project data</a:t>
             </a:r>
           </a:p>
           <a:p>
             <a:r>
-              <a:rPr lang="en-AU" dirty="0"/>
+              <a:rPr lang="en-AU" sz="1900"/>
               <a:t>Match the file structure covered in class</a:t>
             </a:r>
           </a:p>
           <a:p>
             <a:r>
-              <a:rPr lang="en-AU" dirty="0"/>
+              <a:rPr lang="en-AU" sz="1900"/>
               <a:t>Zip the entire folder before submission</a:t>
             </a:r>
           </a:p>
           <a:p>
             <a:r>
-              <a:rPr lang="en-AU" dirty="0"/>
+              <a:rPr lang="en-AU" sz="1900"/>
               <a:t>Ensure the project renders correctly </a:t>
             </a:r>
           </a:p>
           <a:p>
-            <a:endParaRPr lang="en-AU" dirty="0"/>
+            <a:endParaRPr lang="en-AU" sz="1900"/>
           </a:p>
         </p:txBody>
       </p:sp>
@@ -5785,8 +8978,8 @@
         </p:blipFill>
         <p:spPr>
           <a:xfrm>
-            <a:off x="7480871" y="2116010"/>
-            <a:ext cx="4472305" cy="3698875"/>
+            <a:off x="6099048" y="1181190"/>
+            <a:ext cx="5458968" cy="4495620"/>
           </a:xfrm>
           <a:prstGeom prst="rect">
             <a:avLst/>
@@ -5806,15 +8999,23 @@
 </p:sld>
 </file>
 
-<file path=ppt/slides/slide9.xml><?xml version="1.0" encoding="utf-8"?>
+<file path=ppt/slides/slide8.xml><?xml version="1.0" encoding="utf-8"?>
 <p:sld xmlns:a="http://schemas.openxmlformats.org/drawingml/2006/main" xmlns:r="http://schemas.openxmlformats.org/officeDocument/2006/relationships" xmlns:p="http://schemas.openxmlformats.org/presentationml/2006/main">
   <p:cSld>
+    <p:bg>
+      <p:bgPr>
+        <a:solidFill>
+          <a:schemeClr val="bg1"/>
+        </a:solidFill>
+        <a:effectLst/>
+      </p:bgPr>
+    </p:bg>
     <p:spTree>
       <p:nvGrpSpPr>
         <p:cNvPr id="1" name="">
           <a:extLst>
             <a:ext uri="{FF2B5EF4-FFF2-40B4-BE49-F238E27FC236}">
-              <a16:creationId xmlns:a16="http://schemas.microsoft.com/office/drawing/2014/main" id="{B9F65B20-872D-7F94-4535-BE860A299328}"/>
+              <a16:creationId xmlns:a16="http://schemas.microsoft.com/office/drawing/2014/main" id="{168EB1FC-2300-6B97-3868-A0F076D08606}"/>
             </a:ext>
           </a:extLst>
         </p:cNvPr>
@@ -5829,59 +9030,400 @@
           <a:chExt cx="0" cy="0"/>
         </a:xfrm>
       </p:grpSpPr>
-      <p:sp>
-        <p:nvSpPr>
-          <p:cNvPr id="2" name="Title 1">
-            <a:extLst>
-              <a:ext uri="{FF2B5EF4-FFF2-40B4-BE49-F238E27FC236}">
-                <a16:creationId xmlns:a16="http://schemas.microsoft.com/office/drawing/2014/main" id="{4F651EB7-B028-928D-8F49-94FFECC0F263}"/>
-              </a:ext>
-            </a:extLst>
-          </p:cNvPr>
-          <p:cNvSpPr>
-            <a:spLocks noGrp="1"/>
-          </p:cNvSpPr>
-          <p:nvPr>
-            <p:ph type="title"/>
-          </p:nvPr>
-        </p:nvSpPr>
-        <p:spPr/>
-        <p:txBody>
-          <a:bodyPr/>
-          <a:lstStyle/>
-          <a:p>
-            <a:r>
-              <a:rPr lang="en-AU" b="1" dirty="0"/>
-              <a:t>Functions from Class (5%)</a:t>
-            </a:r>
-          </a:p>
-        </p:txBody>
-      </p:sp>
-      <p:sp>
-        <p:nvSpPr>
-          <p:cNvPr id="3" name="Content Placeholder 2">
-            <a:extLst>
-              <a:ext uri="{FF2B5EF4-FFF2-40B4-BE49-F238E27FC236}">
-                <a16:creationId xmlns:a16="http://schemas.microsoft.com/office/drawing/2014/main" id="{132D7B59-AB34-E30B-B598-87CA1F8072BB}"/>
-              </a:ext>
-            </a:extLst>
-          </p:cNvPr>
-          <p:cNvSpPr>
-            <a:spLocks noGrp="1"/>
-          </p:cNvSpPr>
-          <p:nvPr>
-            <p:ph idx="1"/>
+      <p:sp useBgFill="1">
+        <p:nvSpPr>
+          <p:cNvPr id="11" name="Rectangle 10">
+            <a:extLst>
+              <a:ext uri="{FF2B5EF4-FFF2-40B4-BE49-F238E27FC236}">
+                <a16:creationId xmlns:a16="http://schemas.microsoft.com/office/drawing/2014/main" id="{743AA782-23D1-4521-8CAD-47662984AA08}"/>
+              </a:ext>
+              <a:ext uri="{C183D7F6-B498-43B3-948B-1728B52AA6E4}">
+                <adec:decorative xmlns:adec="http://schemas.microsoft.com/office/drawing/2017/decorative" val="1"/>
+              </a:ext>
+            </a:extLst>
+          </p:cNvPr>
+          <p:cNvSpPr>
+            <a:spLocks noGrp="1" noRot="1" noChangeAspect="1" noMove="1" noResize="1" noEditPoints="1" noAdjustHandles="1" noChangeArrowheads="1" noChangeShapeType="1" noTextEdit="1"/>
+          </p:cNvSpPr>
+          <p:nvPr>
+            <p:extLst>
+              <p:ext uri="{386F3935-93C4-4BCD-93E2-E3B085C9AB24}">
+                <p16:designElem xmlns:p16="http://schemas.microsoft.com/office/powerpoint/2015/main" val="1"/>
+              </p:ext>
+            </p:extLst>
           </p:nvPr>
         </p:nvSpPr>
         <p:spPr>
           <a:xfrm>
-            <a:off x="490654" y="1825625"/>
-            <a:ext cx="10863146" cy="4351338"/>
+            <a:off x="0" y="0"/>
+            <a:ext cx="12192000" cy="6858000"/>
+          </a:xfrm>
+          <a:prstGeom prst="rect">
+            <a:avLst/>
+          </a:prstGeom>
+          <a:ln>
+            <a:noFill/>
+          </a:ln>
+        </p:spPr>
+        <p:style>
+          <a:lnRef idx="2">
+            <a:schemeClr val="accent1">
+              <a:shade val="50000"/>
+            </a:schemeClr>
+          </a:lnRef>
+          <a:fillRef idx="1">
+            <a:schemeClr val="accent1"/>
+          </a:fillRef>
+          <a:effectRef idx="0">
+            <a:schemeClr val="accent1"/>
+          </a:effectRef>
+          <a:fontRef idx="minor">
+            <a:schemeClr val="lt1"/>
+          </a:fontRef>
+        </p:style>
+        <p:txBody>
+          <a:bodyPr rtlCol="0" anchor="ctr"/>
+          <a:lstStyle/>
+          <a:p>
+            <a:pPr algn="ctr"/>
+            <a:endParaRPr lang="en-US"/>
+          </a:p>
+        </p:txBody>
+      </p:sp>
+      <p:sp>
+        <p:nvSpPr>
+          <p:cNvPr id="2" name="Title 1">
+            <a:extLst>
+              <a:ext uri="{FF2B5EF4-FFF2-40B4-BE49-F238E27FC236}">
+                <a16:creationId xmlns:a16="http://schemas.microsoft.com/office/drawing/2014/main" id="{416107C7-8A58-1C8C-5176-9E191F4CADF5}"/>
+              </a:ext>
+            </a:extLst>
+          </p:cNvPr>
+          <p:cNvSpPr>
+            <a:spLocks noGrp="1"/>
+          </p:cNvSpPr>
+          <p:nvPr>
+            <p:ph type="title"/>
+          </p:nvPr>
+        </p:nvSpPr>
+        <p:spPr>
+          <a:xfrm>
+            <a:off x="630936" y="640080"/>
+            <a:ext cx="4818888" cy="1481328"/>
           </a:xfrm>
         </p:spPr>
         <p:txBody>
-          <a:bodyPr>
-            <a:normAutofit/>
+          <a:bodyPr anchor="b">
+            <a:normAutofit fontScale="90000"/>
+          </a:bodyPr>
+          <a:lstStyle/>
+          <a:p>
+            <a:r>
+              <a:rPr lang="en-AU" sz="5400" b="1" dirty="0"/>
+              <a:t>Functions from Class (5%)</a:t>
+            </a:r>
+            <a:endParaRPr lang="en-AU" sz="5000" dirty="0"/>
+          </a:p>
+        </p:txBody>
+      </p:sp>
+      <p:sp>
+        <p:nvSpPr>
+          <p:cNvPr id="13" name="sketch line">
+            <a:extLst>
+              <a:ext uri="{FF2B5EF4-FFF2-40B4-BE49-F238E27FC236}">
+                <a16:creationId xmlns:a16="http://schemas.microsoft.com/office/drawing/2014/main" id="{71877DBC-BB60-40F0-AC93-2ACDBAAE60CE}"/>
+              </a:ext>
+              <a:ext uri="{C183D7F6-B498-43B3-948B-1728B52AA6E4}">
+                <adec:decorative xmlns:adec="http://schemas.microsoft.com/office/drawing/2017/decorative" val="1"/>
+              </a:ext>
+            </a:extLst>
+          </p:cNvPr>
+          <p:cNvSpPr>
+            <a:spLocks noGrp="1" noRot="1" noChangeAspect="1" noMove="1" noResize="1" noEditPoints="1" noAdjustHandles="1" noChangeArrowheads="1" noChangeShapeType="1" noTextEdit="1"/>
+          </p:cNvSpPr>
+          <p:nvPr>
+            <p:extLst>
+              <p:ext uri="{386F3935-93C4-4BCD-93E2-E3B085C9AB24}">
+                <p16:designElem xmlns:p16="http://schemas.microsoft.com/office/powerpoint/2015/main" val="1"/>
+              </p:ext>
+            </p:extLst>
+          </p:nvPr>
+        </p:nvSpPr>
+        <p:spPr>
+          <a:xfrm>
+            <a:off x="643278" y="2372868"/>
+            <a:ext cx="3255095" cy="18288"/>
+          </a:xfrm>
+          <a:custGeom>
+            <a:avLst/>
+            <a:gdLst>
+              <a:gd name="connsiteX0" fmla="*/ 0 w 3255095"/>
+              <a:gd name="connsiteY0" fmla="*/ 0 h 18288"/>
+              <a:gd name="connsiteX1" fmla="*/ 618468 w 3255095"/>
+              <a:gd name="connsiteY1" fmla="*/ 0 h 18288"/>
+              <a:gd name="connsiteX2" fmla="*/ 1269487 w 3255095"/>
+              <a:gd name="connsiteY2" fmla="*/ 0 h 18288"/>
+              <a:gd name="connsiteX3" fmla="*/ 1953057 w 3255095"/>
+              <a:gd name="connsiteY3" fmla="*/ 0 h 18288"/>
+              <a:gd name="connsiteX4" fmla="*/ 2636627 w 3255095"/>
+              <a:gd name="connsiteY4" fmla="*/ 0 h 18288"/>
+              <a:gd name="connsiteX5" fmla="*/ 3255095 w 3255095"/>
+              <a:gd name="connsiteY5" fmla="*/ 0 h 18288"/>
+              <a:gd name="connsiteX6" fmla="*/ 3255095 w 3255095"/>
+              <a:gd name="connsiteY6" fmla="*/ 18288 h 18288"/>
+              <a:gd name="connsiteX7" fmla="*/ 2538974 w 3255095"/>
+              <a:gd name="connsiteY7" fmla="*/ 18288 h 18288"/>
+              <a:gd name="connsiteX8" fmla="*/ 1822853 w 3255095"/>
+              <a:gd name="connsiteY8" fmla="*/ 18288 h 18288"/>
+              <a:gd name="connsiteX9" fmla="*/ 1171834 w 3255095"/>
+              <a:gd name="connsiteY9" fmla="*/ 18288 h 18288"/>
+              <a:gd name="connsiteX10" fmla="*/ 0 w 3255095"/>
+              <a:gd name="connsiteY10" fmla="*/ 18288 h 18288"/>
+              <a:gd name="connsiteX11" fmla="*/ 0 w 3255095"/>
+              <a:gd name="connsiteY11" fmla="*/ 0 h 18288"/>
+            </a:gdLst>
+            <a:ahLst/>
+            <a:cxnLst>
+              <a:cxn ang="0">
+                <a:pos x="connsiteX0" y="connsiteY0"/>
+              </a:cxn>
+              <a:cxn ang="0">
+                <a:pos x="connsiteX1" y="connsiteY1"/>
+              </a:cxn>
+              <a:cxn ang="0">
+                <a:pos x="connsiteX2" y="connsiteY2"/>
+              </a:cxn>
+              <a:cxn ang="0">
+                <a:pos x="connsiteX3" y="connsiteY3"/>
+              </a:cxn>
+              <a:cxn ang="0">
+                <a:pos x="connsiteX4" y="connsiteY4"/>
+              </a:cxn>
+              <a:cxn ang="0">
+                <a:pos x="connsiteX5" y="connsiteY5"/>
+              </a:cxn>
+              <a:cxn ang="0">
+                <a:pos x="connsiteX6" y="connsiteY6"/>
+              </a:cxn>
+              <a:cxn ang="0">
+                <a:pos x="connsiteX7" y="connsiteY7"/>
+              </a:cxn>
+              <a:cxn ang="0">
+                <a:pos x="connsiteX8" y="connsiteY8"/>
+              </a:cxn>
+              <a:cxn ang="0">
+                <a:pos x="connsiteX9" y="connsiteY9"/>
+              </a:cxn>
+              <a:cxn ang="0">
+                <a:pos x="connsiteX10" y="connsiteY10"/>
+              </a:cxn>
+              <a:cxn ang="0">
+                <a:pos x="connsiteX11" y="connsiteY11"/>
+              </a:cxn>
+            </a:cxnLst>
+            <a:rect l="l" t="t" r="r" b="b"/>
+            <a:pathLst>
+              <a:path w="3255095" h="18288" fill="none" extrusionOk="0">
+                <a:moveTo>
+                  <a:pt x="0" y="0"/>
+                </a:moveTo>
+                <a:cubicBezTo>
+                  <a:pt x="240201" y="-22123"/>
+                  <a:pt x="462021" y="-19623"/>
+                  <a:pt x="618468" y="0"/>
+                </a:cubicBezTo>
+                <a:cubicBezTo>
+                  <a:pt x="774915" y="19623"/>
+                  <a:pt x="974734" y="2035"/>
+                  <a:pt x="1269487" y="0"/>
+                </a:cubicBezTo>
+                <a:cubicBezTo>
+                  <a:pt x="1564240" y="-2035"/>
+                  <a:pt x="1733579" y="10639"/>
+                  <a:pt x="1953057" y="0"/>
+                </a:cubicBezTo>
+                <a:cubicBezTo>
+                  <a:pt x="2172535" y="-10639"/>
+                  <a:pt x="2453962" y="14018"/>
+                  <a:pt x="2636627" y="0"/>
+                </a:cubicBezTo>
+                <a:cubicBezTo>
+                  <a:pt x="2819292" y="-14018"/>
+                  <a:pt x="3121375" y="5399"/>
+                  <a:pt x="3255095" y="0"/>
+                </a:cubicBezTo>
+                <a:cubicBezTo>
+                  <a:pt x="3254386" y="8157"/>
+                  <a:pt x="3254682" y="12125"/>
+                  <a:pt x="3255095" y="18288"/>
+                </a:cubicBezTo>
+                <a:cubicBezTo>
+                  <a:pt x="3088545" y="23203"/>
+                  <a:pt x="2687475" y="7419"/>
+                  <a:pt x="2538974" y="18288"/>
+                </a:cubicBezTo>
+                <a:cubicBezTo>
+                  <a:pt x="2390473" y="29157"/>
+                  <a:pt x="2137381" y="-8959"/>
+                  <a:pt x="1822853" y="18288"/>
+                </a:cubicBezTo>
+                <a:cubicBezTo>
+                  <a:pt x="1508325" y="45535"/>
+                  <a:pt x="1466437" y="20385"/>
+                  <a:pt x="1171834" y="18288"/>
+                </a:cubicBezTo>
+                <a:cubicBezTo>
+                  <a:pt x="877231" y="16191"/>
+                  <a:pt x="561097" y="37643"/>
+                  <a:pt x="0" y="18288"/>
+                </a:cubicBezTo>
+                <a:cubicBezTo>
+                  <a:pt x="-46" y="12483"/>
+                  <a:pt x="-203" y="6491"/>
+                  <a:pt x="0" y="0"/>
+                </a:cubicBezTo>
+                <a:close/>
+              </a:path>
+              <a:path w="3255095" h="18288" stroke="0" extrusionOk="0">
+                <a:moveTo>
+                  <a:pt x="0" y="0"/>
+                </a:moveTo>
+                <a:cubicBezTo>
+                  <a:pt x="291965" y="19429"/>
+                  <a:pt x="363155" y="8568"/>
+                  <a:pt x="618468" y="0"/>
+                </a:cubicBezTo>
+                <a:cubicBezTo>
+                  <a:pt x="873781" y="-8568"/>
+                  <a:pt x="904459" y="-19505"/>
+                  <a:pt x="1171834" y="0"/>
+                </a:cubicBezTo>
+                <a:cubicBezTo>
+                  <a:pt x="1439209" y="19505"/>
+                  <a:pt x="1744369" y="9790"/>
+                  <a:pt x="1887955" y="0"/>
+                </a:cubicBezTo>
+                <a:cubicBezTo>
+                  <a:pt x="2031541" y="-9790"/>
+                  <a:pt x="2346378" y="21240"/>
+                  <a:pt x="2506423" y="0"/>
+                </a:cubicBezTo>
+                <a:cubicBezTo>
+                  <a:pt x="2666468" y="-21240"/>
+                  <a:pt x="2990257" y="30414"/>
+                  <a:pt x="3255095" y="0"/>
+                </a:cubicBezTo>
+                <a:cubicBezTo>
+                  <a:pt x="3254831" y="4493"/>
+                  <a:pt x="3255479" y="9472"/>
+                  <a:pt x="3255095" y="18288"/>
+                </a:cubicBezTo>
+                <a:cubicBezTo>
+                  <a:pt x="3120743" y="16690"/>
+                  <a:pt x="2759628" y="42462"/>
+                  <a:pt x="2604076" y="18288"/>
+                </a:cubicBezTo>
+                <a:cubicBezTo>
+                  <a:pt x="2448524" y="-5886"/>
+                  <a:pt x="2184336" y="19599"/>
+                  <a:pt x="1887955" y="18288"/>
+                </a:cubicBezTo>
+                <a:cubicBezTo>
+                  <a:pt x="1591574" y="16977"/>
+                  <a:pt x="1548845" y="6870"/>
+                  <a:pt x="1334589" y="18288"/>
+                </a:cubicBezTo>
+                <a:cubicBezTo>
+                  <a:pt x="1120333" y="29706"/>
+                  <a:pt x="996014" y="9662"/>
+                  <a:pt x="683570" y="18288"/>
+                </a:cubicBezTo>
+                <a:cubicBezTo>
+                  <a:pt x="371126" y="26914"/>
+                  <a:pt x="198687" y="16167"/>
+                  <a:pt x="0" y="18288"/>
+                </a:cubicBezTo>
+                <a:cubicBezTo>
+                  <a:pt x="843" y="9577"/>
+                  <a:pt x="371" y="6900"/>
+                  <a:pt x="0" y="0"/>
+                </a:cubicBezTo>
+                <a:close/>
+              </a:path>
+            </a:pathLst>
+          </a:custGeom>
+          <a:solidFill>
+            <a:schemeClr val="accent2"/>
+          </a:solidFill>
+          <a:ln w="38100" cap="rnd">
+            <a:solidFill>
+              <a:schemeClr val="accent2"/>
+            </a:solidFill>
+            <a:round/>
+            <a:extLst>
+              <a:ext uri="{C807C97D-BFC1-408E-A445-0C87EB9F89A2}">
+                <ask:lineSketchStyleProps xmlns:ask="http://schemas.microsoft.com/office/drawing/2018/sketchyshapes" sd="1219033472">
+                  <a:prstGeom prst="rect">
+                    <a:avLst/>
+                  </a:prstGeom>
+                  <ask:type>
+                    <ask:lineSketchFreehand/>
+                  </ask:type>
+                </ask:lineSketchStyleProps>
+              </a:ext>
+            </a:extLst>
+          </a:ln>
+        </p:spPr>
+        <p:style>
+          <a:lnRef idx="2">
+            <a:schemeClr val="accent1">
+              <a:shade val="50000"/>
+            </a:schemeClr>
+          </a:lnRef>
+          <a:fillRef idx="1">
+            <a:schemeClr val="accent1"/>
+          </a:fillRef>
+          <a:effectRef idx="0">
+            <a:schemeClr val="accent1"/>
+          </a:effectRef>
+          <a:fontRef idx="minor">
+            <a:schemeClr val="lt1"/>
+          </a:fontRef>
+        </p:style>
+        <p:txBody>
+          <a:bodyPr rtlCol="0" anchor="ctr"/>
+          <a:lstStyle/>
+          <a:p>
+            <a:pPr algn="ctr"/>
+            <a:endParaRPr lang="en-US"/>
+          </a:p>
+        </p:txBody>
+      </p:sp>
+      <p:sp>
+        <p:nvSpPr>
+          <p:cNvPr id="3" name="Content Placeholder 2">
+            <a:extLst>
+              <a:ext uri="{FF2B5EF4-FFF2-40B4-BE49-F238E27FC236}">
+                <a16:creationId xmlns:a16="http://schemas.microsoft.com/office/drawing/2014/main" id="{2C9CB812-980C-96F8-CC68-6BAF2A1A9840}"/>
+              </a:ext>
+            </a:extLst>
+          </p:cNvPr>
+          <p:cNvSpPr>
+            <a:spLocks noGrp="1"/>
+          </p:cNvSpPr>
+          <p:nvPr>
+            <p:ph idx="1"/>
+          </p:nvPr>
+        </p:nvSpPr>
+        <p:spPr>
+          <a:xfrm>
+            <a:off x="630936" y="2660904"/>
+            <a:ext cx="4818888" cy="3547872"/>
+          </a:xfrm>
+        </p:spPr>
+        <p:txBody>
+          <a:bodyPr anchor="t">
+            <a:normAutofit fontScale="77500" lnSpcReduction="20000"/>
           </a:bodyPr>
           <a:lstStyle/>
           <a:p>
@@ -5938,14 +9480,632 @@
             </a:r>
           </a:p>
           <a:p>
-            <a:endParaRPr lang="en-AU" dirty="0"/>
-          </a:p>
-        </p:txBody>
-      </p:sp>
+            <a:endParaRPr lang="en-AU" sz="1900" dirty="0"/>
+          </a:p>
+        </p:txBody>
+      </p:sp>
+      <p:pic>
+        <p:nvPicPr>
+          <p:cNvPr id="4" name="Picture 3" descr="A screenshot of a computer&#10;&#10;Description automatically generated">
+            <a:extLst>
+              <a:ext uri="{FF2B5EF4-FFF2-40B4-BE49-F238E27FC236}">
+                <a16:creationId xmlns:a16="http://schemas.microsoft.com/office/drawing/2014/main" id="{61D79F4E-7FDB-1550-B5AA-2422FDEF9CE9}"/>
+              </a:ext>
+            </a:extLst>
+          </p:cNvPr>
+          <p:cNvPicPr>
+            <a:picLocks noChangeAspect="1"/>
+          </p:cNvPicPr>
+          <p:nvPr/>
+        </p:nvPicPr>
+        <p:blipFill>
+          <a:blip r:embed="rId2" cstate="print">
+            <a:extLst>
+              <a:ext uri="{28A0092B-C50C-407E-A947-70E740481C1C}">
+                <a14:useLocalDpi xmlns:a14="http://schemas.microsoft.com/office/drawing/2010/main" val="0"/>
+              </a:ext>
+            </a:extLst>
+          </a:blip>
+          <a:stretch>
+            <a:fillRect/>
+          </a:stretch>
+        </p:blipFill>
+        <p:spPr>
+          <a:xfrm>
+            <a:off x="6114233" y="2811327"/>
+            <a:ext cx="5870939" cy="2252825"/>
+          </a:xfrm>
+          <a:prstGeom prst="rect">
+            <a:avLst/>
+          </a:prstGeom>
+        </p:spPr>
+      </p:pic>
     </p:spTree>
     <p:extLst>
       <p:ext uri="{BB962C8B-B14F-4D97-AF65-F5344CB8AC3E}">
-        <p14:creationId xmlns:p14="http://schemas.microsoft.com/office/powerpoint/2010/main" val="3623643879"/>
+        <p14:creationId xmlns:p14="http://schemas.microsoft.com/office/powerpoint/2010/main" val="1964540517"/>
+      </p:ext>
+    </p:extLst>
+  </p:cSld>
+  <p:clrMapOvr>
+    <a:masterClrMapping/>
+  </p:clrMapOvr>
+</p:sld>
+</file>
+
+<file path=ppt/slides/slide9.xml><?xml version="1.0" encoding="utf-8"?>
+<p:sld xmlns:a="http://schemas.openxmlformats.org/drawingml/2006/main" xmlns:r="http://schemas.openxmlformats.org/officeDocument/2006/relationships" xmlns:p="http://schemas.openxmlformats.org/presentationml/2006/main">
+  <p:cSld>
+    <p:bg>
+      <p:bgPr>
+        <a:solidFill>
+          <a:schemeClr val="bg1"/>
+        </a:solidFill>
+        <a:effectLst/>
+      </p:bgPr>
+    </p:bg>
+    <p:spTree>
+      <p:nvGrpSpPr>
+        <p:cNvPr id="1" name="">
+          <a:extLst>
+            <a:ext uri="{FF2B5EF4-FFF2-40B4-BE49-F238E27FC236}">
+              <a16:creationId xmlns:a16="http://schemas.microsoft.com/office/drawing/2014/main" id="{7EA05F3F-A0BE-59BC-ED50-1313D76D5BE5}"/>
+            </a:ext>
+          </a:extLst>
+        </p:cNvPr>
+        <p:cNvGrpSpPr/>
+        <p:nvPr/>
+      </p:nvGrpSpPr>
+      <p:grpSpPr>
+        <a:xfrm>
+          <a:off x="0" y="0"/>
+          <a:ext cx="0" cy="0"/>
+          <a:chOff x="0" y="0"/>
+          <a:chExt cx="0" cy="0"/>
+        </a:xfrm>
+      </p:grpSpPr>
+      <p:sp useBgFill="1">
+        <p:nvSpPr>
+          <p:cNvPr id="11" name="Rectangle 10">
+            <a:extLst>
+              <a:ext uri="{FF2B5EF4-FFF2-40B4-BE49-F238E27FC236}">
+                <a16:creationId xmlns:a16="http://schemas.microsoft.com/office/drawing/2014/main" id="{743AA782-23D1-4521-8CAD-47662984AA08}"/>
+              </a:ext>
+              <a:ext uri="{C183D7F6-B498-43B3-948B-1728B52AA6E4}">
+                <adec:decorative xmlns:adec="http://schemas.microsoft.com/office/drawing/2017/decorative" val="1"/>
+              </a:ext>
+            </a:extLst>
+          </p:cNvPr>
+          <p:cNvSpPr>
+            <a:spLocks noGrp="1" noRot="1" noChangeAspect="1" noMove="1" noResize="1" noEditPoints="1" noAdjustHandles="1" noChangeArrowheads="1" noChangeShapeType="1" noTextEdit="1"/>
+          </p:cNvSpPr>
+          <p:nvPr>
+            <p:extLst>
+              <p:ext uri="{386F3935-93C4-4BCD-93E2-E3B085C9AB24}">
+                <p16:designElem xmlns:p16="http://schemas.microsoft.com/office/powerpoint/2015/main" val="1"/>
+              </p:ext>
+            </p:extLst>
+          </p:nvPr>
+        </p:nvSpPr>
+        <p:spPr>
+          <a:xfrm>
+            <a:off x="0" y="0"/>
+            <a:ext cx="12192000" cy="6858000"/>
+          </a:xfrm>
+          <a:prstGeom prst="rect">
+            <a:avLst/>
+          </a:prstGeom>
+          <a:ln>
+            <a:noFill/>
+          </a:ln>
+        </p:spPr>
+        <p:style>
+          <a:lnRef idx="2">
+            <a:schemeClr val="accent1">
+              <a:shade val="50000"/>
+            </a:schemeClr>
+          </a:lnRef>
+          <a:fillRef idx="1">
+            <a:schemeClr val="accent1"/>
+          </a:fillRef>
+          <a:effectRef idx="0">
+            <a:schemeClr val="accent1"/>
+          </a:effectRef>
+          <a:fontRef idx="minor">
+            <a:schemeClr val="lt1"/>
+          </a:fontRef>
+        </p:style>
+        <p:txBody>
+          <a:bodyPr rtlCol="0" anchor="ctr"/>
+          <a:lstStyle/>
+          <a:p>
+            <a:pPr algn="ctr"/>
+            <a:endParaRPr lang="en-US"/>
+          </a:p>
+        </p:txBody>
+      </p:sp>
+      <p:sp>
+        <p:nvSpPr>
+          <p:cNvPr id="2" name="Title 1">
+            <a:extLst>
+              <a:ext uri="{FF2B5EF4-FFF2-40B4-BE49-F238E27FC236}">
+                <a16:creationId xmlns:a16="http://schemas.microsoft.com/office/drawing/2014/main" id="{C1865D1D-9F52-6166-51C8-105553ECFA7C}"/>
+              </a:ext>
+            </a:extLst>
+          </p:cNvPr>
+          <p:cNvSpPr>
+            <a:spLocks noGrp="1"/>
+          </p:cNvSpPr>
+          <p:nvPr>
+            <p:ph type="title"/>
+          </p:nvPr>
+        </p:nvSpPr>
+        <p:spPr>
+          <a:xfrm>
+            <a:off x="630936" y="640080"/>
+            <a:ext cx="4818888" cy="1481328"/>
+          </a:xfrm>
+        </p:spPr>
+        <p:txBody>
+          <a:bodyPr anchor="b">
+            <a:normAutofit fontScale="90000"/>
+          </a:bodyPr>
+          <a:lstStyle/>
+          <a:p>
+            <a:r>
+              <a:rPr lang="en-AU" sz="5400" b="1" dirty="0"/>
+              <a:t>Project Protocol (10%)</a:t>
+            </a:r>
+            <a:endParaRPr lang="en-AU" sz="5000" dirty="0"/>
+          </a:p>
+        </p:txBody>
+      </p:sp>
+      <p:sp>
+        <p:nvSpPr>
+          <p:cNvPr id="13" name="sketch line">
+            <a:extLst>
+              <a:ext uri="{FF2B5EF4-FFF2-40B4-BE49-F238E27FC236}">
+                <a16:creationId xmlns:a16="http://schemas.microsoft.com/office/drawing/2014/main" id="{71877DBC-BB60-40F0-AC93-2ACDBAAE60CE}"/>
+              </a:ext>
+              <a:ext uri="{C183D7F6-B498-43B3-948B-1728B52AA6E4}">
+                <adec:decorative xmlns:adec="http://schemas.microsoft.com/office/drawing/2017/decorative" val="1"/>
+              </a:ext>
+            </a:extLst>
+          </p:cNvPr>
+          <p:cNvSpPr>
+            <a:spLocks noGrp="1" noRot="1" noChangeAspect="1" noMove="1" noResize="1" noEditPoints="1" noAdjustHandles="1" noChangeArrowheads="1" noChangeShapeType="1" noTextEdit="1"/>
+          </p:cNvSpPr>
+          <p:nvPr>
+            <p:extLst>
+              <p:ext uri="{386F3935-93C4-4BCD-93E2-E3B085C9AB24}">
+                <p16:designElem xmlns:p16="http://schemas.microsoft.com/office/powerpoint/2015/main" val="1"/>
+              </p:ext>
+            </p:extLst>
+          </p:nvPr>
+        </p:nvSpPr>
+        <p:spPr>
+          <a:xfrm>
+            <a:off x="643278" y="2372868"/>
+            <a:ext cx="3255095" cy="18288"/>
+          </a:xfrm>
+          <a:custGeom>
+            <a:avLst/>
+            <a:gdLst>
+              <a:gd name="connsiteX0" fmla="*/ 0 w 3255095"/>
+              <a:gd name="connsiteY0" fmla="*/ 0 h 18288"/>
+              <a:gd name="connsiteX1" fmla="*/ 618468 w 3255095"/>
+              <a:gd name="connsiteY1" fmla="*/ 0 h 18288"/>
+              <a:gd name="connsiteX2" fmla="*/ 1269487 w 3255095"/>
+              <a:gd name="connsiteY2" fmla="*/ 0 h 18288"/>
+              <a:gd name="connsiteX3" fmla="*/ 1953057 w 3255095"/>
+              <a:gd name="connsiteY3" fmla="*/ 0 h 18288"/>
+              <a:gd name="connsiteX4" fmla="*/ 2636627 w 3255095"/>
+              <a:gd name="connsiteY4" fmla="*/ 0 h 18288"/>
+              <a:gd name="connsiteX5" fmla="*/ 3255095 w 3255095"/>
+              <a:gd name="connsiteY5" fmla="*/ 0 h 18288"/>
+              <a:gd name="connsiteX6" fmla="*/ 3255095 w 3255095"/>
+              <a:gd name="connsiteY6" fmla="*/ 18288 h 18288"/>
+              <a:gd name="connsiteX7" fmla="*/ 2538974 w 3255095"/>
+              <a:gd name="connsiteY7" fmla="*/ 18288 h 18288"/>
+              <a:gd name="connsiteX8" fmla="*/ 1822853 w 3255095"/>
+              <a:gd name="connsiteY8" fmla="*/ 18288 h 18288"/>
+              <a:gd name="connsiteX9" fmla="*/ 1171834 w 3255095"/>
+              <a:gd name="connsiteY9" fmla="*/ 18288 h 18288"/>
+              <a:gd name="connsiteX10" fmla="*/ 0 w 3255095"/>
+              <a:gd name="connsiteY10" fmla="*/ 18288 h 18288"/>
+              <a:gd name="connsiteX11" fmla="*/ 0 w 3255095"/>
+              <a:gd name="connsiteY11" fmla="*/ 0 h 18288"/>
+            </a:gdLst>
+            <a:ahLst/>
+            <a:cxnLst>
+              <a:cxn ang="0">
+                <a:pos x="connsiteX0" y="connsiteY0"/>
+              </a:cxn>
+              <a:cxn ang="0">
+                <a:pos x="connsiteX1" y="connsiteY1"/>
+              </a:cxn>
+              <a:cxn ang="0">
+                <a:pos x="connsiteX2" y="connsiteY2"/>
+              </a:cxn>
+              <a:cxn ang="0">
+                <a:pos x="connsiteX3" y="connsiteY3"/>
+              </a:cxn>
+              <a:cxn ang="0">
+                <a:pos x="connsiteX4" y="connsiteY4"/>
+              </a:cxn>
+              <a:cxn ang="0">
+                <a:pos x="connsiteX5" y="connsiteY5"/>
+              </a:cxn>
+              <a:cxn ang="0">
+                <a:pos x="connsiteX6" y="connsiteY6"/>
+              </a:cxn>
+              <a:cxn ang="0">
+                <a:pos x="connsiteX7" y="connsiteY7"/>
+              </a:cxn>
+              <a:cxn ang="0">
+                <a:pos x="connsiteX8" y="connsiteY8"/>
+              </a:cxn>
+              <a:cxn ang="0">
+                <a:pos x="connsiteX9" y="connsiteY9"/>
+              </a:cxn>
+              <a:cxn ang="0">
+                <a:pos x="connsiteX10" y="connsiteY10"/>
+              </a:cxn>
+              <a:cxn ang="0">
+                <a:pos x="connsiteX11" y="connsiteY11"/>
+              </a:cxn>
+            </a:cxnLst>
+            <a:rect l="l" t="t" r="r" b="b"/>
+            <a:pathLst>
+              <a:path w="3255095" h="18288" fill="none" extrusionOk="0">
+                <a:moveTo>
+                  <a:pt x="0" y="0"/>
+                </a:moveTo>
+                <a:cubicBezTo>
+                  <a:pt x="240201" y="-22123"/>
+                  <a:pt x="462021" y="-19623"/>
+                  <a:pt x="618468" y="0"/>
+                </a:cubicBezTo>
+                <a:cubicBezTo>
+                  <a:pt x="774915" y="19623"/>
+                  <a:pt x="974734" y="2035"/>
+                  <a:pt x="1269487" y="0"/>
+                </a:cubicBezTo>
+                <a:cubicBezTo>
+                  <a:pt x="1564240" y="-2035"/>
+                  <a:pt x="1733579" y="10639"/>
+                  <a:pt x="1953057" y="0"/>
+                </a:cubicBezTo>
+                <a:cubicBezTo>
+                  <a:pt x="2172535" y="-10639"/>
+                  <a:pt x="2453962" y="14018"/>
+                  <a:pt x="2636627" y="0"/>
+                </a:cubicBezTo>
+                <a:cubicBezTo>
+                  <a:pt x="2819292" y="-14018"/>
+                  <a:pt x="3121375" y="5399"/>
+                  <a:pt x="3255095" y="0"/>
+                </a:cubicBezTo>
+                <a:cubicBezTo>
+                  <a:pt x="3254386" y="8157"/>
+                  <a:pt x="3254682" y="12125"/>
+                  <a:pt x="3255095" y="18288"/>
+                </a:cubicBezTo>
+                <a:cubicBezTo>
+                  <a:pt x="3088545" y="23203"/>
+                  <a:pt x="2687475" y="7419"/>
+                  <a:pt x="2538974" y="18288"/>
+                </a:cubicBezTo>
+                <a:cubicBezTo>
+                  <a:pt x="2390473" y="29157"/>
+                  <a:pt x="2137381" y="-8959"/>
+                  <a:pt x="1822853" y="18288"/>
+                </a:cubicBezTo>
+                <a:cubicBezTo>
+                  <a:pt x="1508325" y="45535"/>
+                  <a:pt x="1466437" y="20385"/>
+                  <a:pt x="1171834" y="18288"/>
+                </a:cubicBezTo>
+                <a:cubicBezTo>
+                  <a:pt x="877231" y="16191"/>
+                  <a:pt x="561097" y="37643"/>
+                  <a:pt x="0" y="18288"/>
+                </a:cubicBezTo>
+                <a:cubicBezTo>
+                  <a:pt x="-46" y="12483"/>
+                  <a:pt x="-203" y="6491"/>
+                  <a:pt x="0" y="0"/>
+                </a:cubicBezTo>
+                <a:close/>
+              </a:path>
+              <a:path w="3255095" h="18288" stroke="0" extrusionOk="0">
+                <a:moveTo>
+                  <a:pt x="0" y="0"/>
+                </a:moveTo>
+                <a:cubicBezTo>
+                  <a:pt x="291965" y="19429"/>
+                  <a:pt x="363155" y="8568"/>
+                  <a:pt x="618468" y="0"/>
+                </a:cubicBezTo>
+                <a:cubicBezTo>
+                  <a:pt x="873781" y="-8568"/>
+                  <a:pt x="904459" y="-19505"/>
+                  <a:pt x="1171834" y="0"/>
+                </a:cubicBezTo>
+                <a:cubicBezTo>
+                  <a:pt x="1439209" y="19505"/>
+                  <a:pt x="1744369" y="9790"/>
+                  <a:pt x="1887955" y="0"/>
+                </a:cubicBezTo>
+                <a:cubicBezTo>
+                  <a:pt x="2031541" y="-9790"/>
+                  <a:pt x="2346378" y="21240"/>
+                  <a:pt x="2506423" y="0"/>
+                </a:cubicBezTo>
+                <a:cubicBezTo>
+                  <a:pt x="2666468" y="-21240"/>
+                  <a:pt x="2990257" y="30414"/>
+                  <a:pt x="3255095" y="0"/>
+                </a:cubicBezTo>
+                <a:cubicBezTo>
+                  <a:pt x="3254831" y="4493"/>
+                  <a:pt x="3255479" y="9472"/>
+                  <a:pt x="3255095" y="18288"/>
+                </a:cubicBezTo>
+                <a:cubicBezTo>
+                  <a:pt x="3120743" y="16690"/>
+                  <a:pt x="2759628" y="42462"/>
+                  <a:pt x="2604076" y="18288"/>
+                </a:cubicBezTo>
+                <a:cubicBezTo>
+                  <a:pt x="2448524" y="-5886"/>
+                  <a:pt x="2184336" y="19599"/>
+                  <a:pt x="1887955" y="18288"/>
+                </a:cubicBezTo>
+                <a:cubicBezTo>
+                  <a:pt x="1591574" y="16977"/>
+                  <a:pt x="1548845" y="6870"/>
+                  <a:pt x="1334589" y="18288"/>
+                </a:cubicBezTo>
+                <a:cubicBezTo>
+                  <a:pt x="1120333" y="29706"/>
+                  <a:pt x="996014" y="9662"/>
+                  <a:pt x="683570" y="18288"/>
+                </a:cubicBezTo>
+                <a:cubicBezTo>
+                  <a:pt x="371126" y="26914"/>
+                  <a:pt x="198687" y="16167"/>
+                  <a:pt x="0" y="18288"/>
+                </a:cubicBezTo>
+                <a:cubicBezTo>
+                  <a:pt x="843" y="9577"/>
+                  <a:pt x="371" y="6900"/>
+                  <a:pt x="0" y="0"/>
+                </a:cubicBezTo>
+                <a:close/>
+              </a:path>
+            </a:pathLst>
+          </a:custGeom>
+          <a:solidFill>
+            <a:schemeClr val="accent2"/>
+          </a:solidFill>
+          <a:ln w="38100" cap="rnd">
+            <a:solidFill>
+              <a:schemeClr val="accent2"/>
+            </a:solidFill>
+            <a:round/>
+            <a:extLst>
+              <a:ext uri="{C807C97D-BFC1-408E-A445-0C87EB9F89A2}">
+                <ask:lineSketchStyleProps xmlns:ask="http://schemas.microsoft.com/office/drawing/2018/sketchyshapes" sd="1219033472">
+                  <a:prstGeom prst="rect">
+                    <a:avLst/>
+                  </a:prstGeom>
+                  <ask:type>
+                    <ask:lineSketchFreehand/>
+                  </ask:type>
+                </ask:lineSketchStyleProps>
+              </a:ext>
+            </a:extLst>
+          </a:ln>
+        </p:spPr>
+        <p:style>
+          <a:lnRef idx="2">
+            <a:schemeClr val="accent1">
+              <a:shade val="50000"/>
+            </a:schemeClr>
+          </a:lnRef>
+          <a:fillRef idx="1">
+            <a:schemeClr val="accent1"/>
+          </a:fillRef>
+          <a:effectRef idx="0">
+            <a:schemeClr val="accent1"/>
+          </a:effectRef>
+          <a:fontRef idx="minor">
+            <a:schemeClr val="lt1"/>
+          </a:fontRef>
+        </p:style>
+        <p:txBody>
+          <a:bodyPr rtlCol="0" anchor="ctr"/>
+          <a:lstStyle/>
+          <a:p>
+            <a:pPr algn="ctr"/>
+            <a:endParaRPr lang="en-US"/>
+          </a:p>
+        </p:txBody>
+      </p:sp>
+      <p:sp>
+        <p:nvSpPr>
+          <p:cNvPr id="3" name="Content Placeholder 2">
+            <a:extLst>
+              <a:ext uri="{FF2B5EF4-FFF2-40B4-BE49-F238E27FC236}">
+                <a16:creationId xmlns:a16="http://schemas.microsoft.com/office/drawing/2014/main" id="{8A8C5258-3261-3BCA-56C3-F73156419609}"/>
+              </a:ext>
+            </a:extLst>
+          </p:cNvPr>
+          <p:cNvSpPr>
+            <a:spLocks noGrp="1"/>
+          </p:cNvSpPr>
+          <p:nvPr>
+            <p:ph idx="1"/>
+          </p:nvPr>
+        </p:nvSpPr>
+        <p:spPr>
+          <a:xfrm>
+            <a:off x="630936" y="2660904"/>
+            <a:ext cx="5345322" cy="4197096"/>
+          </a:xfrm>
+        </p:spPr>
+        <p:txBody>
+          <a:bodyPr anchor="t">
+            <a:normAutofit fontScale="62500" lnSpcReduction="20000"/>
+          </a:bodyPr>
+          <a:lstStyle/>
+          <a:p>
+            <a:r>
+              <a:rPr lang="en-AU" dirty="0"/>
+              <a:t>Provide </a:t>
+            </a:r>
+            <a:r>
+              <a:rPr lang="en-AU" b="1" dirty="0"/>
+              <a:t>5+ steps</a:t>
+            </a:r>
+            <a:r>
+              <a:rPr lang="en-AU" dirty="0"/>
+              <a:t> of cleaning, exploring, transforming project data</a:t>
+            </a:r>
+          </a:p>
+          <a:p>
+            <a:endParaRPr lang="en-AU" dirty="0"/>
+          </a:p>
+          <a:p>
+            <a:r>
+              <a:rPr lang="en-AU" dirty="0"/>
+              <a:t>At least </a:t>
+            </a:r>
+            <a:r>
+              <a:rPr lang="en-AU" b="1" dirty="0"/>
+              <a:t>2 steps</a:t>
+            </a:r>
+            <a:r>
+              <a:rPr lang="en-AU" dirty="0"/>
+              <a:t> use pipes (%&gt;%)</a:t>
+            </a:r>
+          </a:p>
+          <a:p>
+            <a:endParaRPr lang="en-AU" dirty="0"/>
+          </a:p>
+          <a:p>
+            <a:r>
+              <a:rPr lang="en-AU" b="1" dirty="0"/>
+              <a:t>3+ steps</a:t>
+            </a:r>
+            <a:r>
+              <a:rPr lang="en-AU" dirty="0"/>
+              <a:t> must address </a:t>
+            </a:r>
+            <a:r>
+              <a:rPr lang="en-AU" dirty="0" err="1"/>
+              <a:t>Zuur</a:t>
+            </a:r>
+            <a:r>
+              <a:rPr lang="en-AU" dirty="0"/>
+              <a:t> et al. (2010) checks:</a:t>
+            </a:r>
+          </a:p>
+          <a:p>
+            <a:pPr lvl="1"/>
+            <a:r>
+              <a:rPr lang="en-AU" dirty="0"/>
+              <a:t>Outliers / NA detection</a:t>
+            </a:r>
+          </a:p>
+          <a:p>
+            <a:pPr lvl="1"/>
+            <a:r>
+              <a:rPr lang="en-AU" dirty="0"/>
+              <a:t>Homogeneity of variance</a:t>
+            </a:r>
+          </a:p>
+          <a:p>
+            <a:pPr lvl="1"/>
+            <a:r>
+              <a:rPr lang="en-AU" dirty="0"/>
+              <a:t>Normality</a:t>
+            </a:r>
+          </a:p>
+          <a:p>
+            <a:pPr lvl="1"/>
+            <a:r>
+              <a:rPr lang="en-AU" dirty="0"/>
+              <a:t>Zero inflation</a:t>
+            </a:r>
+          </a:p>
+          <a:p>
+            <a:pPr lvl="1"/>
+            <a:r>
+              <a:rPr lang="en-AU" dirty="0"/>
+              <a:t>Y–X relationships</a:t>
+            </a:r>
+          </a:p>
+          <a:p>
+            <a:pPr marL="457200" lvl="1" indent="0">
+              <a:buNone/>
+            </a:pPr>
+            <a:endParaRPr lang="en-AU" dirty="0"/>
+          </a:p>
+          <a:p>
+            <a:r>
+              <a:rPr lang="en-AU" dirty="0"/>
+              <a:t>For each step, explain:</a:t>
+            </a:r>
+          </a:p>
+          <a:p>
+            <a:pPr lvl="1">
+              <a:buFont typeface="+mj-lt"/>
+              <a:buAutoNum type="arabicPeriod"/>
+            </a:pPr>
+            <a:r>
+              <a:rPr lang="en-AU" dirty="0"/>
+              <a:t>Initial data issue/check &amp; related </a:t>
+            </a:r>
+            <a:r>
+              <a:rPr lang="en-AU" dirty="0" err="1"/>
+              <a:t>Zuur</a:t>
+            </a:r>
+            <a:r>
+              <a:rPr lang="en-AU" dirty="0"/>
+              <a:t> step</a:t>
+            </a:r>
+          </a:p>
+          <a:p>
+            <a:pPr lvl="1">
+              <a:buFont typeface="+mj-lt"/>
+              <a:buAutoNum type="arabicPeriod"/>
+            </a:pPr>
+            <a:r>
+              <a:rPr lang="en-AU" dirty="0"/>
+              <a:t>What the code achieves</a:t>
+            </a:r>
+          </a:p>
+          <a:p>
+            <a:pPr lvl="1">
+              <a:buFont typeface="+mj-lt"/>
+              <a:buAutoNum type="arabicPeriod"/>
+            </a:pPr>
+            <a:r>
+              <a:rPr lang="en-AU" dirty="0"/>
+              <a:t>Show evidence the data is cleaner (e.g., plots, tables)</a:t>
+            </a:r>
+          </a:p>
+          <a:p>
+            <a:endParaRPr lang="en-AU" sz="1700" dirty="0"/>
+          </a:p>
+        </p:txBody>
+      </p:sp>
+    </p:spTree>
+    <p:extLst>
+      <p:ext uri="{BB962C8B-B14F-4D97-AF65-F5344CB8AC3E}">
+        <p14:creationId xmlns:p14="http://schemas.microsoft.com/office/powerpoint/2010/main" val="476983938"/>
       </p:ext>
     </p:extLst>
   </p:cSld>
